--- a/html/COMP-_L1.3_Lecture.pptx
+++ b/html/COMP-_L1.3_Lecture.pptx
@@ -864,6 +864,214 @@
       <p:sp>
         <p:nvSpPr>
           <p:cNvPr id="11" name=""/>
+          <p:cNvSpPr/>
+          <p:nvPr/>
+        </p:nvSpPr>
+        <p:spPr>
+          <a:xfrm>
+            <a:off x="838080" y="5838480"/>
+            <a:ext cx="114480" cy="114840"/>
+          </a:xfrm>
+          <a:custGeom>
+            <a:avLst/>
+            <a:gdLst/>
+            <a:ahLst/>
+            <a:rect l="0" t="0" r="r" b="b"/>
+            <a:pathLst>
+              <a:path w="318" h="319">
+                <a:moveTo>
+                  <a:pt x="318" y="160"/>
+                </a:moveTo>
+                <a:cubicBezTo>
+                  <a:pt x="318" y="171"/>
+                  <a:pt x="317" y="181"/>
+                  <a:pt x="315" y="191"/>
+                </a:cubicBezTo>
+                <a:cubicBezTo>
+                  <a:pt x="313" y="201"/>
+                  <a:pt x="310" y="211"/>
+                  <a:pt x="306" y="221"/>
+                </a:cubicBezTo>
+                <a:cubicBezTo>
+                  <a:pt x="302" y="231"/>
+                  <a:pt x="297" y="240"/>
+                  <a:pt x="292" y="248"/>
+                </a:cubicBezTo>
+                <a:cubicBezTo>
+                  <a:pt x="286" y="257"/>
+                  <a:pt x="279" y="265"/>
+                  <a:pt x="272" y="272"/>
+                </a:cubicBezTo>
+                <a:cubicBezTo>
+                  <a:pt x="264" y="280"/>
+                  <a:pt x="256" y="286"/>
+                  <a:pt x="248" y="292"/>
+                </a:cubicBezTo>
+                <a:cubicBezTo>
+                  <a:pt x="239" y="298"/>
+                  <a:pt x="230" y="303"/>
+                  <a:pt x="220" y="307"/>
+                </a:cubicBezTo>
+                <a:cubicBezTo>
+                  <a:pt x="211" y="311"/>
+                  <a:pt x="201" y="314"/>
+                  <a:pt x="191" y="316"/>
+                </a:cubicBezTo>
+                <a:cubicBezTo>
+                  <a:pt x="180" y="318"/>
+                  <a:pt x="170" y="319"/>
+                  <a:pt x="160" y="319"/>
+                </a:cubicBezTo>
+                <a:cubicBezTo>
+                  <a:pt x="149" y="319"/>
+                  <a:pt x="139" y="318"/>
+                  <a:pt x="129" y="316"/>
+                </a:cubicBezTo>
+                <a:cubicBezTo>
+                  <a:pt x="118" y="314"/>
+                  <a:pt x="108" y="311"/>
+                  <a:pt x="99" y="307"/>
+                </a:cubicBezTo>
+                <a:cubicBezTo>
+                  <a:pt x="89" y="303"/>
+                  <a:pt x="80" y="298"/>
+                  <a:pt x="71" y="292"/>
+                </a:cubicBezTo>
+                <a:cubicBezTo>
+                  <a:pt x="63" y="286"/>
+                  <a:pt x="55" y="280"/>
+                  <a:pt x="46" y="272"/>
+                </a:cubicBezTo>
+                <a:cubicBezTo>
+                  <a:pt x="39" y="265"/>
+                  <a:pt x="32" y="257"/>
+                  <a:pt x="27" y="248"/>
+                </a:cubicBezTo>
+                <a:cubicBezTo>
+                  <a:pt x="21" y="240"/>
+                  <a:pt x="16" y="231"/>
+                  <a:pt x="12" y="221"/>
+                </a:cubicBezTo>
+                <a:cubicBezTo>
+                  <a:pt x="8" y="211"/>
+                  <a:pt x="5" y="201"/>
+                  <a:pt x="3" y="191"/>
+                </a:cubicBezTo>
+                <a:cubicBezTo>
+                  <a:pt x="1" y="181"/>
+                  <a:pt x="0" y="171"/>
+                  <a:pt x="0" y="160"/>
+                </a:cubicBezTo>
+                <a:cubicBezTo>
+                  <a:pt x="0" y="150"/>
+                  <a:pt x="1" y="139"/>
+                  <a:pt x="3" y="129"/>
+                </a:cubicBezTo>
+                <a:cubicBezTo>
+                  <a:pt x="5" y="119"/>
+                  <a:pt x="8" y="109"/>
+                  <a:pt x="12" y="98"/>
+                </a:cubicBezTo>
+                <a:cubicBezTo>
+                  <a:pt x="16" y="89"/>
+                  <a:pt x="21" y="80"/>
+                  <a:pt x="27" y="71"/>
+                </a:cubicBezTo>
+                <a:cubicBezTo>
+                  <a:pt x="32" y="62"/>
+                  <a:pt x="39" y="54"/>
+                  <a:pt x="46" y="47"/>
+                </a:cubicBezTo>
+                <a:cubicBezTo>
+                  <a:pt x="55" y="40"/>
+                  <a:pt x="63" y="33"/>
+                  <a:pt x="71" y="27"/>
+                </a:cubicBezTo>
+                <a:cubicBezTo>
+                  <a:pt x="80" y="21"/>
+                  <a:pt x="89" y="17"/>
+                  <a:pt x="99" y="13"/>
+                </a:cubicBezTo>
+                <a:cubicBezTo>
+                  <a:pt x="108" y="9"/>
+                  <a:pt x="118" y="6"/>
+                  <a:pt x="129" y="4"/>
+                </a:cubicBezTo>
+                <a:cubicBezTo>
+                  <a:pt x="139" y="1"/>
+                  <a:pt x="149" y="0"/>
+                  <a:pt x="160" y="0"/>
+                </a:cubicBezTo>
+                <a:cubicBezTo>
+                  <a:pt x="170" y="0"/>
+                  <a:pt x="180" y="1"/>
+                  <a:pt x="191" y="4"/>
+                </a:cubicBezTo>
+                <a:cubicBezTo>
+                  <a:pt x="201" y="6"/>
+                  <a:pt x="211" y="9"/>
+                  <a:pt x="220" y="13"/>
+                </a:cubicBezTo>
+                <a:cubicBezTo>
+                  <a:pt x="230" y="17"/>
+                  <a:pt x="239" y="21"/>
+                  <a:pt x="248" y="27"/>
+                </a:cubicBezTo>
+                <a:cubicBezTo>
+                  <a:pt x="256" y="33"/>
+                  <a:pt x="264" y="40"/>
+                  <a:pt x="272" y="47"/>
+                </a:cubicBezTo>
+                <a:cubicBezTo>
+                  <a:pt x="279" y="54"/>
+                  <a:pt x="286" y="62"/>
+                  <a:pt x="292" y="71"/>
+                </a:cubicBezTo>
+                <a:cubicBezTo>
+                  <a:pt x="297" y="80"/>
+                  <a:pt x="302" y="89"/>
+                  <a:pt x="306" y="98"/>
+                </a:cubicBezTo>
+                <a:cubicBezTo>
+                  <a:pt x="310" y="109"/>
+                  <a:pt x="313" y="119"/>
+                  <a:pt x="315" y="129"/>
+                </a:cubicBezTo>
+                <a:cubicBezTo>
+                  <a:pt x="317" y="139"/>
+                  <a:pt x="318" y="150"/>
+                  <a:pt x="318" y="160"/>
+                </a:cubicBezTo>
+                <a:close/>
+              </a:path>
+            </a:pathLst>
+          </a:custGeom>
+          <a:solidFill>
+            <a:srgbClr val="000000"/>
+          </a:solidFill>
+          <a:ln w="0">
+            <a:noFill/>
+          </a:ln>
+        </p:spPr>
+        <p:txBody>
+          <a:bodyPr lIns="0" rIns="0" tIns="0" bIns="0" anchor="t">
+            <a:noAutofit/>
+          </a:bodyPr>
+          <a:p>
+            <a:endParaRPr b="0" lang="en-US" sz="2400" strike="noStrike" u="none">
+              <a:solidFill>
+                <a:srgbClr val="ffffff"/>
+              </a:solidFill>
+              <a:effectLst/>
+              <a:uFillTx/>
+              <a:latin typeface="Times New Roman"/>
+            </a:endParaRPr>
+          </a:p>
+        </p:txBody>
+      </p:sp>
+      <p:sp>
+        <p:nvSpPr>
+          <p:cNvPr id="12" name=""/>
           <p:cNvSpPr txBox="1"/>
           <p:nvPr/>
         </p:nvSpPr>
@@ -898,6 +1106,53 @@
               <a:t>A Quiet Revolution in Science</a:t>
             </a:r>
             <a:endParaRPr b="0" lang="en-US" sz="3200" strike="noStrike" u="none">
+              <a:solidFill>
+                <a:srgbClr val="000000"/>
+              </a:solidFill>
+              <a:effectLst/>
+              <a:uFillTx/>
+              <a:latin typeface="Times New Roman"/>
+            </a:endParaRPr>
+          </a:p>
+        </p:txBody>
+      </p:sp>
+      <p:sp>
+        <p:nvSpPr>
+          <p:cNvPr id="13" name=""/>
+          <p:cNvSpPr txBox="1"/>
+          <p:nvPr/>
+        </p:nvSpPr>
+        <p:spPr>
+          <a:xfrm>
+            <a:off x="1028520" y="5790600"/>
+            <a:ext cx="872280" cy="210600"/>
+          </a:xfrm>
+          <a:prstGeom prst="rect">
+            <a:avLst/>
+          </a:prstGeom>
+          <a:noFill/>
+          <a:ln w="0">
+            <a:noFill/>
+          </a:ln>
+        </p:spPr>
+        <p:txBody>
+          <a:bodyPr wrap="none" lIns="0" rIns="0" tIns="0" bIns="0" anchor="t">
+            <a:spAutoFit/>
+          </a:bodyPr>
+          <a:p>
+            <a:r>
+              <a:rPr b="0" lang="en-US" sz="1400" strike="noStrike" u="none">
+                <a:solidFill>
+                  <a:srgbClr val="000000"/>
+                </a:solidFill>
+                <a:effectLst/>
+                <a:uFillTx/>
+                <a:latin typeface="LucidaGrande"/>
+                <a:ea typeface="LucidaGrande"/>
+              </a:rPr>
+              <a:t>Recording</a:t>
+            </a:r>
+            <a:endParaRPr b="0" lang="en-US" sz="1400" strike="noStrike" u="none">
               <a:solidFill>
                 <a:srgbClr val="000000"/>
               </a:solidFill>
@@ -940,7 +1195,7 @@
       </p:grpSpPr>
       <p:sp>
         <p:nvSpPr>
-          <p:cNvPr id="201" name=""/>
+          <p:cNvPr id="203" name=""/>
           <p:cNvSpPr/>
           <p:nvPr/>
         </p:nvSpPr>
@@ -1000,7 +1255,7 @@
       </p:sp>
       <p:sp>
         <p:nvSpPr>
-          <p:cNvPr id="202" name=""/>
+          <p:cNvPr id="204" name=""/>
           <p:cNvSpPr/>
           <p:nvPr/>
         </p:nvSpPr>
@@ -1060,7 +1315,7 @@
       </p:sp>
       <p:sp>
         <p:nvSpPr>
-          <p:cNvPr id="203" name=""/>
+          <p:cNvPr id="205" name=""/>
           <p:cNvSpPr/>
           <p:nvPr/>
         </p:nvSpPr>
@@ -1120,7 +1375,7 @@
       </p:sp>
       <p:pic>
         <p:nvPicPr>
-          <p:cNvPr id="204" name="" descr=""/>
+          <p:cNvPr id="206" name="" descr=""/>
           <p:cNvPicPr/>
           <p:nvPr/>
         </p:nvPicPr>
@@ -1144,7 +1399,7 @@
       </p:pic>
       <p:sp>
         <p:nvSpPr>
-          <p:cNvPr id="205" name=""/>
+          <p:cNvPr id="207" name=""/>
           <p:cNvSpPr txBox="1"/>
           <p:nvPr/>
         </p:nvSpPr>
@@ -1191,7 +1446,7 @@
       </p:sp>
       <p:sp>
         <p:nvSpPr>
-          <p:cNvPr id="206" name=""/>
+          <p:cNvPr id="208" name=""/>
           <p:cNvSpPr/>
           <p:nvPr/>
         </p:nvSpPr>
@@ -1319,7 +1574,7 @@
       </p:sp>
       <p:sp>
         <p:nvSpPr>
-          <p:cNvPr id="207" name=""/>
+          <p:cNvPr id="209" name=""/>
           <p:cNvSpPr txBox="1"/>
           <p:nvPr/>
         </p:nvSpPr>
@@ -1366,7 +1621,7 @@
       </p:sp>
       <p:sp>
         <p:nvSpPr>
-          <p:cNvPr id="208" name=""/>
+          <p:cNvPr id="210" name=""/>
           <p:cNvSpPr txBox="1"/>
           <p:nvPr/>
         </p:nvSpPr>
@@ -1425,7 +1680,7 @@
       </p:sp>
       <p:sp>
         <p:nvSpPr>
-          <p:cNvPr id="209" name=""/>
+          <p:cNvPr id="211" name=""/>
           <p:cNvSpPr txBox="1"/>
           <p:nvPr/>
         </p:nvSpPr>
@@ -1472,7 +1727,7 @@
       </p:sp>
       <p:sp>
         <p:nvSpPr>
-          <p:cNvPr id="210" name=""/>
+          <p:cNvPr id="212" name=""/>
           <p:cNvSpPr txBox="1"/>
           <p:nvPr/>
         </p:nvSpPr>
@@ -1519,7 +1774,7 @@
       </p:sp>
       <p:sp>
         <p:nvSpPr>
-          <p:cNvPr id="211" name=""/>
+          <p:cNvPr id="213" name=""/>
           <p:cNvSpPr/>
           <p:nvPr/>
         </p:nvSpPr>
@@ -1647,7 +1902,7 @@
       </p:sp>
       <p:sp>
         <p:nvSpPr>
-          <p:cNvPr id="212" name=""/>
+          <p:cNvPr id="214" name=""/>
           <p:cNvSpPr txBox="1"/>
           <p:nvPr/>
         </p:nvSpPr>
@@ -1694,7 +1949,7 @@
       </p:sp>
       <p:sp>
         <p:nvSpPr>
-          <p:cNvPr id="213" name=""/>
+          <p:cNvPr id="215" name=""/>
           <p:cNvSpPr txBox="1"/>
           <p:nvPr/>
         </p:nvSpPr>
@@ -1753,7 +2008,7 @@
       </p:sp>
       <p:sp>
         <p:nvSpPr>
-          <p:cNvPr id="214" name=""/>
+          <p:cNvPr id="216" name=""/>
           <p:cNvSpPr txBox="1"/>
           <p:nvPr/>
         </p:nvSpPr>
@@ -1800,7 +2055,7 @@
       </p:sp>
       <p:sp>
         <p:nvSpPr>
-          <p:cNvPr id="215" name=""/>
+          <p:cNvPr id="217" name=""/>
           <p:cNvSpPr/>
           <p:nvPr/>
         </p:nvSpPr>
@@ -1928,7 +2183,7 @@
       </p:sp>
       <p:sp>
         <p:nvSpPr>
-          <p:cNvPr id="216" name=""/>
+          <p:cNvPr id="218" name=""/>
           <p:cNvSpPr txBox="1"/>
           <p:nvPr/>
         </p:nvSpPr>
@@ -1975,7 +2230,7 @@
       </p:sp>
       <p:sp>
         <p:nvSpPr>
-          <p:cNvPr id="217" name=""/>
+          <p:cNvPr id="219" name=""/>
           <p:cNvSpPr txBox="1"/>
           <p:nvPr/>
         </p:nvSpPr>
@@ -2034,7 +2289,7 @@
       </p:sp>
       <p:sp>
         <p:nvSpPr>
-          <p:cNvPr id="218" name=""/>
+          <p:cNvPr id="220" name=""/>
           <p:cNvSpPr txBox="1"/>
           <p:nvPr/>
         </p:nvSpPr>
@@ -2081,7 +2336,7 @@
       </p:sp>
       <p:sp>
         <p:nvSpPr>
-          <p:cNvPr id="219" name=""/>
+          <p:cNvPr id="221" name=""/>
           <p:cNvSpPr txBox="1"/>
           <p:nvPr/>
         </p:nvSpPr>
@@ -2128,7 +2383,7 @@
       </p:sp>
       <p:sp>
         <p:nvSpPr>
-          <p:cNvPr id="220" name=""/>
+          <p:cNvPr id="222" name=""/>
           <p:cNvSpPr txBox="1"/>
           <p:nvPr/>
         </p:nvSpPr>
@@ -2175,7 +2430,7 @@
       </p:sp>
       <p:sp>
         <p:nvSpPr>
-          <p:cNvPr id="221" name=""/>
+          <p:cNvPr id="223" name=""/>
           <p:cNvSpPr txBox="1"/>
           <p:nvPr/>
         </p:nvSpPr>
@@ -2222,7 +2477,7 @@
       </p:sp>
       <p:sp>
         <p:nvSpPr>
-          <p:cNvPr id="222" name=""/>
+          <p:cNvPr id="224" name=""/>
           <p:cNvSpPr/>
           <p:nvPr/>
         </p:nvSpPr>
@@ -2438,7 +2693,7 @@
       </p:sp>
       <p:sp>
         <p:nvSpPr>
-          <p:cNvPr id="223" name=""/>
+          <p:cNvPr id="225" name=""/>
           <p:cNvSpPr txBox="1"/>
           <p:nvPr/>
         </p:nvSpPr>
@@ -2485,7 +2740,7 @@
       </p:sp>
       <p:sp>
         <p:nvSpPr>
-          <p:cNvPr id="224" name=""/>
+          <p:cNvPr id="226" name=""/>
           <p:cNvSpPr txBox="1"/>
           <p:nvPr/>
         </p:nvSpPr>
@@ -2562,7 +2817,7 @@
       </p:grpSpPr>
       <p:sp>
         <p:nvSpPr>
-          <p:cNvPr id="225" name=""/>
+          <p:cNvPr id="227" name=""/>
           <p:cNvSpPr/>
           <p:nvPr/>
         </p:nvSpPr>
@@ -2622,7 +2877,7 @@
       </p:sp>
       <p:sp>
         <p:nvSpPr>
-          <p:cNvPr id="226" name=""/>
+          <p:cNvPr id="228" name=""/>
           <p:cNvSpPr/>
           <p:nvPr/>
         </p:nvSpPr>
@@ -2682,7 +2937,7 @@
       </p:sp>
       <p:sp>
         <p:nvSpPr>
-          <p:cNvPr id="227" name=""/>
+          <p:cNvPr id="229" name=""/>
           <p:cNvSpPr/>
           <p:nvPr/>
         </p:nvSpPr>
@@ -2742,7 +2997,7 @@
       </p:sp>
       <p:pic>
         <p:nvPicPr>
-          <p:cNvPr id="228" name="" descr=""/>
+          <p:cNvPr id="230" name="" descr=""/>
           <p:cNvPicPr/>
           <p:nvPr/>
         </p:nvPicPr>
@@ -2766,7 +3021,7 @@
       </p:pic>
       <p:sp>
         <p:nvSpPr>
-          <p:cNvPr id="229" name=""/>
+          <p:cNvPr id="231" name=""/>
           <p:cNvSpPr txBox="1"/>
           <p:nvPr/>
         </p:nvSpPr>
@@ -2813,7 +3068,7 @@
       </p:sp>
       <p:sp>
         <p:nvSpPr>
-          <p:cNvPr id="230" name=""/>
+          <p:cNvPr id="232" name=""/>
           <p:cNvSpPr/>
           <p:nvPr/>
         </p:nvSpPr>
@@ -2941,7 +3196,7 @@
       </p:sp>
       <p:sp>
         <p:nvSpPr>
-          <p:cNvPr id="231" name=""/>
+          <p:cNvPr id="233" name=""/>
           <p:cNvSpPr txBox="1"/>
           <p:nvPr/>
         </p:nvSpPr>
@@ -2988,7 +3243,7 @@
       </p:sp>
       <p:sp>
         <p:nvSpPr>
-          <p:cNvPr id="232" name=""/>
+          <p:cNvPr id="234" name=""/>
           <p:cNvSpPr txBox="1"/>
           <p:nvPr/>
         </p:nvSpPr>
@@ -3047,7 +3302,7 @@
       </p:sp>
       <p:sp>
         <p:nvSpPr>
-          <p:cNvPr id="233" name=""/>
+          <p:cNvPr id="235" name=""/>
           <p:cNvSpPr/>
           <p:nvPr/>
         </p:nvSpPr>
@@ -3175,7 +3430,7 @@
       </p:sp>
       <p:sp>
         <p:nvSpPr>
-          <p:cNvPr id="234" name=""/>
+          <p:cNvPr id="236" name=""/>
           <p:cNvSpPr txBox="1"/>
           <p:nvPr/>
         </p:nvSpPr>
@@ -3222,7 +3477,7 @@
       </p:sp>
       <p:sp>
         <p:nvSpPr>
-          <p:cNvPr id="235" name=""/>
+          <p:cNvPr id="237" name=""/>
           <p:cNvSpPr/>
           <p:nvPr/>
         </p:nvSpPr>
@@ -3350,7 +3605,7 @@
       </p:sp>
       <p:sp>
         <p:nvSpPr>
-          <p:cNvPr id="236" name=""/>
+          <p:cNvPr id="238" name=""/>
           <p:cNvSpPr txBox="1"/>
           <p:nvPr/>
         </p:nvSpPr>
@@ -3409,7 +3664,7 @@
       </p:sp>
       <p:sp>
         <p:nvSpPr>
-          <p:cNvPr id="237" name=""/>
+          <p:cNvPr id="239" name=""/>
           <p:cNvSpPr txBox="1"/>
           <p:nvPr/>
         </p:nvSpPr>
@@ -3468,7 +3723,7 @@
       </p:sp>
       <p:sp>
         <p:nvSpPr>
-          <p:cNvPr id="238" name=""/>
+          <p:cNvPr id="240" name=""/>
           <p:cNvSpPr txBox="1"/>
           <p:nvPr/>
         </p:nvSpPr>
@@ -3515,7 +3770,7 @@
       </p:sp>
       <p:sp>
         <p:nvSpPr>
-          <p:cNvPr id="239" name=""/>
+          <p:cNvPr id="241" name=""/>
           <p:cNvSpPr txBox="1"/>
           <p:nvPr/>
         </p:nvSpPr>
@@ -3562,7 +3817,7 @@
       </p:sp>
       <p:sp>
         <p:nvSpPr>
-          <p:cNvPr id="240" name=""/>
+          <p:cNvPr id="242" name=""/>
           <p:cNvSpPr/>
           <p:nvPr/>
         </p:nvSpPr>
@@ -3778,7 +4033,7 @@
       </p:sp>
       <p:sp>
         <p:nvSpPr>
-          <p:cNvPr id="241" name=""/>
+          <p:cNvPr id="243" name=""/>
           <p:cNvSpPr txBox="1"/>
           <p:nvPr/>
         </p:nvSpPr>
@@ -3825,7 +4080,7 @@
       </p:sp>
       <p:sp>
         <p:nvSpPr>
-          <p:cNvPr id="242" name=""/>
+          <p:cNvPr id="244" name=""/>
           <p:cNvSpPr txBox="1"/>
           <p:nvPr/>
         </p:nvSpPr>
@@ -3902,7 +4157,7 @@
       </p:grpSpPr>
       <p:sp>
         <p:nvSpPr>
-          <p:cNvPr id="243" name=""/>
+          <p:cNvPr id="245" name=""/>
           <p:cNvSpPr/>
           <p:nvPr/>
         </p:nvSpPr>
@@ -3962,7 +4217,7 @@
       </p:sp>
       <p:sp>
         <p:nvSpPr>
-          <p:cNvPr id="244" name=""/>
+          <p:cNvPr id="246" name=""/>
           <p:cNvSpPr/>
           <p:nvPr/>
         </p:nvSpPr>
@@ -4022,7 +4277,7 @@
       </p:sp>
       <p:sp>
         <p:nvSpPr>
-          <p:cNvPr id="245" name=""/>
+          <p:cNvPr id="247" name=""/>
           <p:cNvSpPr/>
           <p:nvPr/>
         </p:nvSpPr>
@@ -4082,7 +4337,7 @@
       </p:sp>
       <p:pic>
         <p:nvPicPr>
-          <p:cNvPr id="246" name="" descr=""/>
+          <p:cNvPr id="248" name="" descr=""/>
           <p:cNvPicPr/>
           <p:nvPr/>
         </p:nvPicPr>
@@ -4106,7 +4361,7 @@
       </p:pic>
       <p:sp>
         <p:nvSpPr>
-          <p:cNvPr id="247" name=""/>
+          <p:cNvPr id="249" name=""/>
           <p:cNvSpPr/>
           <p:nvPr/>
         </p:nvSpPr>
@@ -4234,7 +4489,7 @@
       </p:sp>
       <p:sp>
         <p:nvSpPr>
-          <p:cNvPr id="248" name=""/>
+          <p:cNvPr id="250" name=""/>
           <p:cNvSpPr txBox="1"/>
           <p:nvPr/>
         </p:nvSpPr>
@@ -4281,7 +4536,7 @@
       </p:sp>
       <p:sp>
         <p:nvSpPr>
-          <p:cNvPr id="249" name=""/>
+          <p:cNvPr id="251" name=""/>
           <p:cNvSpPr txBox="1"/>
           <p:nvPr/>
         </p:nvSpPr>
@@ -4340,7 +4595,7 @@
       </p:sp>
       <p:sp>
         <p:nvSpPr>
-          <p:cNvPr id="250" name=""/>
+          <p:cNvPr id="252" name=""/>
           <p:cNvSpPr/>
           <p:nvPr/>
         </p:nvSpPr>
@@ -4468,7 +4723,7 @@
       </p:sp>
       <p:sp>
         <p:nvSpPr>
-          <p:cNvPr id="251" name=""/>
+          <p:cNvPr id="253" name=""/>
           <p:cNvSpPr txBox="1"/>
           <p:nvPr/>
         </p:nvSpPr>
@@ -4515,7 +4770,7 @@
       </p:sp>
       <p:sp>
         <p:nvSpPr>
-          <p:cNvPr id="252" name=""/>
+          <p:cNvPr id="254" name=""/>
           <p:cNvSpPr/>
           <p:nvPr/>
         </p:nvSpPr>
@@ -4643,7 +4898,7 @@
       </p:sp>
       <p:sp>
         <p:nvSpPr>
-          <p:cNvPr id="253" name=""/>
+          <p:cNvPr id="255" name=""/>
           <p:cNvSpPr txBox="1"/>
           <p:nvPr/>
         </p:nvSpPr>
@@ -4702,7 +4957,7 @@
       </p:sp>
       <p:sp>
         <p:nvSpPr>
-          <p:cNvPr id="254" name=""/>
+          <p:cNvPr id="256" name=""/>
           <p:cNvSpPr txBox="1"/>
           <p:nvPr/>
         </p:nvSpPr>
@@ -4761,7 +5016,7 @@
       </p:sp>
       <p:sp>
         <p:nvSpPr>
-          <p:cNvPr id="255" name=""/>
+          <p:cNvPr id="257" name=""/>
           <p:cNvSpPr/>
           <p:nvPr/>
         </p:nvSpPr>
@@ -4889,7 +5144,7 @@
       </p:sp>
       <p:sp>
         <p:nvSpPr>
-          <p:cNvPr id="256" name=""/>
+          <p:cNvPr id="258" name=""/>
           <p:cNvSpPr txBox="1"/>
           <p:nvPr/>
         </p:nvSpPr>
@@ -4936,7 +5191,7 @@
       </p:sp>
       <p:sp>
         <p:nvSpPr>
-          <p:cNvPr id="257" name=""/>
+          <p:cNvPr id="259" name=""/>
           <p:cNvSpPr txBox="1"/>
           <p:nvPr/>
         </p:nvSpPr>
@@ -4995,7 +5250,7 @@
       </p:sp>
       <p:sp>
         <p:nvSpPr>
-          <p:cNvPr id="258" name=""/>
+          <p:cNvPr id="260" name=""/>
           <p:cNvSpPr txBox="1"/>
           <p:nvPr/>
         </p:nvSpPr>
@@ -5042,7 +5297,7 @@
       </p:sp>
       <p:sp>
         <p:nvSpPr>
-          <p:cNvPr id="259" name=""/>
+          <p:cNvPr id="261" name=""/>
           <p:cNvSpPr txBox="1"/>
           <p:nvPr/>
         </p:nvSpPr>
@@ -5089,7 +5344,7 @@
       </p:sp>
       <p:sp>
         <p:nvSpPr>
-          <p:cNvPr id="260" name=""/>
+          <p:cNvPr id="262" name=""/>
           <p:cNvSpPr/>
           <p:nvPr/>
         </p:nvSpPr>
@@ -5305,7 +5560,7 @@
       </p:sp>
       <p:sp>
         <p:nvSpPr>
-          <p:cNvPr id="261" name=""/>
+          <p:cNvPr id="263" name=""/>
           <p:cNvSpPr txBox="1"/>
           <p:nvPr/>
         </p:nvSpPr>
@@ -5352,7 +5607,7 @@
       </p:sp>
       <p:sp>
         <p:nvSpPr>
-          <p:cNvPr id="262" name=""/>
+          <p:cNvPr id="264" name=""/>
           <p:cNvSpPr txBox="1"/>
           <p:nvPr/>
         </p:nvSpPr>
@@ -5429,7 +5684,7 @@
       </p:grpSpPr>
       <p:sp>
         <p:nvSpPr>
-          <p:cNvPr id="263" name=""/>
+          <p:cNvPr id="265" name=""/>
           <p:cNvSpPr/>
           <p:nvPr/>
         </p:nvSpPr>
@@ -5489,7 +5744,7 @@
       </p:sp>
       <p:sp>
         <p:nvSpPr>
-          <p:cNvPr id="264" name=""/>
+          <p:cNvPr id="266" name=""/>
           <p:cNvSpPr/>
           <p:nvPr/>
         </p:nvSpPr>
@@ -5549,7 +5804,7 @@
       </p:sp>
       <p:sp>
         <p:nvSpPr>
-          <p:cNvPr id="265" name=""/>
+          <p:cNvPr id="267" name=""/>
           <p:cNvSpPr/>
           <p:nvPr/>
         </p:nvSpPr>
@@ -5609,7 +5864,7 @@
       </p:sp>
       <p:pic>
         <p:nvPicPr>
-          <p:cNvPr id="266" name="" descr=""/>
+          <p:cNvPr id="268" name="" descr=""/>
           <p:cNvPicPr/>
           <p:nvPr/>
         </p:nvPicPr>
@@ -5633,7 +5888,7 @@
       </p:pic>
       <p:sp>
         <p:nvSpPr>
-          <p:cNvPr id="267" name=""/>
+          <p:cNvPr id="269" name=""/>
           <p:cNvSpPr txBox="1"/>
           <p:nvPr/>
         </p:nvSpPr>
@@ -5680,7 +5935,7 @@
       </p:sp>
       <p:sp>
         <p:nvSpPr>
-          <p:cNvPr id="268" name=""/>
+          <p:cNvPr id="270" name=""/>
           <p:cNvSpPr/>
           <p:nvPr/>
         </p:nvSpPr>
@@ -5900,7 +6155,7 @@
       </p:sp>
       <p:sp>
         <p:nvSpPr>
-          <p:cNvPr id="269" name=""/>
+          <p:cNvPr id="271" name=""/>
           <p:cNvSpPr/>
           <p:nvPr/>
         </p:nvSpPr>
@@ -6119,7 +6374,7 @@
       </p:sp>
       <p:sp>
         <p:nvSpPr>
-          <p:cNvPr id="270" name=""/>
+          <p:cNvPr id="272" name=""/>
           <p:cNvSpPr txBox="1"/>
           <p:nvPr/>
         </p:nvSpPr>
@@ -6166,7 +6421,7 @@
       </p:sp>
       <p:sp>
         <p:nvSpPr>
-          <p:cNvPr id="271" name=""/>
+          <p:cNvPr id="273" name=""/>
           <p:cNvSpPr txBox="1"/>
           <p:nvPr/>
         </p:nvSpPr>
@@ -6213,7 +6468,7 @@
       </p:sp>
       <p:sp>
         <p:nvSpPr>
-          <p:cNvPr id="272" name=""/>
+          <p:cNvPr id="274" name=""/>
           <p:cNvSpPr txBox="1"/>
           <p:nvPr/>
         </p:nvSpPr>
@@ -6260,7 +6515,7 @@
       </p:sp>
       <p:sp>
         <p:nvSpPr>
-          <p:cNvPr id="273" name=""/>
+          <p:cNvPr id="275" name=""/>
           <p:cNvSpPr/>
           <p:nvPr/>
         </p:nvSpPr>
@@ -6480,7 +6735,7 @@
       </p:sp>
       <p:sp>
         <p:nvSpPr>
-          <p:cNvPr id="274" name=""/>
+          <p:cNvPr id="276" name=""/>
           <p:cNvSpPr/>
           <p:nvPr/>
         </p:nvSpPr>
@@ -6699,7 +6954,7 @@
       </p:sp>
       <p:sp>
         <p:nvSpPr>
-          <p:cNvPr id="275" name=""/>
+          <p:cNvPr id="277" name=""/>
           <p:cNvSpPr txBox="1"/>
           <p:nvPr/>
         </p:nvSpPr>
@@ -6746,7 +7001,7 @@
       </p:sp>
       <p:sp>
         <p:nvSpPr>
-          <p:cNvPr id="276" name=""/>
+          <p:cNvPr id="278" name=""/>
           <p:cNvSpPr txBox="1"/>
           <p:nvPr/>
         </p:nvSpPr>
@@ -6793,7 +7048,7 @@
       </p:sp>
       <p:sp>
         <p:nvSpPr>
-          <p:cNvPr id="277" name=""/>
+          <p:cNvPr id="279" name=""/>
           <p:cNvSpPr txBox="1"/>
           <p:nvPr/>
         </p:nvSpPr>
@@ -6840,7 +7095,7 @@
       </p:sp>
       <p:sp>
         <p:nvSpPr>
-          <p:cNvPr id="278" name=""/>
+          <p:cNvPr id="280" name=""/>
           <p:cNvSpPr/>
           <p:nvPr/>
         </p:nvSpPr>
@@ -7056,7 +7311,7 @@
       </p:sp>
       <p:sp>
         <p:nvSpPr>
-          <p:cNvPr id="279" name=""/>
+          <p:cNvPr id="281" name=""/>
           <p:cNvSpPr txBox="1"/>
           <p:nvPr/>
         </p:nvSpPr>
@@ -7103,7 +7358,7 @@
       </p:sp>
       <p:sp>
         <p:nvSpPr>
-          <p:cNvPr id="280" name=""/>
+          <p:cNvPr id="282" name=""/>
           <p:cNvSpPr txBox="1"/>
           <p:nvPr/>
         </p:nvSpPr>
@@ -7180,7 +7435,7 @@
       </p:grpSpPr>
       <p:sp>
         <p:nvSpPr>
-          <p:cNvPr id="281" name=""/>
+          <p:cNvPr id="283" name=""/>
           <p:cNvSpPr/>
           <p:nvPr/>
         </p:nvSpPr>
@@ -7240,7 +7495,7 @@
       </p:sp>
       <p:sp>
         <p:nvSpPr>
-          <p:cNvPr id="282" name=""/>
+          <p:cNvPr id="284" name=""/>
           <p:cNvSpPr/>
           <p:nvPr/>
         </p:nvSpPr>
@@ -7300,7 +7555,7 @@
       </p:sp>
       <p:sp>
         <p:nvSpPr>
-          <p:cNvPr id="283" name=""/>
+          <p:cNvPr id="285" name=""/>
           <p:cNvSpPr/>
           <p:nvPr/>
         </p:nvSpPr>
@@ -7360,7 +7615,7 @@
       </p:sp>
       <p:pic>
         <p:nvPicPr>
-          <p:cNvPr id="284" name="" descr=""/>
+          <p:cNvPr id="286" name="" descr=""/>
           <p:cNvPicPr/>
           <p:nvPr/>
         </p:nvPicPr>
@@ -7384,7 +7639,7 @@
       </p:pic>
       <p:sp>
         <p:nvSpPr>
-          <p:cNvPr id="285" name=""/>
+          <p:cNvPr id="287" name=""/>
           <p:cNvSpPr/>
           <p:nvPr/>
         </p:nvSpPr>
@@ -7512,7 +7767,7 @@
       </p:sp>
       <p:sp>
         <p:nvSpPr>
-          <p:cNvPr id="286" name=""/>
+          <p:cNvPr id="288" name=""/>
           <p:cNvSpPr txBox="1"/>
           <p:nvPr/>
         </p:nvSpPr>
@@ -7559,7 +7814,7 @@
       </p:sp>
       <p:sp>
         <p:nvSpPr>
-          <p:cNvPr id="287" name=""/>
+          <p:cNvPr id="289" name=""/>
           <p:cNvSpPr/>
           <p:nvPr/>
         </p:nvSpPr>
@@ -7687,7 +7942,7 @@
       </p:sp>
       <p:sp>
         <p:nvSpPr>
-          <p:cNvPr id="288" name=""/>
+          <p:cNvPr id="290" name=""/>
           <p:cNvSpPr txBox="1"/>
           <p:nvPr/>
         </p:nvSpPr>
@@ -7734,7 +7989,7 @@
       </p:sp>
       <p:sp>
         <p:nvSpPr>
-          <p:cNvPr id="289" name=""/>
+          <p:cNvPr id="291" name=""/>
           <p:cNvSpPr/>
           <p:nvPr/>
         </p:nvSpPr>
@@ -7862,7 +8117,7 @@
       </p:sp>
       <p:sp>
         <p:nvSpPr>
-          <p:cNvPr id="290" name=""/>
+          <p:cNvPr id="292" name=""/>
           <p:cNvSpPr txBox="1"/>
           <p:nvPr/>
         </p:nvSpPr>
@@ -7909,7 +8164,7 @@
       </p:sp>
       <p:sp>
         <p:nvSpPr>
-          <p:cNvPr id="291" name=""/>
+          <p:cNvPr id="293" name=""/>
           <p:cNvSpPr txBox="1"/>
           <p:nvPr/>
         </p:nvSpPr>
@@ -7956,7 +8211,7 @@
       </p:sp>
       <p:sp>
         <p:nvSpPr>
-          <p:cNvPr id="292" name=""/>
+          <p:cNvPr id="294" name=""/>
           <p:cNvSpPr txBox="1"/>
           <p:nvPr/>
         </p:nvSpPr>
@@ -8003,7 +8258,7 @@
       </p:sp>
       <p:sp>
         <p:nvSpPr>
-          <p:cNvPr id="293" name=""/>
+          <p:cNvPr id="295" name=""/>
           <p:cNvSpPr/>
           <p:nvPr/>
         </p:nvSpPr>
@@ -8223,7 +8478,7 @@
       </p:sp>
       <p:sp>
         <p:nvSpPr>
-          <p:cNvPr id="294" name=""/>
+          <p:cNvPr id="296" name=""/>
           <p:cNvSpPr/>
           <p:nvPr/>
         </p:nvSpPr>
@@ -8442,7 +8697,7 @@
       </p:sp>
       <p:sp>
         <p:nvSpPr>
-          <p:cNvPr id="295" name=""/>
+          <p:cNvPr id="297" name=""/>
           <p:cNvSpPr txBox="1"/>
           <p:nvPr/>
         </p:nvSpPr>
@@ -8489,7 +8744,7 @@
       </p:sp>
       <p:sp>
         <p:nvSpPr>
-          <p:cNvPr id="296" name=""/>
+          <p:cNvPr id="298" name=""/>
           <p:cNvSpPr txBox="1"/>
           <p:nvPr/>
         </p:nvSpPr>
@@ -8584,7 +8839,7 @@
       </p:sp>
       <p:sp>
         <p:nvSpPr>
-          <p:cNvPr id="297" name=""/>
+          <p:cNvPr id="299" name=""/>
           <p:cNvSpPr txBox="1"/>
           <p:nvPr/>
         </p:nvSpPr>
@@ -8631,7 +8886,7 @@
       </p:sp>
       <p:sp>
         <p:nvSpPr>
-          <p:cNvPr id="298" name=""/>
+          <p:cNvPr id="300" name=""/>
           <p:cNvSpPr/>
           <p:nvPr/>
         </p:nvSpPr>
@@ -8847,7 +9102,7 @@
       </p:sp>
       <p:sp>
         <p:nvSpPr>
-          <p:cNvPr id="299" name=""/>
+          <p:cNvPr id="301" name=""/>
           <p:cNvSpPr txBox="1"/>
           <p:nvPr/>
         </p:nvSpPr>
@@ -8894,7 +9149,7 @@
       </p:sp>
       <p:sp>
         <p:nvSpPr>
-          <p:cNvPr id="300" name=""/>
+          <p:cNvPr id="302" name=""/>
           <p:cNvSpPr txBox="1"/>
           <p:nvPr/>
         </p:nvSpPr>
@@ -8971,7 +9226,7 @@
       </p:grpSpPr>
       <p:sp>
         <p:nvSpPr>
-          <p:cNvPr id="301" name=""/>
+          <p:cNvPr id="303" name=""/>
           <p:cNvSpPr/>
           <p:nvPr/>
         </p:nvSpPr>
@@ -9031,7 +9286,7 @@
       </p:sp>
       <p:sp>
         <p:nvSpPr>
-          <p:cNvPr id="302" name=""/>
+          <p:cNvPr id="304" name=""/>
           <p:cNvSpPr/>
           <p:nvPr/>
         </p:nvSpPr>
@@ -9091,7 +9346,7 @@
       </p:sp>
       <p:sp>
         <p:nvSpPr>
-          <p:cNvPr id="303" name=""/>
+          <p:cNvPr id="305" name=""/>
           <p:cNvSpPr/>
           <p:nvPr/>
         </p:nvSpPr>
@@ -9151,7 +9406,7 @@
       </p:sp>
       <p:pic>
         <p:nvPicPr>
-          <p:cNvPr id="304" name="" descr=""/>
+          <p:cNvPr id="306" name="" descr=""/>
           <p:cNvPicPr/>
           <p:nvPr/>
         </p:nvPicPr>
@@ -9175,7 +9430,7 @@
       </p:pic>
       <p:sp>
         <p:nvSpPr>
-          <p:cNvPr id="305" name=""/>
+          <p:cNvPr id="307" name=""/>
           <p:cNvSpPr/>
           <p:nvPr/>
         </p:nvSpPr>
@@ -9235,7 +9490,7 @@
       </p:sp>
       <p:sp>
         <p:nvSpPr>
-          <p:cNvPr id="306" name=""/>
+          <p:cNvPr id="308" name=""/>
           <p:cNvSpPr/>
           <p:nvPr/>
         </p:nvSpPr>
@@ -9295,7 +9550,7 @@
       </p:sp>
       <p:sp>
         <p:nvSpPr>
-          <p:cNvPr id="307" name=""/>
+          <p:cNvPr id="309" name=""/>
           <p:cNvSpPr/>
           <p:nvPr/>
         </p:nvSpPr>
@@ -9355,7 +9610,7 @@
       </p:sp>
       <p:sp>
         <p:nvSpPr>
-          <p:cNvPr id="308" name=""/>
+          <p:cNvPr id="310" name=""/>
           <p:cNvSpPr/>
           <p:nvPr/>
         </p:nvSpPr>
@@ -9415,7 +9670,7 @@
       </p:sp>
       <p:sp>
         <p:nvSpPr>
-          <p:cNvPr id="309" name=""/>
+          <p:cNvPr id="311" name=""/>
           <p:cNvSpPr/>
           <p:nvPr/>
         </p:nvSpPr>
@@ -9475,7 +9730,7 @@
       </p:sp>
       <p:sp>
         <p:nvSpPr>
-          <p:cNvPr id="310" name=""/>
+          <p:cNvPr id="312" name=""/>
           <p:cNvSpPr/>
           <p:nvPr/>
         </p:nvSpPr>
@@ -9535,7 +9790,7 @@
       </p:sp>
       <p:sp>
         <p:nvSpPr>
-          <p:cNvPr id="311" name=""/>
+          <p:cNvPr id="313" name=""/>
           <p:cNvSpPr/>
           <p:nvPr/>
         </p:nvSpPr>
@@ -9595,7 +9850,7 @@
       </p:sp>
       <p:sp>
         <p:nvSpPr>
-          <p:cNvPr id="312" name=""/>
+          <p:cNvPr id="314" name=""/>
           <p:cNvSpPr/>
           <p:nvPr/>
         </p:nvSpPr>
@@ -9655,7 +9910,7 @@
       </p:sp>
       <p:sp>
         <p:nvSpPr>
-          <p:cNvPr id="313" name=""/>
+          <p:cNvPr id="315" name=""/>
           <p:cNvSpPr/>
           <p:nvPr/>
         </p:nvSpPr>
@@ -9715,7 +9970,7 @@
       </p:sp>
       <p:sp>
         <p:nvSpPr>
-          <p:cNvPr id="314" name=""/>
+          <p:cNvPr id="316" name=""/>
           <p:cNvSpPr/>
           <p:nvPr/>
         </p:nvSpPr>
@@ -9775,7 +10030,7 @@
       </p:sp>
       <p:sp>
         <p:nvSpPr>
-          <p:cNvPr id="315" name=""/>
+          <p:cNvPr id="317" name=""/>
           <p:cNvSpPr/>
           <p:nvPr/>
         </p:nvSpPr>
@@ -9835,7 +10090,7 @@
       </p:sp>
       <p:sp>
         <p:nvSpPr>
-          <p:cNvPr id="316" name=""/>
+          <p:cNvPr id="318" name=""/>
           <p:cNvSpPr/>
           <p:nvPr/>
         </p:nvSpPr>
@@ -9895,7 +10150,7 @@
       </p:sp>
       <p:sp>
         <p:nvSpPr>
-          <p:cNvPr id="317" name=""/>
+          <p:cNvPr id="319" name=""/>
           <p:cNvSpPr/>
           <p:nvPr/>
         </p:nvSpPr>
@@ -9955,7 +10210,7 @@
       </p:sp>
       <p:sp>
         <p:nvSpPr>
-          <p:cNvPr id="318" name=""/>
+          <p:cNvPr id="320" name=""/>
           <p:cNvSpPr/>
           <p:nvPr/>
         </p:nvSpPr>
@@ -10015,7 +10270,7 @@
       </p:sp>
       <p:sp>
         <p:nvSpPr>
-          <p:cNvPr id="319" name=""/>
+          <p:cNvPr id="321" name=""/>
           <p:cNvSpPr/>
           <p:nvPr/>
         </p:nvSpPr>
@@ -10075,7 +10330,7 @@
       </p:sp>
       <p:sp>
         <p:nvSpPr>
-          <p:cNvPr id="320" name=""/>
+          <p:cNvPr id="322" name=""/>
           <p:cNvSpPr/>
           <p:nvPr/>
         </p:nvSpPr>
@@ -10135,7 +10390,7 @@
       </p:sp>
       <p:sp>
         <p:nvSpPr>
-          <p:cNvPr id="321" name=""/>
+          <p:cNvPr id="323" name=""/>
           <p:cNvSpPr/>
           <p:nvPr/>
         </p:nvSpPr>
@@ -10195,7 +10450,7 @@
       </p:sp>
       <p:sp>
         <p:nvSpPr>
-          <p:cNvPr id="322" name=""/>
+          <p:cNvPr id="324" name=""/>
           <p:cNvSpPr/>
           <p:nvPr/>
         </p:nvSpPr>
@@ -10255,7 +10510,7 @@
       </p:sp>
       <p:sp>
         <p:nvSpPr>
-          <p:cNvPr id="323" name=""/>
+          <p:cNvPr id="325" name=""/>
           <p:cNvSpPr/>
           <p:nvPr/>
         </p:nvSpPr>
@@ -10315,7 +10570,7 @@
       </p:sp>
       <p:sp>
         <p:nvSpPr>
-          <p:cNvPr id="324" name=""/>
+          <p:cNvPr id="326" name=""/>
           <p:cNvSpPr/>
           <p:nvPr/>
         </p:nvSpPr>
@@ -10375,7 +10630,7 @@
       </p:sp>
       <p:sp>
         <p:nvSpPr>
-          <p:cNvPr id="325" name=""/>
+          <p:cNvPr id="327" name=""/>
           <p:cNvSpPr/>
           <p:nvPr/>
         </p:nvSpPr>
@@ -10435,7 +10690,7 @@
       </p:sp>
       <p:sp>
         <p:nvSpPr>
-          <p:cNvPr id="326" name=""/>
+          <p:cNvPr id="328" name=""/>
           <p:cNvSpPr/>
           <p:nvPr/>
         </p:nvSpPr>
@@ -10495,7 +10750,7 @@
       </p:sp>
       <p:sp>
         <p:nvSpPr>
-          <p:cNvPr id="327" name=""/>
+          <p:cNvPr id="329" name=""/>
           <p:cNvSpPr/>
           <p:nvPr/>
         </p:nvSpPr>
@@ -10555,7 +10810,7 @@
       </p:sp>
       <p:sp>
         <p:nvSpPr>
-          <p:cNvPr id="328" name=""/>
+          <p:cNvPr id="330" name=""/>
           <p:cNvSpPr txBox="1"/>
           <p:nvPr/>
         </p:nvSpPr>
@@ -10614,7 +10869,7 @@
       </p:sp>
       <p:sp>
         <p:nvSpPr>
-          <p:cNvPr id="329" name=""/>
+          <p:cNvPr id="331" name=""/>
           <p:cNvSpPr txBox="1"/>
           <p:nvPr/>
         </p:nvSpPr>
@@ -10661,7 +10916,7 @@
       </p:sp>
       <p:sp>
         <p:nvSpPr>
-          <p:cNvPr id="330" name=""/>
+          <p:cNvPr id="332" name=""/>
           <p:cNvSpPr txBox="1"/>
           <p:nvPr/>
         </p:nvSpPr>
@@ -10708,7 +10963,7 @@
       </p:sp>
       <p:sp>
         <p:nvSpPr>
-          <p:cNvPr id="331" name=""/>
+          <p:cNvPr id="333" name=""/>
           <p:cNvSpPr txBox="1"/>
           <p:nvPr/>
         </p:nvSpPr>
@@ -10755,7 +11010,7 @@
       </p:sp>
       <p:sp>
         <p:nvSpPr>
-          <p:cNvPr id="332" name=""/>
+          <p:cNvPr id="334" name=""/>
           <p:cNvSpPr txBox="1"/>
           <p:nvPr/>
         </p:nvSpPr>
@@ -10802,7 +11057,7 @@
       </p:sp>
       <p:sp>
         <p:nvSpPr>
-          <p:cNvPr id="333" name=""/>
+          <p:cNvPr id="335" name=""/>
           <p:cNvSpPr txBox="1"/>
           <p:nvPr/>
         </p:nvSpPr>
@@ -10849,7 +11104,7 @@
       </p:sp>
       <p:sp>
         <p:nvSpPr>
-          <p:cNvPr id="334" name=""/>
+          <p:cNvPr id="336" name=""/>
           <p:cNvSpPr txBox="1"/>
           <p:nvPr/>
         </p:nvSpPr>
@@ -10896,7 +11151,7 @@
       </p:sp>
       <p:sp>
         <p:nvSpPr>
-          <p:cNvPr id="335" name=""/>
+          <p:cNvPr id="337" name=""/>
           <p:cNvSpPr txBox="1"/>
           <p:nvPr/>
         </p:nvSpPr>
@@ -10967,7 +11222,7 @@
       </p:sp>
       <p:sp>
         <p:nvSpPr>
-          <p:cNvPr id="336" name=""/>
+          <p:cNvPr id="338" name=""/>
           <p:cNvSpPr txBox="1"/>
           <p:nvPr/>
         </p:nvSpPr>
@@ -11014,7 +11269,7 @@
       </p:sp>
       <p:sp>
         <p:nvSpPr>
-          <p:cNvPr id="337" name=""/>
+          <p:cNvPr id="339" name=""/>
           <p:cNvSpPr txBox="1"/>
           <p:nvPr/>
         </p:nvSpPr>
@@ -11061,7 +11316,7 @@
       </p:sp>
       <p:sp>
         <p:nvSpPr>
-          <p:cNvPr id="338" name=""/>
+          <p:cNvPr id="340" name=""/>
           <p:cNvSpPr/>
           <p:nvPr/>
         </p:nvSpPr>
@@ -11281,7 +11536,7 @@
       </p:sp>
       <p:sp>
         <p:nvSpPr>
-          <p:cNvPr id="339" name=""/>
+          <p:cNvPr id="341" name=""/>
           <p:cNvSpPr/>
           <p:nvPr/>
         </p:nvSpPr>
@@ -11500,7 +11755,7 @@
       </p:sp>
       <p:sp>
         <p:nvSpPr>
-          <p:cNvPr id="340" name=""/>
+          <p:cNvPr id="342" name=""/>
           <p:cNvSpPr txBox="1"/>
           <p:nvPr/>
         </p:nvSpPr>
@@ -11547,7 +11802,7 @@
       </p:sp>
       <p:sp>
         <p:nvSpPr>
-          <p:cNvPr id="341" name=""/>
+          <p:cNvPr id="343" name=""/>
           <p:cNvSpPr txBox="1"/>
           <p:nvPr/>
         </p:nvSpPr>
@@ -11594,7 +11849,7 @@
       </p:sp>
       <p:sp>
         <p:nvSpPr>
-          <p:cNvPr id="342" name=""/>
+          <p:cNvPr id="344" name=""/>
           <p:cNvSpPr txBox="1"/>
           <p:nvPr/>
         </p:nvSpPr>
@@ -11641,7 +11896,7 @@
       </p:sp>
       <p:sp>
         <p:nvSpPr>
-          <p:cNvPr id="343" name=""/>
+          <p:cNvPr id="345" name=""/>
           <p:cNvSpPr txBox="1"/>
           <p:nvPr/>
         </p:nvSpPr>
@@ -11688,7 +11943,7 @@
       </p:sp>
       <p:sp>
         <p:nvSpPr>
-          <p:cNvPr id="344" name=""/>
+          <p:cNvPr id="346" name=""/>
           <p:cNvSpPr txBox="1"/>
           <p:nvPr/>
         </p:nvSpPr>
@@ -11735,7 +11990,7 @@
       </p:sp>
       <p:sp>
         <p:nvSpPr>
-          <p:cNvPr id="345" name=""/>
+          <p:cNvPr id="347" name=""/>
           <p:cNvSpPr txBox="1"/>
           <p:nvPr/>
         </p:nvSpPr>
@@ -11782,7 +12037,7 @@
       </p:sp>
       <p:sp>
         <p:nvSpPr>
-          <p:cNvPr id="346" name=""/>
+          <p:cNvPr id="348" name=""/>
           <p:cNvSpPr txBox="1"/>
           <p:nvPr/>
         </p:nvSpPr>
@@ -11829,7 +12084,7 @@
       </p:sp>
       <p:sp>
         <p:nvSpPr>
-          <p:cNvPr id="347" name=""/>
+          <p:cNvPr id="349" name=""/>
           <p:cNvSpPr txBox="1"/>
           <p:nvPr/>
         </p:nvSpPr>
@@ -11888,7 +12143,7 @@
       </p:sp>
       <p:sp>
         <p:nvSpPr>
-          <p:cNvPr id="348" name=""/>
+          <p:cNvPr id="350" name=""/>
           <p:cNvSpPr txBox="1"/>
           <p:nvPr/>
         </p:nvSpPr>
@@ -11935,7 +12190,7 @@
       </p:sp>
       <p:sp>
         <p:nvSpPr>
-          <p:cNvPr id="349" name=""/>
+          <p:cNvPr id="351" name=""/>
           <p:cNvSpPr txBox="1"/>
           <p:nvPr/>
         </p:nvSpPr>
@@ -11982,7 +12237,7 @@
       </p:sp>
       <p:sp>
         <p:nvSpPr>
-          <p:cNvPr id="350" name=""/>
+          <p:cNvPr id="352" name=""/>
           <p:cNvSpPr txBox="1"/>
           <p:nvPr/>
         </p:nvSpPr>
@@ -12029,7 +12284,7 @@
       </p:sp>
       <p:sp>
         <p:nvSpPr>
-          <p:cNvPr id="351" name=""/>
+          <p:cNvPr id="353" name=""/>
           <p:cNvSpPr/>
           <p:nvPr/>
         </p:nvSpPr>
@@ -12245,7 +12500,7 @@
       </p:sp>
       <p:sp>
         <p:nvSpPr>
-          <p:cNvPr id="352" name=""/>
+          <p:cNvPr id="354" name=""/>
           <p:cNvSpPr txBox="1"/>
           <p:nvPr/>
         </p:nvSpPr>
@@ -12292,7 +12547,7 @@
       </p:sp>
       <p:sp>
         <p:nvSpPr>
-          <p:cNvPr id="353" name=""/>
+          <p:cNvPr id="355" name=""/>
           <p:cNvSpPr txBox="1"/>
           <p:nvPr/>
         </p:nvSpPr>
@@ -12369,7 +12624,7 @@
       </p:grpSpPr>
       <p:sp>
         <p:nvSpPr>
-          <p:cNvPr id="354" name=""/>
+          <p:cNvPr id="356" name=""/>
           <p:cNvSpPr/>
           <p:nvPr/>
         </p:nvSpPr>
@@ -12429,7 +12684,7 @@
       </p:sp>
       <p:sp>
         <p:nvSpPr>
-          <p:cNvPr id="355" name=""/>
+          <p:cNvPr id="357" name=""/>
           <p:cNvSpPr/>
           <p:nvPr/>
         </p:nvSpPr>
@@ -12489,7 +12744,7 @@
       </p:sp>
       <p:sp>
         <p:nvSpPr>
-          <p:cNvPr id="356" name=""/>
+          <p:cNvPr id="358" name=""/>
           <p:cNvSpPr/>
           <p:nvPr/>
         </p:nvSpPr>
@@ -12549,7 +12804,7 @@
       </p:sp>
       <p:pic>
         <p:nvPicPr>
-          <p:cNvPr id="357" name="" descr=""/>
+          <p:cNvPr id="359" name="" descr=""/>
           <p:cNvPicPr/>
           <p:nvPr/>
         </p:nvPicPr>
@@ -12573,7 +12828,7 @@
       </p:pic>
       <p:sp>
         <p:nvSpPr>
-          <p:cNvPr id="358" name=""/>
+          <p:cNvPr id="360" name=""/>
           <p:cNvSpPr txBox="1"/>
           <p:nvPr/>
         </p:nvSpPr>
@@ -12620,7 +12875,7 @@
       </p:sp>
       <p:sp>
         <p:nvSpPr>
-          <p:cNvPr id="359" name=""/>
+          <p:cNvPr id="361" name=""/>
           <p:cNvSpPr/>
           <p:nvPr/>
         </p:nvSpPr>
@@ -12840,7 +13095,7 @@
       </p:sp>
       <p:sp>
         <p:nvSpPr>
-          <p:cNvPr id="360" name=""/>
+          <p:cNvPr id="362" name=""/>
           <p:cNvSpPr/>
           <p:nvPr/>
         </p:nvSpPr>
@@ -13059,7 +13314,7 @@
       </p:sp>
       <p:sp>
         <p:nvSpPr>
-          <p:cNvPr id="361" name=""/>
+          <p:cNvPr id="363" name=""/>
           <p:cNvSpPr txBox="1"/>
           <p:nvPr/>
         </p:nvSpPr>
@@ -13106,7 +13361,7 @@
       </p:sp>
       <p:sp>
         <p:nvSpPr>
-          <p:cNvPr id="362" name=""/>
+          <p:cNvPr id="364" name=""/>
           <p:cNvSpPr txBox="1"/>
           <p:nvPr/>
         </p:nvSpPr>
@@ -13153,7 +13408,7 @@
       </p:sp>
       <p:sp>
         <p:nvSpPr>
-          <p:cNvPr id="363" name=""/>
+          <p:cNvPr id="365" name=""/>
           <p:cNvSpPr txBox="1"/>
           <p:nvPr/>
         </p:nvSpPr>
@@ -13200,7 +13455,7 @@
       </p:sp>
       <p:sp>
         <p:nvSpPr>
-          <p:cNvPr id="364" name=""/>
+          <p:cNvPr id="366" name=""/>
           <p:cNvSpPr/>
           <p:nvPr/>
         </p:nvSpPr>
@@ -13420,7 +13675,7 @@
       </p:sp>
       <p:sp>
         <p:nvSpPr>
-          <p:cNvPr id="365" name=""/>
+          <p:cNvPr id="367" name=""/>
           <p:cNvSpPr/>
           <p:nvPr/>
         </p:nvSpPr>
@@ -13639,7 +13894,7 @@
       </p:sp>
       <p:sp>
         <p:nvSpPr>
-          <p:cNvPr id="366" name=""/>
+          <p:cNvPr id="368" name=""/>
           <p:cNvSpPr txBox="1"/>
           <p:nvPr/>
         </p:nvSpPr>
@@ -13686,7 +13941,7 @@
       </p:sp>
       <p:sp>
         <p:nvSpPr>
-          <p:cNvPr id="367" name=""/>
+          <p:cNvPr id="369" name=""/>
           <p:cNvSpPr txBox="1"/>
           <p:nvPr/>
         </p:nvSpPr>
@@ -13733,7 +13988,7 @@
       </p:sp>
       <p:sp>
         <p:nvSpPr>
-          <p:cNvPr id="368" name=""/>
+          <p:cNvPr id="370" name=""/>
           <p:cNvSpPr txBox="1"/>
           <p:nvPr/>
         </p:nvSpPr>
@@ -13780,7 +14035,7 @@
       </p:sp>
       <p:sp>
         <p:nvSpPr>
-          <p:cNvPr id="369" name=""/>
+          <p:cNvPr id="371" name=""/>
           <p:cNvSpPr txBox="1"/>
           <p:nvPr/>
         </p:nvSpPr>
@@ -13827,7 +14082,7 @@
       </p:sp>
       <p:sp>
         <p:nvSpPr>
-          <p:cNvPr id="370" name=""/>
+          <p:cNvPr id="372" name=""/>
           <p:cNvSpPr/>
           <p:nvPr/>
         </p:nvSpPr>
@@ -14043,7 +14298,7 @@
       </p:sp>
       <p:sp>
         <p:nvSpPr>
-          <p:cNvPr id="371" name=""/>
+          <p:cNvPr id="373" name=""/>
           <p:cNvSpPr txBox="1"/>
           <p:nvPr/>
         </p:nvSpPr>
@@ -14090,7 +14345,7 @@
       </p:sp>
       <p:sp>
         <p:nvSpPr>
-          <p:cNvPr id="372" name=""/>
+          <p:cNvPr id="374" name=""/>
           <p:cNvSpPr txBox="1"/>
           <p:nvPr/>
         </p:nvSpPr>
@@ -14167,7 +14422,7 @@
       </p:grpSpPr>
       <p:sp>
         <p:nvSpPr>
-          <p:cNvPr id="373" name=""/>
+          <p:cNvPr id="375" name=""/>
           <p:cNvSpPr/>
           <p:nvPr/>
         </p:nvSpPr>
@@ -14227,7 +14482,7 @@
       </p:sp>
       <p:sp>
         <p:nvSpPr>
-          <p:cNvPr id="374" name=""/>
+          <p:cNvPr id="376" name=""/>
           <p:cNvSpPr/>
           <p:nvPr/>
         </p:nvSpPr>
@@ -14287,7 +14542,7 @@
       </p:sp>
       <p:sp>
         <p:nvSpPr>
-          <p:cNvPr id="375" name=""/>
+          <p:cNvPr id="377" name=""/>
           <p:cNvSpPr/>
           <p:nvPr/>
         </p:nvSpPr>
@@ -14347,7 +14602,7 @@
       </p:sp>
       <p:pic>
         <p:nvPicPr>
-          <p:cNvPr id="376" name="" descr=""/>
+          <p:cNvPr id="378" name="" descr=""/>
           <p:cNvPicPr/>
           <p:nvPr/>
         </p:nvPicPr>
@@ -14371,7 +14626,7 @@
       </p:pic>
       <p:sp>
         <p:nvSpPr>
-          <p:cNvPr id="377" name=""/>
+          <p:cNvPr id="379" name=""/>
           <p:cNvSpPr txBox="1"/>
           <p:nvPr/>
         </p:nvSpPr>
@@ -14418,7 +14673,7 @@
       </p:sp>
       <p:sp>
         <p:nvSpPr>
-          <p:cNvPr id="378" name=""/>
+          <p:cNvPr id="380" name=""/>
           <p:cNvSpPr txBox="1"/>
           <p:nvPr/>
         </p:nvSpPr>
@@ -14465,7 +14720,7 @@
       </p:sp>
       <p:sp>
         <p:nvSpPr>
-          <p:cNvPr id="379" name=""/>
+          <p:cNvPr id="381" name=""/>
           <p:cNvSpPr/>
           <p:nvPr/>
         </p:nvSpPr>
@@ -14685,7 +14940,7 @@
       </p:sp>
       <p:sp>
         <p:nvSpPr>
-          <p:cNvPr id="380" name=""/>
+          <p:cNvPr id="382" name=""/>
           <p:cNvSpPr/>
           <p:nvPr/>
         </p:nvSpPr>
@@ -14904,7 +15159,7 @@
       </p:sp>
       <p:sp>
         <p:nvSpPr>
-          <p:cNvPr id="381" name=""/>
+          <p:cNvPr id="383" name=""/>
           <p:cNvSpPr txBox="1"/>
           <p:nvPr/>
         </p:nvSpPr>
@@ -14951,7 +15206,7 @@
       </p:sp>
       <p:sp>
         <p:nvSpPr>
-          <p:cNvPr id="382" name=""/>
+          <p:cNvPr id="384" name=""/>
           <p:cNvSpPr txBox="1"/>
           <p:nvPr/>
         </p:nvSpPr>
@@ -14998,7 +15253,7 @@
       </p:sp>
       <p:sp>
         <p:nvSpPr>
-          <p:cNvPr id="383" name=""/>
+          <p:cNvPr id="385" name=""/>
           <p:cNvSpPr txBox="1"/>
           <p:nvPr/>
         </p:nvSpPr>
@@ -15045,7 +15300,7 @@
       </p:sp>
       <p:sp>
         <p:nvSpPr>
-          <p:cNvPr id="384" name=""/>
+          <p:cNvPr id="386" name=""/>
           <p:cNvSpPr txBox="1"/>
           <p:nvPr/>
         </p:nvSpPr>
@@ -15092,7 +15347,7 @@
       </p:sp>
       <p:sp>
         <p:nvSpPr>
-          <p:cNvPr id="385" name=""/>
+          <p:cNvPr id="387" name=""/>
           <p:cNvSpPr txBox="1"/>
           <p:nvPr/>
         </p:nvSpPr>
@@ -15139,7 +15394,7 @@
       </p:sp>
       <p:sp>
         <p:nvSpPr>
-          <p:cNvPr id="386" name=""/>
+          <p:cNvPr id="388" name=""/>
           <p:cNvSpPr/>
           <p:nvPr/>
         </p:nvSpPr>
@@ -15359,7 +15614,7 @@
       </p:sp>
       <p:sp>
         <p:nvSpPr>
-          <p:cNvPr id="387" name=""/>
+          <p:cNvPr id="389" name=""/>
           <p:cNvSpPr/>
           <p:nvPr/>
         </p:nvSpPr>
@@ -15578,7 +15833,7 @@
       </p:sp>
       <p:sp>
         <p:nvSpPr>
-          <p:cNvPr id="388" name=""/>
+          <p:cNvPr id="390" name=""/>
           <p:cNvSpPr txBox="1"/>
           <p:nvPr/>
         </p:nvSpPr>
@@ -15625,7 +15880,7 @@
       </p:sp>
       <p:sp>
         <p:nvSpPr>
-          <p:cNvPr id="389" name=""/>
+          <p:cNvPr id="391" name=""/>
           <p:cNvSpPr txBox="1"/>
           <p:nvPr/>
         </p:nvSpPr>
@@ -15672,7 +15927,7 @@
       </p:sp>
       <p:sp>
         <p:nvSpPr>
-          <p:cNvPr id="390" name=""/>
+          <p:cNvPr id="392" name=""/>
           <p:cNvSpPr txBox="1"/>
           <p:nvPr/>
         </p:nvSpPr>
@@ -15719,7 +15974,7 @@
       </p:sp>
       <p:sp>
         <p:nvSpPr>
-          <p:cNvPr id="391" name=""/>
+          <p:cNvPr id="393" name=""/>
           <p:cNvSpPr txBox="1"/>
           <p:nvPr/>
         </p:nvSpPr>
@@ -15766,7 +16021,7 @@
       </p:sp>
       <p:sp>
         <p:nvSpPr>
-          <p:cNvPr id="392" name=""/>
+          <p:cNvPr id="394" name=""/>
           <p:cNvSpPr txBox="1"/>
           <p:nvPr/>
         </p:nvSpPr>
@@ -15813,7 +16068,7 @@
       </p:sp>
       <p:sp>
         <p:nvSpPr>
-          <p:cNvPr id="393" name=""/>
+          <p:cNvPr id="395" name=""/>
           <p:cNvSpPr/>
           <p:nvPr/>
         </p:nvSpPr>
@@ -16033,7 +16288,7 @@
       </p:sp>
       <p:sp>
         <p:nvSpPr>
-          <p:cNvPr id="394" name=""/>
+          <p:cNvPr id="396" name=""/>
           <p:cNvSpPr/>
           <p:nvPr/>
         </p:nvSpPr>
@@ -16252,7 +16507,7 @@
       </p:sp>
       <p:sp>
         <p:nvSpPr>
-          <p:cNvPr id="395" name=""/>
+          <p:cNvPr id="397" name=""/>
           <p:cNvSpPr txBox="1"/>
           <p:nvPr/>
         </p:nvSpPr>
@@ -16299,7 +16554,7 @@
       </p:sp>
       <p:sp>
         <p:nvSpPr>
-          <p:cNvPr id="396" name=""/>
+          <p:cNvPr id="398" name=""/>
           <p:cNvSpPr txBox="1"/>
           <p:nvPr/>
         </p:nvSpPr>
@@ -16358,7 +16613,7 @@
       </p:sp>
       <p:sp>
         <p:nvSpPr>
-          <p:cNvPr id="397" name=""/>
+          <p:cNvPr id="399" name=""/>
           <p:cNvSpPr txBox="1"/>
           <p:nvPr/>
         </p:nvSpPr>
@@ -16405,7 +16660,7 @@
       </p:sp>
       <p:sp>
         <p:nvSpPr>
-          <p:cNvPr id="398" name=""/>
+          <p:cNvPr id="400" name=""/>
           <p:cNvSpPr/>
           <p:nvPr/>
         </p:nvSpPr>
@@ -16621,7 +16876,7 @@
       </p:sp>
       <p:sp>
         <p:nvSpPr>
-          <p:cNvPr id="399" name=""/>
+          <p:cNvPr id="401" name=""/>
           <p:cNvSpPr txBox="1"/>
           <p:nvPr/>
         </p:nvSpPr>
@@ -16668,7 +16923,7 @@
       </p:sp>
       <p:sp>
         <p:nvSpPr>
-          <p:cNvPr id="400" name=""/>
+          <p:cNvPr id="402" name=""/>
           <p:cNvSpPr txBox="1"/>
           <p:nvPr/>
         </p:nvSpPr>
@@ -16745,7 +17000,7 @@
       </p:grpSpPr>
       <p:sp>
         <p:nvSpPr>
-          <p:cNvPr id="401" name=""/>
+          <p:cNvPr id="403" name=""/>
           <p:cNvSpPr/>
           <p:nvPr/>
         </p:nvSpPr>
@@ -16805,7 +17060,7 @@
       </p:sp>
       <p:sp>
         <p:nvSpPr>
-          <p:cNvPr id="402" name=""/>
+          <p:cNvPr id="404" name=""/>
           <p:cNvSpPr/>
           <p:nvPr/>
         </p:nvSpPr>
@@ -16865,7 +17120,7 @@
       </p:sp>
       <p:sp>
         <p:nvSpPr>
-          <p:cNvPr id="403" name=""/>
+          <p:cNvPr id="405" name=""/>
           <p:cNvSpPr/>
           <p:nvPr/>
         </p:nvSpPr>
@@ -16925,7 +17180,7 @@
       </p:sp>
       <p:sp>
         <p:nvSpPr>
-          <p:cNvPr id="404" name=""/>
+          <p:cNvPr id="406" name=""/>
           <p:cNvSpPr/>
           <p:nvPr/>
         </p:nvSpPr>
@@ -17008,7 +17263,7 @@
       </p:sp>
       <p:sp>
         <p:nvSpPr>
-          <p:cNvPr id="405" name=""/>
+          <p:cNvPr id="407" name=""/>
           <p:cNvSpPr/>
           <p:nvPr/>
         </p:nvSpPr>
@@ -17136,7 +17391,7 @@
       </p:sp>
       <p:sp>
         <p:nvSpPr>
-          <p:cNvPr id="406" name=""/>
+          <p:cNvPr id="408" name=""/>
           <p:cNvSpPr/>
           <p:nvPr/>
         </p:nvSpPr>
@@ -17264,7 +17519,7 @@
       </p:sp>
       <p:sp>
         <p:nvSpPr>
-          <p:cNvPr id="407" name=""/>
+          <p:cNvPr id="409" name=""/>
           <p:cNvSpPr/>
           <p:nvPr/>
         </p:nvSpPr>
@@ -17392,7 +17647,7 @@
       </p:sp>
       <p:sp>
         <p:nvSpPr>
-          <p:cNvPr id="408" name=""/>
+          <p:cNvPr id="410" name=""/>
           <p:cNvSpPr txBox="1"/>
           <p:nvPr/>
         </p:nvSpPr>
@@ -17439,7 +17694,7 @@
       </p:sp>
       <p:sp>
         <p:nvSpPr>
-          <p:cNvPr id="409" name=""/>
+          <p:cNvPr id="411" name=""/>
           <p:cNvSpPr txBox="1"/>
           <p:nvPr/>
         </p:nvSpPr>
@@ -17486,7 +17741,7 @@
       </p:sp>
       <p:sp>
         <p:nvSpPr>
-          <p:cNvPr id="410" name=""/>
+          <p:cNvPr id="412" name=""/>
           <p:cNvSpPr txBox="1"/>
           <p:nvPr/>
         </p:nvSpPr>
@@ -17533,7 +17788,7 @@
       </p:sp>
       <p:sp>
         <p:nvSpPr>
-          <p:cNvPr id="411" name=""/>
+          <p:cNvPr id="413" name=""/>
           <p:cNvSpPr txBox="1"/>
           <p:nvPr/>
         </p:nvSpPr>
@@ -17580,7 +17835,7 @@
       </p:sp>
       <p:sp>
         <p:nvSpPr>
-          <p:cNvPr id="412" name=""/>
+          <p:cNvPr id="414" name=""/>
           <p:cNvSpPr txBox="1"/>
           <p:nvPr/>
         </p:nvSpPr>
@@ -17657,7 +17912,7 @@
       </p:grpSpPr>
       <p:sp>
         <p:nvSpPr>
-          <p:cNvPr id="413" name=""/>
+          <p:cNvPr id="415" name=""/>
           <p:cNvSpPr/>
           <p:nvPr/>
         </p:nvSpPr>
@@ -17717,7 +17972,7 @@
       </p:sp>
       <p:sp>
         <p:nvSpPr>
-          <p:cNvPr id="414" name=""/>
+          <p:cNvPr id="416" name=""/>
           <p:cNvSpPr/>
           <p:nvPr/>
         </p:nvSpPr>
@@ -17777,7 +18032,7 @@
       </p:sp>
       <p:sp>
         <p:nvSpPr>
-          <p:cNvPr id="415" name=""/>
+          <p:cNvPr id="417" name=""/>
           <p:cNvSpPr/>
           <p:nvPr/>
         </p:nvSpPr>
@@ -17837,7 +18092,7 @@
       </p:sp>
       <p:pic>
         <p:nvPicPr>
-          <p:cNvPr id="416" name="" descr=""/>
+          <p:cNvPr id="418" name="" descr=""/>
           <p:cNvPicPr/>
           <p:nvPr/>
         </p:nvPicPr>
@@ -17861,7 +18116,7 @@
       </p:pic>
       <p:sp>
         <p:nvSpPr>
-          <p:cNvPr id="417" name=""/>
+          <p:cNvPr id="419" name=""/>
           <p:cNvSpPr/>
           <p:nvPr/>
         </p:nvSpPr>
@@ -17921,7 +18176,7 @@
       </p:sp>
       <p:sp>
         <p:nvSpPr>
-          <p:cNvPr id="418" name=""/>
+          <p:cNvPr id="420" name=""/>
           <p:cNvSpPr/>
           <p:nvPr/>
         </p:nvSpPr>
@@ -17981,7 +18236,7 @@
       </p:sp>
       <p:sp>
         <p:nvSpPr>
-          <p:cNvPr id="419" name=""/>
+          <p:cNvPr id="421" name=""/>
           <p:cNvSpPr/>
           <p:nvPr/>
         </p:nvSpPr>
@@ -18041,7 +18296,7 @@
       </p:sp>
       <p:sp>
         <p:nvSpPr>
-          <p:cNvPr id="420" name=""/>
+          <p:cNvPr id="422" name=""/>
           <p:cNvSpPr/>
           <p:nvPr/>
         </p:nvSpPr>
@@ -18101,7 +18356,7 @@
       </p:sp>
       <p:sp>
         <p:nvSpPr>
-          <p:cNvPr id="421" name=""/>
+          <p:cNvPr id="423" name=""/>
           <p:cNvSpPr/>
           <p:nvPr/>
         </p:nvSpPr>
@@ -18161,7 +18416,7 @@
       </p:sp>
       <p:sp>
         <p:nvSpPr>
-          <p:cNvPr id="422" name=""/>
+          <p:cNvPr id="424" name=""/>
           <p:cNvSpPr/>
           <p:nvPr/>
         </p:nvSpPr>
@@ -18221,7 +18476,7 @@
       </p:sp>
       <p:sp>
         <p:nvSpPr>
-          <p:cNvPr id="423" name=""/>
+          <p:cNvPr id="425" name=""/>
           <p:cNvSpPr/>
           <p:nvPr/>
         </p:nvSpPr>
@@ -18281,7 +18536,7 @@
       </p:sp>
       <p:sp>
         <p:nvSpPr>
-          <p:cNvPr id="424" name=""/>
+          <p:cNvPr id="426" name=""/>
           <p:cNvSpPr/>
           <p:nvPr/>
         </p:nvSpPr>
@@ -18341,7 +18596,7 @@
       </p:sp>
       <p:sp>
         <p:nvSpPr>
-          <p:cNvPr id="425" name=""/>
+          <p:cNvPr id="427" name=""/>
           <p:cNvSpPr/>
           <p:nvPr/>
         </p:nvSpPr>
@@ -18401,7 +18656,7 @@
       </p:sp>
       <p:sp>
         <p:nvSpPr>
-          <p:cNvPr id="426" name=""/>
+          <p:cNvPr id="428" name=""/>
           <p:cNvSpPr/>
           <p:nvPr/>
         </p:nvSpPr>
@@ -18461,7 +18716,7 @@
       </p:sp>
       <p:sp>
         <p:nvSpPr>
-          <p:cNvPr id="427" name=""/>
+          <p:cNvPr id="429" name=""/>
           <p:cNvSpPr/>
           <p:nvPr/>
         </p:nvSpPr>
@@ -18521,7 +18776,7 @@
       </p:sp>
       <p:sp>
         <p:nvSpPr>
-          <p:cNvPr id="428" name=""/>
+          <p:cNvPr id="430" name=""/>
           <p:cNvSpPr/>
           <p:nvPr/>
         </p:nvSpPr>
@@ -18581,7 +18836,7 @@
       </p:sp>
       <p:sp>
         <p:nvSpPr>
-          <p:cNvPr id="429" name=""/>
+          <p:cNvPr id="431" name=""/>
           <p:cNvSpPr/>
           <p:nvPr/>
         </p:nvSpPr>
@@ -18641,7 +18896,7 @@
       </p:sp>
       <p:sp>
         <p:nvSpPr>
-          <p:cNvPr id="430" name=""/>
+          <p:cNvPr id="432" name=""/>
           <p:cNvSpPr/>
           <p:nvPr/>
         </p:nvSpPr>
@@ -18701,7 +18956,7 @@
       </p:sp>
       <p:sp>
         <p:nvSpPr>
-          <p:cNvPr id="431" name=""/>
+          <p:cNvPr id="433" name=""/>
           <p:cNvSpPr/>
           <p:nvPr/>
         </p:nvSpPr>
@@ -18761,7 +19016,7 @@
       </p:sp>
       <p:sp>
         <p:nvSpPr>
-          <p:cNvPr id="432" name=""/>
+          <p:cNvPr id="434" name=""/>
           <p:cNvSpPr/>
           <p:nvPr/>
         </p:nvSpPr>
@@ -18821,7 +19076,7 @@
       </p:sp>
       <p:sp>
         <p:nvSpPr>
-          <p:cNvPr id="433" name=""/>
+          <p:cNvPr id="435" name=""/>
           <p:cNvSpPr/>
           <p:nvPr/>
         </p:nvSpPr>
@@ -18881,7 +19136,7 @@
       </p:sp>
       <p:sp>
         <p:nvSpPr>
-          <p:cNvPr id="434" name=""/>
+          <p:cNvPr id="436" name=""/>
           <p:cNvSpPr/>
           <p:nvPr/>
         </p:nvSpPr>
@@ -18941,7 +19196,7 @@
       </p:sp>
       <p:sp>
         <p:nvSpPr>
-          <p:cNvPr id="435" name=""/>
+          <p:cNvPr id="437" name=""/>
           <p:cNvSpPr/>
           <p:nvPr/>
         </p:nvSpPr>
@@ -19001,7 +19256,7 @@
       </p:sp>
       <p:sp>
         <p:nvSpPr>
-          <p:cNvPr id="436" name=""/>
+          <p:cNvPr id="438" name=""/>
           <p:cNvSpPr/>
           <p:nvPr/>
         </p:nvSpPr>
@@ -19061,7 +19316,7 @@
       </p:sp>
       <p:sp>
         <p:nvSpPr>
-          <p:cNvPr id="437" name=""/>
+          <p:cNvPr id="439" name=""/>
           <p:cNvSpPr/>
           <p:nvPr/>
         </p:nvSpPr>
@@ -19121,7 +19376,7 @@
       </p:sp>
       <p:sp>
         <p:nvSpPr>
-          <p:cNvPr id="438" name=""/>
+          <p:cNvPr id="440" name=""/>
           <p:cNvSpPr/>
           <p:nvPr/>
         </p:nvSpPr>
@@ -19181,7 +19436,7 @@
       </p:sp>
       <p:sp>
         <p:nvSpPr>
-          <p:cNvPr id="439" name=""/>
+          <p:cNvPr id="441" name=""/>
           <p:cNvSpPr/>
           <p:nvPr/>
         </p:nvSpPr>
@@ -19241,7 +19496,7 @@
       </p:sp>
       <p:sp>
         <p:nvSpPr>
-          <p:cNvPr id="440" name=""/>
+          <p:cNvPr id="442" name=""/>
           <p:cNvSpPr/>
           <p:nvPr/>
         </p:nvSpPr>
@@ -19301,7 +19556,7 @@
       </p:sp>
       <p:sp>
         <p:nvSpPr>
-          <p:cNvPr id="441" name=""/>
+          <p:cNvPr id="443" name=""/>
           <p:cNvSpPr/>
           <p:nvPr/>
         </p:nvSpPr>
@@ -19361,7 +19616,7 @@
       </p:sp>
       <p:sp>
         <p:nvSpPr>
-          <p:cNvPr id="442" name=""/>
+          <p:cNvPr id="444" name=""/>
           <p:cNvSpPr/>
           <p:nvPr/>
         </p:nvSpPr>
@@ -19421,7 +19676,7 @@
       </p:sp>
       <p:sp>
         <p:nvSpPr>
-          <p:cNvPr id="443" name=""/>
+          <p:cNvPr id="445" name=""/>
           <p:cNvSpPr/>
           <p:nvPr/>
         </p:nvSpPr>
@@ -19481,7 +19736,7 @@
       </p:sp>
       <p:sp>
         <p:nvSpPr>
-          <p:cNvPr id="444" name=""/>
+          <p:cNvPr id="446" name=""/>
           <p:cNvSpPr/>
           <p:nvPr/>
         </p:nvSpPr>
@@ -19541,7 +19796,7 @@
       </p:sp>
       <p:sp>
         <p:nvSpPr>
-          <p:cNvPr id="445" name=""/>
+          <p:cNvPr id="447" name=""/>
           <p:cNvSpPr/>
           <p:nvPr/>
         </p:nvSpPr>
@@ -19601,7 +19856,7 @@
       </p:sp>
       <p:sp>
         <p:nvSpPr>
-          <p:cNvPr id="446" name=""/>
+          <p:cNvPr id="448" name=""/>
           <p:cNvSpPr/>
           <p:nvPr/>
         </p:nvSpPr>
@@ -19661,7 +19916,7 @@
       </p:sp>
       <p:sp>
         <p:nvSpPr>
-          <p:cNvPr id="447" name=""/>
+          <p:cNvPr id="449" name=""/>
           <p:cNvSpPr/>
           <p:nvPr/>
         </p:nvSpPr>
@@ -19721,7 +19976,7 @@
       </p:sp>
       <p:sp>
         <p:nvSpPr>
-          <p:cNvPr id="448" name=""/>
+          <p:cNvPr id="450" name=""/>
           <p:cNvSpPr/>
           <p:nvPr/>
         </p:nvSpPr>
@@ -19781,7 +20036,7 @@
       </p:sp>
       <p:sp>
         <p:nvSpPr>
-          <p:cNvPr id="449" name=""/>
+          <p:cNvPr id="451" name=""/>
           <p:cNvSpPr/>
           <p:nvPr/>
         </p:nvSpPr>
@@ -19841,7 +20096,7 @@
       </p:sp>
       <p:sp>
         <p:nvSpPr>
-          <p:cNvPr id="450" name=""/>
+          <p:cNvPr id="452" name=""/>
           <p:cNvSpPr/>
           <p:nvPr/>
         </p:nvSpPr>
@@ -19901,7 +20156,7 @@
       </p:sp>
       <p:sp>
         <p:nvSpPr>
-          <p:cNvPr id="451" name=""/>
+          <p:cNvPr id="453" name=""/>
           <p:cNvSpPr/>
           <p:nvPr/>
         </p:nvSpPr>
@@ -19961,7 +20216,7 @@
       </p:sp>
       <p:sp>
         <p:nvSpPr>
-          <p:cNvPr id="452" name=""/>
+          <p:cNvPr id="454" name=""/>
           <p:cNvSpPr/>
           <p:nvPr/>
         </p:nvSpPr>
@@ -20021,7 +20276,7 @@
       </p:sp>
       <p:sp>
         <p:nvSpPr>
-          <p:cNvPr id="453" name=""/>
+          <p:cNvPr id="455" name=""/>
           <p:cNvSpPr/>
           <p:nvPr/>
         </p:nvSpPr>
@@ -20081,7 +20336,7 @@
       </p:sp>
       <p:sp>
         <p:nvSpPr>
-          <p:cNvPr id="454" name=""/>
+          <p:cNvPr id="456" name=""/>
           <p:cNvSpPr/>
           <p:nvPr/>
         </p:nvSpPr>
@@ -20141,7 +20396,7 @@
       </p:sp>
       <p:sp>
         <p:nvSpPr>
-          <p:cNvPr id="455" name=""/>
+          <p:cNvPr id="457" name=""/>
           <p:cNvSpPr/>
           <p:nvPr/>
         </p:nvSpPr>
@@ -20201,7 +20456,7 @@
       </p:sp>
       <p:sp>
         <p:nvSpPr>
-          <p:cNvPr id="456" name=""/>
+          <p:cNvPr id="458" name=""/>
           <p:cNvSpPr/>
           <p:nvPr/>
         </p:nvSpPr>
@@ -20261,7 +20516,7 @@
       </p:sp>
       <p:sp>
         <p:nvSpPr>
-          <p:cNvPr id="457" name=""/>
+          <p:cNvPr id="459" name=""/>
           <p:cNvSpPr/>
           <p:nvPr/>
         </p:nvSpPr>
@@ -20321,7 +20576,7 @@
       </p:sp>
       <p:sp>
         <p:nvSpPr>
-          <p:cNvPr id="458" name=""/>
+          <p:cNvPr id="460" name=""/>
           <p:cNvSpPr/>
           <p:nvPr/>
         </p:nvSpPr>
@@ -20381,7 +20636,7 @@
       </p:sp>
       <p:sp>
         <p:nvSpPr>
-          <p:cNvPr id="459" name=""/>
+          <p:cNvPr id="461" name=""/>
           <p:cNvSpPr/>
           <p:nvPr/>
         </p:nvSpPr>
@@ -20441,7 +20696,7 @@
       </p:sp>
       <p:sp>
         <p:nvSpPr>
-          <p:cNvPr id="460" name=""/>
+          <p:cNvPr id="462" name=""/>
           <p:cNvSpPr/>
           <p:nvPr/>
         </p:nvSpPr>
@@ -20501,7 +20756,7 @@
       </p:sp>
       <p:sp>
         <p:nvSpPr>
-          <p:cNvPr id="461" name=""/>
+          <p:cNvPr id="463" name=""/>
           <p:cNvSpPr txBox="1"/>
           <p:nvPr/>
         </p:nvSpPr>
@@ -20548,7 +20803,7 @@
       </p:sp>
       <p:sp>
         <p:nvSpPr>
-          <p:cNvPr id="462" name=""/>
+          <p:cNvPr id="464" name=""/>
           <p:cNvSpPr txBox="1"/>
           <p:nvPr/>
         </p:nvSpPr>
@@ -20595,7 +20850,7 @@
       </p:sp>
       <p:sp>
         <p:nvSpPr>
-          <p:cNvPr id="463" name=""/>
+          <p:cNvPr id="465" name=""/>
           <p:cNvSpPr txBox="1"/>
           <p:nvPr/>
         </p:nvSpPr>
@@ -20642,7 +20897,7 @@
       </p:sp>
       <p:sp>
         <p:nvSpPr>
-          <p:cNvPr id="464" name=""/>
+          <p:cNvPr id="466" name=""/>
           <p:cNvSpPr txBox="1"/>
           <p:nvPr/>
         </p:nvSpPr>
@@ -20689,7 +20944,7 @@
       </p:sp>
       <p:sp>
         <p:nvSpPr>
-          <p:cNvPr id="465" name=""/>
+          <p:cNvPr id="467" name=""/>
           <p:cNvSpPr txBox="1"/>
           <p:nvPr/>
         </p:nvSpPr>
@@ -20736,7 +20991,7 @@
       </p:sp>
       <p:sp>
         <p:nvSpPr>
-          <p:cNvPr id="466" name=""/>
+          <p:cNvPr id="468" name=""/>
           <p:cNvSpPr txBox="1"/>
           <p:nvPr/>
         </p:nvSpPr>
@@ -20783,7 +21038,7 @@
       </p:sp>
       <p:sp>
         <p:nvSpPr>
-          <p:cNvPr id="467" name=""/>
+          <p:cNvPr id="469" name=""/>
           <p:cNvSpPr txBox="1"/>
           <p:nvPr/>
         </p:nvSpPr>
@@ -20830,7 +21085,7 @@
       </p:sp>
       <p:sp>
         <p:nvSpPr>
-          <p:cNvPr id="468" name=""/>
+          <p:cNvPr id="470" name=""/>
           <p:cNvSpPr txBox="1"/>
           <p:nvPr/>
         </p:nvSpPr>
@@ -20877,7 +21132,7 @@
       </p:sp>
       <p:sp>
         <p:nvSpPr>
-          <p:cNvPr id="469" name=""/>
+          <p:cNvPr id="471" name=""/>
           <p:cNvSpPr txBox="1"/>
           <p:nvPr/>
         </p:nvSpPr>
@@ -20924,7 +21179,7 @@
       </p:sp>
       <p:sp>
         <p:nvSpPr>
-          <p:cNvPr id="470" name=""/>
+          <p:cNvPr id="472" name=""/>
           <p:cNvSpPr txBox="1"/>
           <p:nvPr/>
         </p:nvSpPr>
@@ -20971,7 +21226,7 @@
       </p:sp>
       <p:sp>
         <p:nvSpPr>
-          <p:cNvPr id="471" name=""/>
+          <p:cNvPr id="473" name=""/>
           <p:cNvSpPr txBox="1"/>
           <p:nvPr/>
         </p:nvSpPr>
@@ -21018,7 +21273,7 @@
       </p:sp>
       <p:sp>
         <p:nvSpPr>
-          <p:cNvPr id="472" name=""/>
+          <p:cNvPr id="474" name=""/>
           <p:cNvSpPr txBox="1"/>
           <p:nvPr/>
         </p:nvSpPr>
@@ -21065,7 +21320,7 @@
       </p:sp>
       <p:sp>
         <p:nvSpPr>
-          <p:cNvPr id="473" name=""/>
+          <p:cNvPr id="475" name=""/>
           <p:cNvSpPr txBox="1"/>
           <p:nvPr/>
         </p:nvSpPr>
@@ -21112,7 +21367,7 @@
       </p:sp>
       <p:sp>
         <p:nvSpPr>
-          <p:cNvPr id="474" name=""/>
+          <p:cNvPr id="476" name=""/>
           <p:cNvSpPr txBox="1"/>
           <p:nvPr/>
         </p:nvSpPr>
@@ -21159,7 +21414,7 @@
       </p:sp>
       <p:sp>
         <p:nvSpPr>
-          <p:cNvPr id="475" name=""/>
+          <p:cNvPr id="477" name=""/>
           <p:cNvSpPr txBox="1"/>
           <p:nvPr/>
         </p:nvSpPr>
@@ -21206,7 +21461,7 @@
       </p:sp>
       <p:sp>
         <p:nvSpPr>
-          <p:cNvPr id="476" name=""/>
+          <p:cNvPr id="478" name=""/>
           <p:cNvSpPr txBox="1"/>
           <p:nvPr/>
         </p:nvSpPr>
@@ -21253,7 +21508,7 @@
       </p:sp>
       <p:sp>
         <p:nvSpPr>
-          <p:cNvPr id="477" name=""/>
+          <p:cNvPr id="479" name=""/>
           <p:cNvSpPr txBox="1"/>
           <p:nvPr/>
         </p:nvSpPr>
@@ -21300,7 +21555,7 @@
       </p:sp>
       <p:sp>
         <p:nvSpPr>
-          <p:cNvPr id="478" name=""/>
+          <p:cNvPr id="480" name=""/>
           <p:cNvSpPr txBox="1"/>
           <p:nvPr/>
         </p:nvSpPr>
@@ -21347,7 +21602,7 @@
       </p:sp>
       <p:sp>
         <p:nvSpPr>
-          <p:cNvPr id="479" name=""/>
+          <p:cNvPr id="481" name=""/>
           <p:cNvSpPr/>
           <p:nvPr/>
         </p:nvSpPr>
@@ -21567,7 +21822,7 @@
       </p:sp>
       <p:sp>
         <p:nvSpPr>
-          <p:cNvPr id="480" name=""/>
+          <p:cNvPr id="482" name=""/>
           <p:cNvSpPr/>
           <p:nvPr/>
         </p:nvSpPr>
@@ -21786,7 +22041,7 @@
       </p:sp>
       <p:sp>
         <p:nvSpPr>
-          <p:cNvPr id="481" name=""/>
+          <p:cNvPr id="483" name=""/>
           <p:cNvSpPr txBox="1"/>
           <p:nvPr/>
         </p:nvSpPr>
@@ -21833,7 +22088,7 @@
       </p:sp>
       <p:sp>
         <p:nvSpPr>
-          <p:cNvPr id="482" name=""/>
+          <p:cNvPr id="484" name=""/>
           <p:cNvSpPr txBox="1"/>
           <p:nvPr/>
         </p:nvSpPr>
@@ -21880,7 +22135,7 @@
       </p:sp>
       <p:sp>
         <p:nvSpPr>
-          <p:cNvPr id="483" name=""/>
+          <p:cNvPr id="485" name=""/>
           <p:cNvSpPr txBox="1"/>
           <p:nvPr/>
         </p:nvSpPr>
@@ -21927,7 +22182,7 @@
       </p:sp>
       <p:sp>
         <p:nvSpPr>
-          <p:cNvPr id="484" name=""/>
+          <p:cNvPr id="486" name=""/>
           <p:cNvSpPr/>
           <p:nvPr/>
         </p:nvSpPr>
@@ -22143,7 +22398,7 @@
       </p:sp>
       <p:sp>
         <p:nvSpPr>
-          <p:cNvPr id="485" name=""/>
+          <p:cNvPr id="487" name=""/>
           <p:cNvSpPr txBox="1"/>
           <p:nvPr/>
         </p:nvSpPr>
@@ -22190,7 +22445,7 @@
       </p:sp>
       <p:sp>
         <p:nvSpPr>
-          <p:cNvPr id="486" name=""/>
+          <p:cNvPr id="488" name=""/>
           <p:cNvSpPr txBox="1"/>
           <p:nvPr/>
         </p:nvSpPr>
@@ -22267,7 +22522,7 @@
       </p:grpSpPr>
       <p:sp>
         <p:nvSpPr>
-          <p:cNvPr id="12" name=""/>
+          <p:cNvPr id="14" name=""/>
           <p:cNvSpPr/>
           <p:nvPr/>
         </p:nvSpPr>
@@ -22327,7 +22582,7 @@
       </p:sp>
       <p:sp>
         <p:nvSpPr>
-          <p:cNvPr id="13" name=""/>
+          <p:cNvPr id="15" name=""/>
           <p:cNvSpPr/>
           <p:nvPr/>
         </p:nvSpPr>
@@ -22387,7 +22642,7 @@
       </p:sp>
       <p:sp>
         <p:nvSpPr>
-          <p:cNvPr id="14" name=""/>
+          <p:cNvPr id="16" name=""/>
           <p:cNvSpPr/>
           <p:nvPr/>
         </p:nvSpPr>
@@ -22447,7 +22702,7 @@
       </p:sp>
       <p:pic>
         <p:nvPicPr>
-          <p:cNvPr id="15" name="" descr=""/>
+          <p:cNvPr id="17" name="" descr=""/>
           <p:cNvPicPr/>
           <p:nvPr/>
         </p:nvPicPr>
@@ -22471,7 +22726,7 @@
       </p:pic>
       <p:sp>
         <p:nvSpPr>
-          <p:cNvPr id="16" name=""/>
+          <p:cNvPr id="18" name=""/>
           <p:cNvSpPr txBox="1"/>
           <p:nvPr/>
         </p:nvSpPr>
@@ -22518,7 +22773,7 @@
       </p:sp>
       <p:sp>
         <p:nvSpPr>
-          <p:cNvPr id="17" name=""/>
+          <p:cNvPr id="19" name=""/>
           <p:cNvSpPr txBox="1"/>
           <p:nvPr/>
         </p:nvSpPr>
@@ -22577,7 +22832,7 @@
       </p:sp>
       <p:sp>
         <p:nvSpPr>
-          <p:cNvPr id="18" name=""/>
+          <p:cNvPr id="20" name=""/>
           <p:cNvSpPr txBox="1"/>
           <p:nvPr/>
         </p:nvSpPr>
@@ -22624,7 +22879,7 @@
       </p:sp>
       <p:sp>
         <p:nvSpPr>
-          <p:cNvPr id="19" name=""/>
+          <p:cNvPr id="21" name=""/>
           <p:cNvSpPr txBox="1"/>
           <p:nvPr/>
         </p:nvSpPr>
@@ -22683,7 +22938,7 @@
       </p:sp>
       <p:sp>
         <p:nvSpPr>
-          <p:cNvPr id="20" name=""/>
+          <p:cNvPr id="22" name=""/>
           <p:cNvSpPr txBox="1"/>
           <p:nvPr/>
         </p:nvSpPr>
@@ -22730,7 +22985,7 @@
       </p:sp>
       <p:sp>
         <p:nvSpPr>
-          <p:cNvPr id="21" name=""/>
+          <p:cNvPr id="23" name=""/>
           <p:cNvSpPr txBox="1"/>
           <p:nvPr/>
         </p:nvSpPr>
@@ -22789,7 +23044,7 @@
       </p:sp>
       <p:sp>
         <p:nvSpPr>
-          <p:cNvPr id="22" name=""/>
+          <p:cNvPr id="24" name=""/>
           <p:cNvSpPr txBox="1"/>
           <p:nvPr/>
         </p:nvSpPr>
@@ -22836,7 +23091,7 @@
       </p:sp>
       <p:sp>
         <p:nvSpPr>
-          <p:cNvPr id="23" name=""/>
+          <p:cNvPr id="25" name=""/>
           <p:cNvSpPr txBox="1"/>
           <p:nvPr/>
         </p:nvSpPr>
@@ -22895,7 +23150,7 @@
       </p:sp>
       <p:sp>
         <p:nvSpPr>
-          <p:cNvPr id="24" name=""/>
+          <p:cNvPr id="26" name=""/>
           <p:cNvSpPr txBox="1"/>
           <p:nvPr/>
         </p:nvSpPr>
@@ -22942,7 +23197,7 @@
       </p:sp>
       <p:sp>
         <p:nvSpPr>
-          <p:cNvPr id="25" name=""/>
+          <p:cNvPr id="27" name=""/>
           <p:cNvSpPr txBox="1"/>
           <p:nvPr/>
         </p:nvSpPr>
@@ -23001,7 +23256,7 @@
       </p:sp>
       <p:sp>
         <p:nvSpPr>
-          <p:cNvPr id="26" name=""/>
+          <p:cNvPr id="28" name=""/>
           <p:cNvSpPr/>
           <p:nvPr/>
         </p:nvSpPr>
@@ -23061,7 +23316,7 @@
       </p:sp>
       <p:sp>
         <p:nvSpPr>
-          <p:cNvPr id="27" name=""/>
+          <p:cNvPr id="29" name=""/>
           <p:cNvSpPr txBox="1"/>
           <p:nvPr/>
         </p:nvSpPr>
@@ -23108,7 +23363,7 @@
       </p:sp>
       <p:sp>
         <p:nvSpPr>
-          <p:cNvPr id="28" name=""/>
+          <p:cNvPr id="30" name=""/>
           <p:cNvSpPr txBox="1"/>
           <p:nvPr/>
         </p:nvSpPr>
@@ -23155,7 +23410,7 @@
       </p:sp>
       <p:sp>
         <p:nvSpPr>
-          <p:cNvPr id="29" name=""/>
+          <p:cNvPr id="31" name=""/>
           <p:cNvSpPr txBox="1"/>
           <p:nvPr/>
         </p:nvSpPr>
@@ -23202,7 +23457,7 @@
       </p:sp>
       <p:sp>
         <p:nvSpPr>
-          <p:cNvPr id="30" name=""/>
+          <p:cNvPr id="32" name=""/>
           <p:cNvSpPr txBox="1"/>
           <p:nvPr/>
         </p:nvSpPr>
@@ -23249,7 +23504,7 @@
       </p:sp>
       <p:sp>
         <p:nvSpPr>
-          <p:cNvPr id="31" name=""/>
+          <p:cNvPr id="33" name=""/>
           <p:cNvSpPr txBox="1"/>
           <p:nvPr/>
         </p:nvSpPr>
@@ -23296,7 +23551,7 @@
       </p:sp>
       <p:sp>
         <p:nvSpPr>
-          <p:cNvPr id="32" name=""/>
+          <p:cNvPr id="34" name=""/>
           <p:cNvSpPr/>
           <p:nvPr/>
         </p:nvSpPr>
@@ -23512,7 +23767,7 @@
       </p:sp>
       <p:sp>
         <p:nvSpPr>
-          <p:cNvPr id="33" name=""/>
+          <p:cNvPr id="35" name=""/>
           <p:cNvSpPr txBox="1"/>
           <p:nvPr/>
         </p:nvSpPr>
@@ -23559,7 +23814,7 @@
       </p:sp>
       <p:sp>
         <p:nvSpPr>
-          <p:cNvPr id="34" name=""/>
+          <p:cNvPr id="36" name=""/>
           <p:cNvSpPr txBox="1"/>
           <p:nvPr/>
         </p:nvSpPr>
@@ -23636,7 +23891,7 @@
       </p:grpSpPr>
       <p:sp>
         <p:nvSpPr>
-          <p:cNvPr id="487" name=""/>
+          <p:cNvPr id="489" name=""/>
           <p:cNvSpPr/>
           <p:nvPr/>
         </p:nvSpPr>
@@ -23696,7 +23951,7 @@
       </p:sp>
       <p:sp>
         <p:nvSpPr>
-          <p:cNvPr id="488" name=""/>
+          <p:cNvPr id="490" name=""/>
           <p:cNvSpPr/>
           <p:nvPr/>
         </p:nvSpPr>
@@ -23756,7 +24011,7 @@
       </p:sp>
       <p:sp>
         <p:nvSpPr>
-          <p:cNvPr id="489" name=""/>
+          <p:cNvPr id="491" name=""/>
           <p:cNvSpPr/>
           <p:nvPr/>
         </p:nvSpPr>
@@ -23816,7 +24071,7 @@
       </p:sp>
       <p:pic>
         <p:nvPicPr>
-          <p:cNvPr id="490" name="" descr=""/>
+          <p:cNvPr id="492" name="" descr=""/>
           <p:cNvPicPr/>
           <p:nvPr/>
         </p:nvPicPr>
@@ -23840,7 +24095,7 @@
       </p:pic>
       <p:sp>
         <p:nvSpPr>
-          <p:cNvPr id="491" name=""/>
+          <p:cNvPr id="493" name=""/>
           <p:cNvSpPr/>
           <p:nvPr/>
         </p:nvSpPr>
@@ -23968,7 +24223,7 @@
       </p:sp>
       <p:sp>
         <p:nvSpPr>
-          <p:cNvPr id="492" name=""/>
+          <p:cNvPr id="494" name=""/>
           <p:cNvSpPr txBox="1"/>
           <p:nvPr/>
         </p:nvSpPr>
@@ -24015,7 +24270,7 @@
       </p:sp>
       <p:sp>
         <p:nvSpPr>
-          <p:cNvPr id="493" name=""/>
+          <p:cNvPr id="495" name=""/>
           <p:cNvSpPr txBox="1"/>
           <p:nvPr/>
         </p:nvSpPr>
@@ -24062,7 +24317,7 @@
       </p:sp>
       <p:sp>
         <p:nvSpPr>
-          <p:cNvPr id="494" name=""/>
+          <p:cNvPr id="496" name=""/>
           <p:cNvSpPr txBox="1"/>
           <p:nvPr/>
         </p:nvSpPr>
@@ -24109,7 +24364,7 @@
       </p:sp>
       <p:sp>
         <p:nvSpPr>
-          <p:cNvPr id="495" name=""/>
+          <p:cNvPr id="497" name=""/>
           <p:cNvSpPr/>
           <p:nvPr/>
         </p:nvSpPr>
@@ -24236,7 +24491,7 @@
       </p:sp>
       <p:sp>
         <p:nvSpPr>
-          <p:cNvPr id="496" name=""/>
+          <p:cNvPr id="498" name=""/>
           <p:cNvSpPr txBox="1"/>
           <p:nvPr/>
         </p:nvSpPr>
@@ -24283,7 +24538,7 @@
       </p:sp>
       <p:sp>
         <p:nvSpPr>
-          <p:cNvPr id="497" name=""/>
+          <p:cNvPr id="499" name=""/>
           <p:cNvSpPr txBox="1"/>
           <p:nvPr/>
         </p:nvSpPr>
@@ -24342,7 +24597,7 @@
       </p:sp>
       <p:sp>
         <p:nvSpPr>
-          <p:cNvPr id="498" name=""/>
+          <p:cNvPr id="500" name=""/>
           <p:cNvSpPr txBox="1"/>
           <p:nvPr/>
         </p:nvSpPr>
@@ -24389,7 +24644,7 @@
       </p:sp>
       <p:sp>
         <p:nvSpPr>
-          <p:cNvPr id="499" name=""/>
+          <p:cNvPr id="501" name=""/>
           <p:cNvSpPr txBox="1"/>
           <p:nvPr/>
         </p:nvSpPr>
@@ -24436,7 +24691,7 @@
       </p:sp>
       <p:sp>
         <p:nvSpPr>
-          <p:cNvPr id="500" name=""/>
+          <p:cNvPr id="502" name=""/>
           <p:cNvSpPr/>
           <p:nvPr/>
         </p:nvSpPr>
@@ -24563,7 +24818,7 @@
       </p:sp>
       <p:sp>
         <p:nvSpPr>
-          <p:cNvPr id="501" name=""/>
+          <p:cNvPr id="503" name=""/>
           <p:cNvSpPr txBox="1"/>
           <p:nvPr/>
         </p:nvSpPr>
@@ -24610,7 +24865,7 @@
       </p:sp>
       <p:sp>
         <p:nvSpPr>
-          <p:cNvPr id="502" name=""/>
+          <p:cNvPr id="504" name=""/>
           <p:cNvSpPr txBox="1"/>
           <p:nvPr/>
         </p:nvSpPr>
@@ -24669,7 +24924,7 @@
       </p:sp>
       <p:sp>
         <p:nvSpPr>
-          <p:cNvPr id="503" name=""/>
+          <p:cNvPr id="505" name=""/>
           <p:cNvSpPr txBox="1"/>
           <p:nvPr/>
         </p:nvSpPr>
@@ -24716,7 +24971,7 @@
       </p:sp>
       <p:sp>
         <p:nvSpPr>
-          <p:cNvPr id="504" name=""/>
+          <p:cNvPr id="506" name=""/>
           <p:cNvSpPr txBox="1"/>
           <p:nvPr/>
         </p:nvSpPr>
@@ -24763,7 +25018,7 @@
       </p:sp>
       <p:sp>
         <p:nvSpPr>
-          <p:cNvPr id="505" name=""/>
+          <p:cNvPr id="507" name=""/>
           <p:cNvSpPr/>
           <p:nvPr/>
         </p:nvSpPr>
@@ -24890,7 +25145,7 @@
       </p:sp>
       <p:sp>
         <p:nvSpPr>
-          <p:cNvPr id="506" name=""/>
+          <p:cNvPr id="508" name=""/>
           <p:cNvSpPr txBox="1"/>
           <p:nvPr/>
         </p:nvSpPr>
@@ -24937,7 +25192,7 @@
       </p:sp>
       <p:sp>
         <p:nvSpPr>
-          <p:cNvPr id="507" name=""/>
+          <p:cNvPr id="509" name=""/>
           <p:cNvSpPr txBox="1"/>
           <p:nvPr/>
         </p:nvSpPr>
@@ -24984,7 +25239,7 @@
       </p:sp>
       <p:sp>
         <p:nvSpPr>
-          <p:cNvPr id="508" name=""/>
+          <p:cNvPr id="510" name=""/>
           <p:cNvSpPr txBox="1"/>
           <p:nvPr/>
         </p:nvSpPr>
@@ -25031,7 +25286,7 @@
       </p:sp>
       <p:sp>
         <p:nvSpPr>
-          <p:cNvPr id="509" name=""/>
+          <p:cNvPr id="511" name=""/>
           <p:cNvSpPr txBox="1"/>
           <p:nvPr/>
         </p:nvSpPr>
@@ -25078,7 +25333,7 @@
       </p:sp>
       <p:sp>
         <p:nvSpPr>
-          <p:cNvPr id="510" name=""/>
+          <p:cNvPr id="512" name=""/>
           <p:cNvSpPr/>
           <p:nvPr/>
         </p:nvSpPr>
@@ -25138,7 +25393,7 @@
       </p:sp>
       <p:sp>
         <p:nvSpPr>
-          <p:cNvPr id="511" name=""/>
+          <p:cNvPr id="513" name=""/>
           <p:cNvSpPr txBox="1"/>
           <p:nvPr/>
         </p:nvSpPr>
@@ -25185,7 +25440,7 @@
       </p:sp>
       <p:sp>
         <p:nvSpPr>
-          <p:cNvPr id="512" name=""/>
+          <p:cNvPr id="514" name=""/>
           <p:cNvSpPr/>
           <p:nvPr/>
         </p:nvSpPr>
@@ -25245,7 +25500,7 @@
       </p:sp>
       <p:sp>
         <p:nvSpPr>
-          <p:cNvPr id="513" name=""/>
+          <p:cNvPr id="515" name=""/>
           <p:cNvSpPr txBox="1"/>
           <p:nvPr/>
         </p:nvSpPr>
@@ -25292,7 +25547,7 @@
       </p:sp>
       <p:sp>
         <p:nvSpPr>
-          <p:cNvPr id="514" name=""/>
+          <p:cNvPr id="516" name=""/>
           <p:cNvSpPr txBox="1"/>
           <p:nvPr/>
         </p:nvSpPr>
@@ -25339,7 +25594,7 @@
       </p:sp>
       <p:sp>
         <p:nvSpPr>
-          <p:cNvPr id="515" name=""/>
+          <p:cNvPr id="517" name=""/>
           <p:cNvSpPr txBox="1"/>
           <p:nvPr/>
         </p:nvSpPr>
@@ -25386,7 +25641,7 @@
       </p:sp>
       <p:sp>
         <p:nvSpPr>
-          <p:cNvPr id="516" name=""/>
+          <p:cNvPr id="518" name=""/>
           <p:cNvSpPr txBox="1"/>
           <p:nvPr/>
         </p:nvSpPr>
@@ -25433,7 +25688,7 @@
       </p:sp>
       <p:sp>
         <p:nvSpPr>
-          <p:cNvPr id="517" name=""/>
+          <p:cNvPr id="519" name=""/>
           <p:cNvSpPr txBox="1"/>
           <p:nvPr/>
         </p:nvSpPr>
@@ -25480,7 +25735,7 @@
       </p:sp>
       <p:sp>
         <p:nvSpPr>
-          <p:cNvPr id="518" name=""/>
+          <p:cNvPr id="520" name=""/>
           <p:cNvSpPr/>
           <p:nvPr/>
         </p:nvSpPr>
@@ -25696,7 +25951,7 @@
       </p:sp>
       <p:sp>
         <p:nvSpPr>
-          <p:cNvPr id="519" name=""/>
+          <p:cNvPr id="521" name=""/>
           <p:cNvSpPr txBox="1"/>
           <p:nvPr/>
         </p:nvSpPr>
@@ -25743,7 +25998,7 @@
       </p:sp>
       <p:sp>
         <p:nvSpPr>
-          <p:cNvPr id="520" name=""/>
+          <p:cNvPr id="522" name=""/>
           <p:cNvSpPr txBox="1"/>
           <p:nvPr/>
         </p:nvSpPr>
@@ -25820,7 +26075,7 @@
       </p:grpSpPr>
       <p:sp>
         <p:nvSpPr>
-          <p:cNvPr id="521" name=""/>
+          <p:cNvPr id="523" name=""/>
           <p:cNvSpPr/>
           <p:nvPr/>
         </p:nvSpPr>
@@ -25880,7 +26135,7 @@
       </p:sp>
       <p:sp>
         <p:nvSpPr>
-          <p:cNvPr id="522" name=""/>
+          <p:cNvPr id="524" name=""/>
           <p:cNvSpPr/>
           <p:nvPr/>
         </p:nvSpPr>
@@ -25940,7 +26195,7 @@
       </p:sp>
       <p:sp>
         <p:nvSpPr>
-          <p:cNvPr id="523" name=""/>
+          <p:cNvPr id="525" name=""/>
           <p:cNvSpPr/>
           <p:nvPr/>
         </p:nvSpPr>
@@ -26000,7 +26255,7 @@
       </p:sp>
       <p:pic>
         <p:nvPicPr>
-          <p:cNvPr id="524" name="" descr=""/>
+          <p:cNvPr id="526" name="" descr=""/>
           <p:cNvPicPr/>
           <p:nvPr/>
         </p:nvPicPr>
@@ -26024,7 +26279,7 @@
       </p:pic>
       <p:sp>
         <p:nvSpPr>
-          <p:cNvPr id="525" name=""/>
+          <p:cNvPr id="527" name=""/>
           <p:cNvSpPr/>
           <p:nvPr/>
         </p:nvSpPr>
@@ -26084,7 +26339,7 @@
       </p:sp>
       <p:sp>
         <p:nvSpPr>
-          <p:cNvPr id="526" name=""/>
+          <p:cNvPr id="528" name=""/>
           <p:cNvSpPr/>
           <p:nvPr/>
         </p:nvSpPr>
@@ -26144,7 +26399,7 @@
       </p:sp>
       <p:sp>
         <p:nvSpPr>
-          <p:cNvPr id="527" name=""/>
+          <p:cNvPr id="529" name=""/>
           <p:cNvSpPr/>
           <p:nvPr/>
         </p:nvSpPr>
@@ -26204,7 +26459,7 @@
       </p:sp>
       <p:sp>
         <p:nvSpPr>
-          <p:cNvPr id="528" name=""/>
+          <p:cNvPr id="530" name=""/>
           <p:cNvSpPr/>
           <p:nvPr/>
         </p:nvSpPr>
@@ -26264,7 +26519,7 @@
       </p:sp>
       <p:sp>
         <p:nvSpPr>
-          <p:cNvPr id="529" name=""/>
+          <p:cNvPr id="531" name=""/>
           <p:cNvSpPr/>
           <p:nvPr/>
         </p:nvSpPr>
@@ -26324,7 +26579,7 @@
       </p:sp>
       <p:sp>
         <p:nvSpPr>
-          <p:cNvPr id="530" name=""/>
+          <p:cNvPr id="532" name=""/>
           <p:cNvSpPr/>
           <p:nvPr/>
         </p:nvSpPr>
@@ -26384,7 +26639,7 @@
       </p:sp>
       <p:sp>
         <p:nvSpPr>
-          <p:cNvPr id="531" name=""/>
+          <p:cNvPr id="533" name=""/>
           <p:cNvSpPr/>
           <p:nvPr/>
         </p:nvSpPr>
@@ -26444,7 +26699,7 @@
       </p:sp>
       <p:sp>
         <p:nvSpPr>
-          <p:cNvPr id="532" name=""/>
+          <p:cNvPr id="534" name=""/>
           <p:cNvSpPr/>
           <p:nvPr/>
         </p:nvSpPr>
@@ -26504,7 +26759,7 @@
       </p:sp>
       <p:sp>
         <p:nvSpPr>
-          <p:cNvPr id="533" name=""/>
+          <p:cNvPr id="535" name=""/>
           <p:cNvSpPr/>
           <p:nvPr/>
         </p:nvSpPr>
@@ -26564,7 +26819,7 @@
       </p:sp>
       <p:sp>
         <p:nvSpPr>
-          <p:cNvPr id="534" name=""/>
+          <p:cNvPr id="536" name=""/>
           <p:cNvSpPr/>
           <p:nvPr/>
         </p:nvSpPr>
@@ -26624,7 +26879,7 @@
       </p:sp>
       <p:sp>
         <p:nvSpPr>
-          <p:cNvPr id="535" name=""/>
+          <p:cNvPr id="537" name=""/>
           <p:cNvSpPr/>
           <p:nvPr/>
         </p:nvSpPr>
@@ -26684,7 +26939,7 @@
       </p:sp>
       <p:sp>
         <p:nvSpPr>
-          <p:cNvPr id="536" name=""/>
+          <p:cNvPr id="538" name=""/>
           <p:cNvSpPr/>
           <p:nvPr/>
         </p:nvSpPr>
@@ -26744,7 +26999,7 @@
       </p:sp>
       <p:sp>
         <p:nvSpPr>
-          <p:cNvPr id="537" name=""/>
+          <p:cNvPr id="539" name=""/>
           <p:cNvSpPr/>
           <p:nvPr/>
         </p:nvSpPr>
@@ -26804,7 +27059,7 @@
       </p:sp>
       <p:sp>
         <p:nvSpPr>
-          <p:cNvPr id="538" name=""/>
+          <p:cNvPr id="540" name=""/>
           <p:cNvSpPr/>
           <p:nvPr/>
         </p:nvSpPr>
@@ -26864,7 +27119,7 @@
       </p:sp>
       <p:sp>
         <p:nvSpPr>
-          <p:cNvPr id="539" name=""/>
+          <p:cNvPr id="541" name=""/>
           <p:cNvSpPr/>
           <p:nvPr/>
         </p:nvSpPr>
@@ -26924,7 +27179,7 @@
       </p:sp>
       <p:sp>
         <p:nvSpPr>
-          <p:cNvPr id="540" name=""/>
+          <p:cNvPr id="542" name=""/>
           <p:cNvSpPr/>
           <p:nvPr/>
         </p:nvSpPr>
@@ -26984,7 +27239,7 @@
       </p:sp>
       <p:sp>
         <p:nvSpPr>
-          <p:cNvPr id="541" name=""/>
+          <p:cNvPr id="543" name=""/>
           <p:cNvSpPr/>
           <p:nvPr/>
         </p:nvSpPr>
@@ -27044,7 +27299,7 @@
       </p:sp>
       <p:sp>
         <p:nvSpPr>
-          <p:cNvPr id="542" name=""/>
+          <p:cNvPr id="544" name=""/>
           <p:cNvSpPr/>
           <p:nvPr/>
         </p:nvSpPr>
@@ -27104,7 +27359,7 @@
       </p:sp>
       <p:sp>
         <p:nvSpPr>
-          <p:cNvPr id="543" name=""/>
+          <p:cNvPr id="545" name=""/>
           <p:cNvSpPr/>
           <p:nvPr/>
         </p:nvSpPr>
@@ -27164,7 +27419,7 @@
       </p:sp>
       <p:sp>
         <p:nvSpPr>
-          <p:cNvPr id="544" name=""/>
+          <p:cNvPr id="546" name=""/>
           <p:cNvSpPr/>
           <p:nvPr/>
         </p:nvSpPr>
@@ -27224,7 +27479,7 @@
       </p:sp>
       <p:sp>
         <p:nvSpPr>
-          <p:cNvPr id="545" name=""/>
+          <p:cNvPr id="547" name=""/>
           <p:cNvSpPr/>
           <p:nvPr/>
         </p:nvSpPr>
@@ -27284,7 +27539,7 @@
       </p:sp>
       <p:sp>
         <p:nvSpPr>
-          <p:cNvPr id="546" name=""/>
+          <p:cNvPr id="548" name=""/>
           <p:cNvSpPr/>
           <p:nvPr/>
         </p:nvSpPr>
@@ -27344,7 +27599,7 @@
       </p:sp>
       <p:sp>
         <p:nvSpPr>
-          <p:cNvPr id="547" name=""/>
+          <p:cNvPr id="549" name=""/>
           <p:cNvSpPr/>
           <p:nvPr/>
         </p:nvSpPr>
@@ -27404,7 +27659,7 @@
       </p:sp>
       <p:sp>
         <p:nvSpPr>
-          <p:cNvPr id="548" name=""/>
+          <p:cNvPr id="550" name=""/>
           <p:cNvSpPr/>
           <p:nvPr/>
         </p:nvSpPr>
@@ -27464,7 +27719,7 @@
       </p:sp>
       <p:sp>
         <p:nvSpPr>
-          <p:cNvPr id="549" name=""/>
+          <p:cNvPr id="551" name=""/>
           <p:cNvSpPr/>
           <p:nvPr/>
         </p:nvSpPr>
@@ -27524,7 +27779,7 @@
       </p:sp>
       <p:sp>
         <p:nvSpPr>
-          <p:cNvPr id="550" name=""/>
+          <p:cNvPr id="552" name=""/>
           <p:cNvSpPr/>
           <p:nvPr/>
         </p:nvSpPr>
@@ -27584,7 +27839,7 @@
       </p:sp>
       <p:sp>
         <p:nvSpPr>
-          <p:cNvPr id="551" name=""/>
+          <p:cNvPr id="553" name=""/>
           <p:cNvSpPr/>
           <p:nvPr/>
         </p:nvSpPr>
@@ -27644,7 +27899,7 @@
       </p:sp>
       <p:sp>
         <p:nvSpPr>
-          <p:cNvPr id="552" name=""/>
+          <p:cNvPr id="554" name=""/>
           <p:cNvSpPr/>
           <p:nvPr/>
         </p:nvSpPr>
@@ -27704,7 +27959,7 @@
       </p:sp>
       <p:sp>
         <p:nvSpPr>
-          <p:cNvPr id="553" name=""/>
+          <p:cNvPr id="555" name=""/>
           <p:cNvSpPr/>
           <p:nvPr/>
         </p:nvSpPr>
@@ -27764,7 +28019,7 @@
       </p:sp>
       <p:sp>
         <p:nvSpPr>
-          <p:cNvPr id="554" name=""/>
+          <p:cNvPr id="556" name=""/>
           <p:cNvSpPr/>
           <p:nvPr/>
         </p:nvSpPr>
@@ -27824,7 +28079,7 @@
       </p:sp>
       <p:sp>
         <p:nvSpPr>
-          <p:cNvPr id="555" name=""/>
+          <p:cNvPr id="557" name=""/>
           <p:cNvSpPr/>
           <p:nvPr/>
         </p:nvSpPr>
@@ -27884,7 +28139,7 @@
       </p:sp>
       <p:sp>
         <p:nvSpPr>
-          <p:cNvPr id="556" name=""/>
+          <p:cNvPr id="558" name=""/>
           <p:cNvSpPr/>
           <p:nvPr/>
         </p:nvSpPr>
@@ -27944,7 +28199,7 @@
       </p:sp>
       <p:sp>
         <p:nvSpPr>
-          <p:cNvPr id="557" name=""/>
+          <p:cNvPr id="559" name=""/>
           <p:cNvSpPr/>
           <p:nvPr/>
         </p:nvSpPr>
@@ -28004,7 +28259,7 @@
       </p:sp>
       <p:sp>
         <p:nvSpPr>
-          <p:cNvPr id="558" name=""/>
+          <p:cNvPr id="560" name=""/>
           <p:cNvSpPr/>
           <p:nvPr/>
         </p:nvSpPr>
@@ -28064,7 +28319,7 @@
       </p:sp>
       <p:sp>
         <p:nvSpPr>
-          <p:cNvPr id="559" name=""/>
+          <p:cNvPr id="561" name=""/>
           <p:cNvSpPr/>
           <p:nvPr/>
         </p:nvSpPr>
@@ -28124,7 +28379,7 @@
       </p:sp>
       <p:sp>
         <p:nvSpPr>
-          <p:cNvPr id="560" name=""/>
+          <p:cNvPr id="562" name=""/>
           <p:cNvSpPr/>
           <p:nvPr/>
         </p:nvSpPr>
@@ -28184,7 +28439,7 @@
       </p:sp>
       <p:sp>
         <p:nvSpPr>
-          <p:cNvPr id="561" name=""/>
+          <p:cNvPr id="563" name=""/>
           <p:cNvSpPr/>
           <p:nvPr/>
         </p:nvSpPr>
@@ -28244,7 +28499,7 @@
       </p:sp>
       <p:sp>
         <p:nvSpPr>
-          <p:cNvPr id="562" name=""/>
+          <p:cNvPr id="564" name=""/>
           <p:cNvSpPr/>
           <p:nvPr/>
         </p:nvSpPr>
@@ -28304,7 +28559,7 @@
       </p:sp>
       <p:sp>
         <p:nvSpPr>
-          <p:cNvPr id="563" name=""/>
+          <p:cNvPr id="565" name=""/>
           <p:cNvSpPr/>
           <p:nvPr/>
         </p:nvSpPr>
@@ -28364,7 +28619,7 @@
       </p:sp>
       <p:sp>
         <p:nvSpPr>
-          <p:cNvPr id="564" name=""/>
+          <p:cNvPr id="566" name=""/>
           <p:cNvSpPr/>
           <p:nvPr/>
         </p:nvSpPr>
@@ -28424,7 +28679,7 @@
       </p:sp>
       <p:sp>
         <p:nvSpPr>
-          <p:cNvPr id="565" name=""/>
+          <p:cNvPr id="567" name=""/>
           <p:cNvSpPr/>
           <p:nvPr/>
         </p:nvSpPr>
@@ -28484,7 +28739,7 @@
       </p:sp>
       <p:sp>
         <p:nvSpPr>
-          <p:cNvPr id="566" name=""/>
+          <p:cNvPr id="568" name=""/>
           <p:cNvSpPr/>
           <p:nvPr/>
         </p:nvSpPr>
@@ -28544,7 +28799,7 @@
       </p:sp>
       <p:sp>
         <p:nvSpPr>
-          <p:cNvPr id="567" name=""/>
+          <p:cNvPr id="569" name=""/>
           <p:cNvSpPr/>
           <p:nvPr/>
         </p:nvSpPr>
@@ -28604,7 +28859,7 @@
       </p:sp>
       <p:sp>
         <p:nvSpPr>
-          <p:cNvPr id="568" name=""/>
+          <p:cNvPr id="570" name=""/>
           <p:cNvSpPr/>
           <p:nvPr/>
         </p:nvSpPr>
@@ -28664,7 +28919,7 @@
       </p:sp>
       <p:sp>
         <p:nvSpPr>
-          <p:cNvPr id="569" name=""/>
+          <p:cNvPr id="571" name=""/>
           <p:cNvSpPr/>
           <p:nvPr/>
         </p:nvSpPr>
@@ -28724,7 +28979,7 @@
       </p:sp>
       <p:sp>
         <p:nvSpPr>
-          <p:cNvPr id="570" name=""/>
+          <p:cNvPr id="572" name=""/>
           <p:cNvSpPr/>
           <p:nvPr/>
         </p:nvSpPr>
@@ -28784,7 +29039,7 @@
       </p:sp>
       <p:sp>
         <p:nvSpPr>
-          <p:cNvPr id="571" name=""/>
+          <p:cNvPr id="573" name=""/>
           <p:cNvSpPr/>
           <p:nvPr/>
         </p:nvSpPr>
@@ -28844,7 +29099,7 @@
       </p:sp>
       <p:sp>
         <p:nvSpPr>
-          <p:cNvPr id="572" name=""/>
+          <p:cNvPr id="574" name=""/>
           <p:cNvSpPr/>
           <p:nvPr/>
         </p:nvSpPr>
@@ -28904,7 +29159,7 @@
       </p:sp>
       <p:sp>
         <p:nvSpPr>
-          <p:cNvPr id="573" name=""/>
+          <p:cNvPr id="575" name=""/>
           <p:cNvSpPr/>
           <p:nvPr/>
         </p:nvSpPr>
@@ -28964,7 +29219,7 @@
       </p:sp>
       <p:sp>
         <p:nvSpPr>
-          <p:cNvPr id="574" name=""/>
+          <p:cNvPr id="576" name=""/>
           <p:cNvSpPr/>
           <p:nvPr/>
         </p:nvSpPr>
@@ -29024,7 +29279,7 @@
       </p:sp>
       <p:sp>
         <p:nvSpPr>
-          <p:cNvPr id="575" name=""/>
+          <p:cNvPr id="577" name=""/>
           <p:cNvSpPr/>
           <p:nvPr/>
         </p:nvSpPr>
@@ -29084,7 +29339,7 @@
       </p:sp>
       <p:sp>
         <p:nvSpPr>
-          <p:cNvPr id="576" name=""/>
+          <p:cNvPr id="578" name=""/>
           <p:cNvSpPr/>
           <p:nvPr/>
         </p:nvSpPr>
@@ -29144,7 +29399,7 @@
       </p:sp>
       <p:sp>
         <p:nvSpPr>
-          <p:cNvPr id="577" name=""/>
+          <p:cNvPr id="579" name=""/>
           <p:cNvSpPr/>
           <p:nvPr/>
         </p:nvSpPr>
@@ -29204,7 +29459,7 @@
       </p:sp>
       <p:sp>
         <p:nvSpPr>
-          <p:cNvPr id="578" name=""/>
+          <p:cNvPr id="580" name=""/>
           <p:cNvSpPr/>
           <p:nvPr/>
         </p:nvSpPr>
@@ -29264,7 +29519,7 @@
       </p:sp>
       <p:sp>
         <p:nvSpPr>
-          <p:cNvPr id="579" name=""/>
+          <p:cNvPr id="581" name=""/>
           <p:cNvSpPr/>
           <p:nvPr/>
         </p:nvSpPr>
@@ -29324,7 +29579,7 @@
       </p:sp>
       <p:sp>
         <p:nvSpPr>
-          <p:cNvPr id="580" name=""/>
+          <p:cNvPr id="582" name=""/>
           <p:cNvSpPr/>
           <p:nvPr/>
         </p:nvSpPr>
@@ -29384,7 +29639,7 @@
       </p:sp>
       <p:sp>
         <p:nvSpPr>
-          <p:cNvPr id="581" name=""/>
+          <p:cNvPr id="583" name=""/>
           <p:cNvSpPr/>
           <p:nvPr/>
         </p:nvSpPr>
@@ -29444,7 +29699,7 @@
       </p:sp>
       <p:sp>
         <p:nvSpPr>
-          <p:cNvPr id="582" name=""/>
+          <p:cNvPr id="584" name=""/>
           <p:cNvSpPr/>
           <p:nvPr/>
         </p:nvSpPr>
@@ -29504,7 +29759,7 @@
       </p:sp>
       <p:sp>
         <p:nvSpPr>
-          <p:cNvPr id="583" name=""/>
+          <p:cNvPr id="585" name=""/>
           <p:cNvSpPr/>
           <p:nvPr/>
         </p:nvSpPr>
@@ -29564,7 +29819,7 @@
       </p:sp>
       <p:sp>
         <p:nvSpPr>
-          <p:cNvPr id="584" name=""/>
+          <p:cNvPr id="586" name=""/>
           <p:cNvSpPr/>
           <p:nvPr/>
         </p:nvSpPr>
@@ -29624,7 +29879,7 @@
       </p:sp>
       <p:sp>
         <p:nvSpPr>
-          <p:cNvPr id="585" name=""/>
+          <p:cNvPr id="587" name=""/>
           <p:cNvSpPr/>
           <p:nvPr/>
         </p:nvSpPr>
@@ -29684,7 +29939,7 @@
       </p:sp>
       <p:sp>
         <p:nvSpPr>
-          <p:cNvPr id="586" name=""/>
+          <p:cNvPr id="588" name=""/>
           <p:cNvSpPr/>
           <p:nvPr/>
         </p:nvSpPr>
@@ -29744,7 +29999,7 @@
       </p:sp>
       <p:sp>
         <p:nvSpPr>
-          <p:cNvPr id="587" name=""/>
+          <p:cNvPr id="589" name=""/>
           <p:cNvSpPr/>
           <p:nvPr/>
         </p:nvSpPr>
@@ -29804,7 +30059,7 @@
       </p:sp>
       <p:sp>
         <p:nvSpPr>
-          <p:cNvPr id="588" name=""/>
+          <p:cNvPr id="590" name=""/>
           <p:cNvSpPr txBox="1"/>
           <p:nvPr/>
         </p:nvSpPr>
@@ -29851,7 +30106,7 @@
       </p:sp>
       <p:sp>
         <p:nvSpPr>
-          <p:cNvPr id="589" name=""/>
+          <p:cNvPr id="591" name=""/>
           <p:cNvSpPr txBox="1"/>
           <p:nvPr/>
         </p:nvSpPr>
@@ -29898,7 +30153,7 @@
       </p:sp>
       <p:sp>
         <p:nvSpPr>
-          <p:cNvPr id="590" name=""/>
+          <p:cNvPr id="592" name=""/>
           <p:cNvSpPr txBox="1"/>
           <p:nvPr/>
         </p:nvSpPr>
@@ -29945,7 +30200,7 @@
       </p:sp>
       <p:sp>
         <p:nvSpPr>
-          <p:cNvPr id="591" name=""/>
+          <p:cNvPr id="593" name=""/>
           <p:cNvSpPr txBox="1"/>
           <p:nvPr/>
         </p:nvSpPr>
@@ -29992,7 +30247,7 @@
       </p:sp>
       <p:sp>
         <p:nvSpPr>
-          <p:cNvPr id="592" name=""/>
+          <p:cNvPr id="594" name=""/>
           <p:cNvSpPr txBox="1"/>
           <p:nvPr/>
         </p:nvSpPr>
@@ -30039,7 +30294,7 @@
       </p:sp>
       <p:sp>
         <p:nvSpPr>
-          <p:cNvPr id="593" name=""/>
+          <p:cNvPr id="595" name=""/>
           <p:cNvSpPr txBox="1"/>
           <p:nvPr/>
         </p:nvSpPr>
@@ -30086,7 +30341,7 @@
       </p:sp>
       <p:sp>
         <p:nvSpPr>
-          <p:cNvPr id="594" name=""/>
+          <p:cNvPr id="596" name=""/>
           <p:cNvSpPr txBox="1"/>
           <p:nvPr/>
         </p:nvSpPr>
@@ -30133,7 +30388,7 @@
       </p:sp>
       <p:sp>
         <p:nvSpPr>
-          <p:cNvPr id="595" name=""/>
+          <p:cNvPr id="597" name=""/>
           <p:cNvSpPr txBox="1"/>
           <p:nvPr/>
         </p:nvSpPr>
@@ -30180,7 +30435,7 @@
       </p:sp>
       <p:sp>
         <p:nvSpPr>
-          <p:cNvPr id="596" name=""/>
+          <p:cNvPr id="598" name=""/>
           <p:cNvSpPr txBox="1"/>
           <p:nvPr/>
         </p:nvSpPr>
@@ -30227,7 +30482,7 @@
       </p:sp>
       <p:sp>
         <p:nvSpPr>
-          <p:cNvPr id="597" name=""/>
+          <p:cNvPr id="599" name=""/>
           <p:cNvSpPr txBox="1"/>
           <p:nvPr/>
         </p:nvSpPr>
@@ -30274,7 +30529,7 @@
       </p:sp>
       <p:sp>
         <p:nvSpPr>
-          <p:cNvPr id="598" name=""/>
+          <p:cNvPr id="600" name=""/>
           <p:cNvSpPr txBox="1"/>
           <p:nvPr/>
         </p:nvSpPr>
@@ -30321,7 +30576,7 @@
       </p:sp>
       <p:sp>
         <p:nvSpPr>
-          <p:cNvPr id="599" name=""/>
+          <p:cNvPr id="601" name=""/>
           <p:cNvSpPr txBox="1"/>
           <p:nvPr/>
         </p:nvSpPr>
@@ -30368,7 +30623,7 @@
       </p:sp>
       <p:sp>
         <p:nvSpPr>
-          <p:cNvPr id="600" name=""/>
+          <p:cNvPr id="602" name=""/>
           <p:cNvSpPr txBox="1"/>
           <p:nvPr/>
         </p:nvSpPr>
@@ -30415,7 +30670,7 @@
       </p:sp>
       <p:sp>
         <p:nvSpPr>
-          <p:cNvPr id="601" name=""/>
+          <p:cNvPr id="603" name=""/>
           <p:cNvSpPr txBox="1"/>
           <p:nvPr/>
         </p:nvSpPr>
@@ -30462,7 +30717,7 @@
       </p:sp>
       <p:sp>
         <p:nvSpPr>
-          <p:cNvPr id="602" name=""/>
+          <p:cNvPr id="604" name=""/>
           <p:cNvSpPr txBox="1"/>
           <p:nvPr/>
         </p:nvSpPr>
@@ -30509,7 +30764,7 @@
       </p:sp>
       <p:sp>
         <p:nvSpPr>
-          <p:cNvPr id="603" name=""/>
+          <p:cNvPr id="605" name=""/>
           <p:cNvSpPr txBox="1"/>
           <p:nvPr/>
         </p:nvSpPr>
@@ -30556,7 +30811,7 @@
       </p:sp>
       <p:sp>
         <p:nvSpPr>
-          <p:cNvPr id="604" name=""/>
+          <p:cNvPr id="606" name=""/>
           <p:cNvSpPr txBox="1"/>
           <p:nvPr/>
         </p:nvSpPr>
@@ -30603,7 +30858,7 @@
       </p:sp>
       <p:sp>
         <p:nvSpPr>
-          <p:cNvPr id="605" name=""/>
+          <p:cNvPr id="607" name=""/>
           <p:cNvSpPr txBox="1"/>
           <p:nvPr/>
         </p:nvSpPr>
@@ -30650,7 +30905,7 @@
       </p:sp>
       <p:sp>
         <p:nvSpPr>
-          <p:cNvPr id="606" name=""/>
+          <p:cNvPr id="608" name=""/>
           <p:cNvSpPr txBox="1"/>
           <p:nvPr/>
         </p:nvSpPr>
@@ -30697,7 +30952,7 @@
       </p:sp>
       <p:sp>
         <p:nvSpPr>
-          <p:cNvPr id="607" name=""/>
+          <p:cNvPr id="609" name=""/>
           <p:cNvSpPr txBox="1"/>
           <p:nvPr/>
         </p:nvSpPr>
@@ -30744,7 +30999,7 @@
       </p:sp>
       <p:sp>
         <p:nvSpPr>
-          <p:cNvPr id="608" name=""/>
+          <p:cNvPr id="610" name=""/>
           <p:cNvSpPr txBox="1"/>
           <p:nvPr/>
         </p:nvSpPr>
@@ -30791,7 +31046,7 @@
       </p:sp>
       <p:sp>
         <p:nvSpPr>
-          <p:cNvPr id="609" name=""/>
+          <p:cNvPr id="611" name=""/>
           <p:cNvSpPr txBox="1"/>
           <p:nvPr/>
         </p:nvSpPr>
@@ -30838,7 +31093,7 @@
       </p:sp>
       <p:sp>
         <p:nvSpPr>
-          <p:cNvPr id="610" name=""/>
+          <p:cNvPr id="612" name=""/>
           <p:cNvSpPr txBox="1"/>
           <p:nvPr/>
         </p:nvSpPr>
@@ -30885,7 +31140,7 @@
       </p:sp>
       <p:sp>
         <p:nvSpPr>
-          <p:cNvPr id="611" name=""/>
+          <p:cNvPr id="613" name=""/>
           <p:cNvSpPr txBox="1"/>
           <p:nvPr/>
         </p:nvSpPr>
@@ -30932,7 +31187,7 @@
       </p:sp>
       <p:sp>
         <p:nvSpPr>
-          <p:cNvPr id="612" name=""/>
+          <p:cNvPr id="614" name=""/>
           <p:cNvSpPr txBox="1"/>
           <p:nvPr/>
         </p:nvSpPr>
@@ -30979,7 +31234,7 @@
       </p:sp>
       <p:sp>
         <p:nvSpPr>
-          <p:cNvPr id="613" name=""/>
+          <p:cNvPr id="615" name=""/>
           <p:cNvSpPr/>
           <p:nvPr/>
         </p:nvSpPr>
@@ -31199,7 +31454,7 @@
       </p:sp>
       <p:sp>
         <p:nvSpPr>
-          <p:cNvPr id="614" name=""/>
+          <p:cNvPr id="616" name=""/>
           <p:cNvSpPr/>
           <p:nvPr/>
         </p:nvSpPr>
@@ -31418,7 +31673,7 @@
       </p:sp>
       <p:sp>
         <p:nvSpPr>
-          <p:cNvPr id="615" name=""/>
+          <p:cNvPr id="617" name=""/>
           <p:cNvSpPr txBox="1"/>
           <p:nvPr/>
         </p:nvSpPr>
@@ -31465,7 +31720,7 @@
       </p:sp>
       <p:sp>
         <p:nvSpPr>
-          <p:cNvPr id="616" name=""/>
+          <p:cNvPr id="618" name=""/>
           <p:cNvSpPr txBox="1"/>
           <p:nvPr/>
         </p:nvSpPr>
@@ -31512,7 +31767,7 @@
       </p:sp>
       <p:sp>
         <p:nvSpPr>
-          <p:cNvPr id="617" name=""/>
+          <p:cNvPr id="619" name=""/>
           <p:cNvSpPr/>
           <p:nvPr/>
         </p:nvSpPr>
@@ -31728,7 +31983,7 @@
       </p:sp>
       <p:sp>
         <p:nvSpPr>
-          <p:cNvPr id="618" name=""/>
+          <p:cNvPr id="620" name=""/>
           <p:cNvSpPr txBox="1"/>
           <p:nvPr/>
         </p:nvSpPr>
@@ -31775,7 +32030,7 @@
       </p:sp>
       <p:sp>
         <p:nvSpPr>
-          <p:cNvPr id="619" name=""/>
+          <p:cNvPr id="621" name=""/>
           <p:cNvSpPr txBox="1"/>
           <p:nvPr/>
         </p:nvSpPr>
@@ -31852,7 +32107,7 @@
       </p:grpSpPr>
       <p:sp>
         <p:nvSpPr>
-          <p:cNvPr id="620" name=""/>
+          <p:cNvPr id="622" name=""/>
           <p:cNvSpPr/>
           <p:nvPr/>
         </p:nvSpPr>
@@ -31912,7 +32167,7 @@
       </p:sp>
       <p:sp>
         <p:nvSpPr>
-          <p:cNvPr id="621" name=""/>
+          <p:cNvPr id="623" name=""/>
           <p:cNvSpPr/>
           <p:nvPr/>
         </p:nvSpPr>
@@ -31972,7 +32227,7 @@
       </p:sp>
       <p:sp>
         <p:nvSpPr>
-          <p:cNvPr id="622" name=""/>
+          <p:cNvPr id="624" name=""/>
           <p:cNvSpPr/>
           <p:nvPr/>
         </p:nvSpPr>
@@ -32032,7 +32287,7 @@
       </p:sp>
       <p:pic>
         <p:nvPicPr>
-          <p:cNvPr id="623" name="" descr=""/>
+          <p:cNvPr id="625" name="" descr=""/>
           <p:cNvPicPr/>
           <p:nvPr/>
         </p:nvPicPr>
@@ -32056,7 +32311,7 @@
       </p:pic>
       <p:sp>
         <p:nvSpPr>
-          <p:cNvPr id="624" name=""/>
+          <p:cNvPr id="626" name=""/>
           <p:cNvSpPr txBox="1"/>
           <p:nvPr/>
         </p:nvSpPr>
@@ -32103,7 +32358,7 @@
       </p:sp>
       <p:sp>
         <p:nvSpPr>
-          <p:cNvPr id="625" name=""/>
+          <p:cNvPr id="627" name=""/>
           <p:cNvSpPr txBox="1"/>
           <p:nvPr/>
         </p:nvSpPr>
@@ -32150,7 +32405,7 @@
       </p:sp>
       <p:sp>
         <p:nvSpPr>
-          <p:cNvPr id="626" name=""/>
+          <p:cNvPr id="628" name=""/>
           <p:cNvSpPr txBox="1"/>
           <p:nvPr/>
         </p:nvSpPr>
@@ -32197,7 +32452,7 @@
       </p:sp>
       <p:sp>
         <p:nvSpPr>
-          <p:cNvPr id="627" name=""/>
+          <p:cNvPr id="629" name=""/>
           <p:cNvSpPr txBox="1"/>
           <p:nvPr/>
         </p:nvSpPr>
@@ -32244,7 +32499,7 @@
       </p:sp>
       <p:sp>
         <p:nvSpPr>
-          <p:cNvPr id="628" name=""/>
+          <p:cNvPr id="630" name=""/>
           <p:cNvSpPr/>
           <p:nvPr/>
         </p:nvSpPr>
@@ -32464,7 +32719,7 @@
       </p:sp>
       <p:sp>
         <p:nvSpPr>
-          <p:cNvPr id="629" name=""/>
+          <p:cNvPr id="631" name=""/>
           <p:cNvSpPr/>
           <p:nvPr/>
         </p:nvSpPr>
@@ -32683,7 +32938,7 @@
       </p:sp>
       <p:sp>
         <p:nvSpPr>
-          <p:cNvPr id="630" name=""/>
+          <p:cNvPr id="632" name=""/>
           <p:cNvSpPr txBox="1"/>
           <p:nvPr/>
         </p:nvSpPr>
@@ -32730,7 +32985,7 @@
       </p:sp>
       <p:sp>
         <p:nvSpPr>
-          <p:cNvPr id="631" name=""/>
+          <p:cNvPr id="633" name=""/>
           <p:cNvSpPr txBox="1"/>
           <p:nvPr/>
         </p:nvSpPr>
@@ -32777,7 +33032,7 @@
       </p:sp>
       <p:sp>
         <p:nvSpPr>
-          <p:cNvPr id="632" name=""/>
+          <p:cNvPr id="634" name=""/>
           <p:cNvSpPr txBox="1"/>
           <p:nvPr/>
         </p:nvSpPr>
@@ -32824,7 +33079,7 @@
       </p:sp>
       <p:sp>
         <p:nvSpPr>
-          <p:cNvPr id="633" name=""/>
+          <p:cNvPr id="635" name=""/>
           <p:cNvSpPr txBox="1"/>
           <p:nvPr/>
         </p:nvSpPr>
@@ -32871,7 +33126,7 @@
       </p:sp>
       <p:sp>
         <p:nvSpPr>
-          <p:cNvPr id="634" name=""/>
+          <p:cNvPr id="636" name=""/>
           <p:cNvSpPr txBox="1"/>
           <p:nvPr/>
         </p:nvSpPr>
@@ -32918,7 +33173,7 @@
       </p:sp>
       <p:sp>
         <p:nvSpPr>
-          <p:cNvPr id="635" name=""/>
+          <p:cNvPr id="637" name=""/>
           <p:cNvSpPr/>
           <p:nvPr/>
         </p:nvSpPr>
@@ -33134,7 +33389,7 @@
       </p:sp>
       <p:sp>
         <p:nvSpPr>
-          <p:cNvPr id="636" name=""/>
+          <p:cNvPr id="638" name=""/>
           <p:cNvSpPr txBox="1"/>
           <p:nvPr/>
         </p:nvSpPr>
@@ -33181,7 +33436,7 @@
       </p:sp>
       <p:sp>
         <p:nvSpPr>
-          <p:cNvPr id="637" name=""/>
+          <p:cNvPr id="639" name=""/>
           <p:cNvSpPr txBox="1"/>
           <p:nvPr/>
         </p:nvSpPr>
@@ -33258,7 +33513,7 @@
       </p:grpSpPr>
       <p:sp>
         <p:nvSpPr>
-          <p:cNvPr id="638" name=""/>
+          <p:cNvPr id="640" name=""/>
           <p:cNvSpPr/>
           <p:nvPr/>
         </p:nvSpPr>
@@ -33318,7 +33573,7 @@
       </p:sp>
       <p:sp>
         <p:nvSpPr>
-          <p:cNvPr id="639" name=""/>
+          <p:cNvPr id="641" name=""/>
           <p:cNvSpPr/>
           <p:nvPr/>
         </p:nvSpPr>
@@ -33378,7 +33633,7 @@
       </p:sp>
       <p:sp>
         <p:nvSpPr>
-          <p:cNvPr id="640" name=""/>
+          <p:cNvPr id="642" name=""/>
           <p:cNvSpPr/>
           <p:nvPr/>
         </p:nvSpPr>
@@ -33438,7 +33693,7 @@
       </p:sp>
       <p:pic>
         <p:nvPicPr>
-          <p:cNvPr id="641" name="" descr=""/>
+          <p:cNvPr id="643" name="" descr=""/>
           <p:cNvPicPr/>
           <p:nvPr/>
         </p:nvPicPr>
@@ -33462,7 +33717,7 @@
       </p:pic>
       <p:sp>
         <p:nvSpPr>
-          <p:cNvPr id="642" name=""/>
+          <p:cNvPr id="644" name=""/>
           <p:cNvSpPr/>
           <p:nvPr/>
         </p:nvSpPr>
@@ -33522,7 +33777,7 @@
       </p:sp>
       <p:pic>
         <p:nvPicPr>
-          <p:cNvPr id="643" name="" descr=""/>
+          <p:cNvPr id="645" name="" descr=""/>
           <p:cNvPicPr/>
           <p:nvPr/>
         </p:nvPicPr>
@@ -33546,7 +33801,7 @@
       </p:pic>
       <p:sp>
         <p:nvSpPr>
-          <p:cNvPr id="644" name=""/>
+          <p:cNvPr id="646" name=""/>
           <p:cNvSpPr txBox="1"/>
           <p:nvPr/>
         </p:nvSpPr>
@@ -33593,7 +33848,7 @@
       </p:sp>
       <p:sp>
         <p:nvSpPr>
-          <p:cNvPr id="645" name=""/>
+          <p:cNvPr id="647" name=""/>
           <p:cNvSpPr/>
           <p:nvPr/>
         </p:nvSpPr>
@@ -33809,7 +34064,7 @@
       </p:sp>
       <p:sp>
         <p:nvSpPr>
-          <p:cNvPr id="646" name=""/>
+          <p:cNvPr id="648" name=""/>
           <p:cNvSpPr txBox="1"/>
           <p:nvPr/>
         </p:nvSpPr>
@@ -33856,7 +34111,7 @@
       </p:sp>
       <p:sp>
         <p:nvSpPr>
-          <p:cNvPr id="647" name=""/>
+          <p:cNvPr id="649" name=""/>
           <p:cNvSpPr txBox="1"/>
           <p:nvPr/>
         </p:nvSpPr>
@@ -33933,7 +34188,7 @@
       </p:grpSpPr>
       <p:sp>
         <p:nvSpPr>
-          <p:cNvPr id="648" name=""/>
+          <p:cNvPr id="650" name=""/>
           <p:cNvSpPr/>
           <p:nvPr/>
         </p:nvSpPr>
@@ -33993,7 +34248,7 @@
       </p:sp>
       <p:sp>
         <p:nvSpPr>
-          <p:cNvPr id="649" name=""/>
+          <p:cNvPr id="651" name=""/>
           <p:cNvSpPr/>
           <p:nvPr/>
         </p:nvSpPr>
@@ -34053,7 +34308,7 @@
       </p:sp>
       <p:sp>
         <p:nvSpPr>
-          <p:cNvPr id="650" name=""/>
+          <p:cNvPr id="652" name=""/>
           <p:cNvSpPr/>
           <p:nvPr/>
         </p:nvSpPr>
@@ -34113,7 +34368,7 @@
       </p:sp>
       <p:pic>
         <p:nvPicPr>
-          <p:cNvPr id="651" name="" descr=""/>
+          <p:cNvPr id="653" name="" descr=""/>
           <p:cNvPicPr/>
           <p:nvPr/>
         </p:nvPicPr>
@@ -34137,7 +34392,7 @@
       </p:pic>
       <p:sp>
         <p:nvSpPr>
-          <p:cNvPr id="652" name=""/>
+          <p:cNvPr id="654" name=""/>
           <p:cNvSpPr txBox="1"/>
           <p:nvPr/>
         </p:nvSpPr>
@@ -34184,7 +34439,7 @@
       </p:sp>
       <p:sp>
         <p:nvSpPr>
-          <p:cNvPr id="653" name=""/>
+          <p:cNvPr id="655" name=""/>
           <p:cNvSpPr txBox="1"/>
           <p:nvPr/>
         </p:nvSpPr>
@@ -34231,7 +34486,7 @@
       </p:sp>
       <p:sp>
         <p:nvSpPr>
-          <p:cNvPr id="654" name=""/>
+          <p:cNvPr id="656" name=""/>
           <p:cNvSpPr/>
           <p:nvPr/>
         </p:nvSpPr>
@@ -34451,7 +34706,7 @@
       </p:sp>
       <p:sp>
         <p:nvSpPr>
-          <p:cNvPr id="655" name=""/>
+          <p:cNvPr id="657" name=""/>
           <p:cNvSpPr/>
           <p:nvPr/>
         </p:nvSpPr>
@@ -34670,7 +34925,7 @@
       </p:sp>
       <p:sp>
         <p:nvSpPr>
-          <p:cNvPr id="656" name=""/>
+          <p:cNvPr id="658" name=""/>
           <p:cNvSpPr txBox="1"/>
           <p:nvPr/>
         </p:nvSpPr>
@@ -34717,7 +34972,7 @@
       </p:sp>
       <p:sp>
         <p:nvSpPr>
-          <p:cNvPr id="657" name=""/>
+          <p:cNvPr id="659" name=""/>
           <p:cNvSpPr/>
           <p:nvPr/>
         </p:nvSpPr>
@@ -34845,7 +35100,7 @@
       </p:sp>
       <p:sp>
         <p:nvSpPr>
-          <p:cNvPr id="658" name=""/>
+          <p:cNvPr id="660" name=""/>
           <p:cNvSpPr txBox="1"/>
           <p:nvPr/>
         </p:nvSpPr>
@@ -34892,7 +35147,7 @@
       </p:sp>
       <p:sp>
         <p:nvSpPr>
-          <p:cNvPr id="659" name=""/>
+          <p:cNvPr id="661" name=""/>
           <p:cNvSpPr txBox="1"/>
           <p:nvPr/>
         </p:nvSpPr>
@@ -34939,7 +35194,7 @@
       </p:sp>
       <p:sp>
         <p:nvSpPr>
-          <p:cNvPr id="660" name=""/>
+          <p:cNvPr id="662" name=""/>
           <p:cNvSpPr/>
           <p:nvPr/>
         </p:nvSpPr>
@@ -35067,7 +35322,7 @@
       </p:sp>
       <p:sp>
         <p:nvSpPr>
-          <p:cNvPr id="661" name=""/>
+          <p:cNvPr id="663" name=""/>
           <p:cNvSpPr txBox="1"/>
           <p:nvPr/>
         </p:nvSpPr>
@@ -35114,7 +35369,7 @@
       </p:sp>
       <p:sp>
         <p:nvSpPr>
-          <p:cNvPr id="662" name=""/>
+          <p:cNvPr id="664" name=""/>
           <p:cNvSpPr txBox="1"/>
           <p:nvPr/>
         </p:nvSpPr>
@@ -35161,7 +35416,7 @@
       </p:sp>
       <p:sp>
         <p:nvSpPr>
-          <p:cNvPr id="663" name=""/>
+          <p:cNvPr id="665" name=""/>
           <p:cNvSpPr/>
           <p:nvPr/>
         </p:nvSpPr>
@@ -35289,7 +35544,7 @@
       </p:sp>
       <p:sp>
         <p:nvSpPr>
-          <p:cNvPr id="664" name=""/>
+          <p:cNvPr id="666" name=""/>
           <p:cNvSpPr txBox="1"/>
           <p:nvPr/>
         </p:nvSpPr>
@@ -35336,7 +35591,7 @@
       </p:sp>
       <p:sp>
         <p:nvSpPr>
-          <p:cNvPr id="665" name=""/>
+          <p:cNvPr id="667" name=""/>
           <p:cNvSpPr txBox="1"/>
           <p:nvPr/>
         </p:nvSpPr>
@@ -35383,7 +35638,7 @@
       </p:sp>
       <p:sp>
         <p:nvSpPr>
-          <p:cNvPr id="666" name=""/>
+          <p:cNvPr id="668" name=""/>
           <p:cNvSpPr txBox="1"/>
           <p:nvPr/>
         </p:nvSpPr>
@@ -35430,7 +35685,7 @@
       </p:sp>
       <p:sp>
         <p:nvSpPr>
-          <p:cNvPr id="667" name=""/>
+          <p:cNvPr id="669" name=""/>
           <p:cNvSpPr/>
           <p:nvPr/>
         </p:nvSpPr>
@@ -35558,7 +35813,7 @@
       </p:sp>
       <p:sp>
         <p:nvSpPr>
-          <p:cNvPr id="668" name=""/>
+          <p:cNvPr id="670" name=""/>
           <p:cNvSpPr txBox="1"/>
           <p:nvPr/>
         </p:nvSpPr>
@@ -35605,7 +35860,7 @@
       </p:sp>
       <p:sp>
         <p:nvSpPr>
-          <p:cNvPr id="669" name=""/>
+          <p:cNvPr id="671" name=""/>
           <p:cNvSpPr txBox="1"/>
           <p:nvPr/>
         </p:nvSpPr>
@@ -35652,7 +35907,7 @@
       </p:sp>
       <p:sp>
         <p:nvSpPr>
-          <p:cNvPr id="670" name=""/>
+          <p:cNvPr id="672" name=""/>
           <p:cNvSpPr/>
           <p:nvPr/>
         </p:nvSpPr>
@@ -35872,7 +36127,7 @@
       </p:sp>
       <p:sp>
         <p:nvSpPr>
-          <p:cNvPr id="671" name=""/>
+          <p:cNvPr id="673" name=""/>
           <p:cNvSpPr/>
           <p:nvPr/>
         </p:nvSpPr>
@@ -36091,7 +36346,7 @@
       </p:sp>
       <p:sp>
         <p:nvSpPr>
-          <p:cNvPr id="672" name=""/>
+          <p:cNvPr id="674" name=""/>
           <p:cNvSpPr txBox="1"/>
           <p:nvPr/>
         </p:nvSpPr>
@@ -36138,7 +36393,7 @@
       </p:sp>
       <p:sp>
         <p:nvSpPr>
-          <p:cNvPr id="673" name=""/>
+          <p:cNvPr id="675" name=""/>
           <p:cNvSpPr/>
           <p:nvPr/>
         </p:nvSpPr>
@@ -36266,7 +36521,7 @@
       </p:sp>
       <p:sp>
         <p:nvSpPr>
-          <p:cNvPr id="674" name=""/>
+          <p:cNvPr id="676" name=""/>
           <p:cNvSpPr txBox="1"/>
           <p:nvPr/>
         </p:nvSpPr>
@@ -36313,7 +36568,7 @@
       </p:sp>
       <p:sp>
         <p:nvSpPr>
-          <p:cNvPr id="675" name=""/>
+          <p:cNvPr id="677" name=""/>
           <p:cNvSpPr txBox="1"/>
           <p:nvPr/>
         </p:nvSpPr>
@@ -36360,7 +36615,7 @@
       </p:sp>
       <p:sp>
         <p:nvSpPr>
-          <p:cNvPr id="676" name=""/>
+          <p:cNvPr id="678" name=""/>
           <p:cNvSpPr/>
           <p:nvPr/>
         </p:nvSpPr>
@@ -36488,7 +36743,7 @@
       </p:sp>
       <p:sp>
         <p:nvSpPr>
-          <p:cNvPr id="677" name=""/>
+          <p:cNvPr id="679" name=""/>
           <p:cNvSpPr txBox="1"/>
           <p:nvPr/>
         </p:nvSpPr>
@@ -36535,7 +36790,7 @@
       </p:sp>
       <p:sp>
         <p:nvSpPr>
-          <p:cNvPr id="678" name=""/>
+          <p:cNvPr id="680" name=""/>
           <p:cNvSpPr txBox="1"/>
           <p:nvPr/>
         </p:nvSpPr>
@@ -36582,7 +36837,7 @@
       </p:sp>
       <p:sp>
         <p:nvSpPr>
-          <p:cNvPr id="679" name=""/>
+          <p:cNvPr id="681" name=""/>
           <p:cNvSpPr/>
           <p:nvPr/>
         </p:nvSpPr>
@@ -36710,7 +36965,7 @@
       </p:sp>
       <p:sp>
         <p:nvSpPr>
-          <p:cNvPr id="680" name=""/>
+          <p:cNvPr id="682" name=""/>
           <p:cNvSpPr txBox="1"/>
           <p:nvPr/>
         </p:nvSpPr>
@@ -36757,7 +37012,7 @@
       </p:sp>
       <p:sp>
         <p:nvSpPr>
-          <p:cNvPr id="681" name=""/>
+          <p:cNvPr id="683" name=""/>
           <p:cNvSpPr txBox="1"/>
           <p:nvPr/>
         </p:nvSpPr>
@@ -36804,7 +37059,7 @@
       </p:sp>
       <p:sp>
         <p:nvSpPr>
-          <p:cNvPr id="682" name=""/>
+          <p:cNvPr id="684" name=""/>
           <p:cNvSpPr txBox="1"/>
           <p:nvPr/>
         </p:nvSpPr>
@@ -36851,7 +37106,7 @@
       </p:sp>
       <p:sp>
         <p:nvSpPr>
-          <p:cNvPr id="683" name=""/>
+          <p:cNvPr id="685" name=""/>
           <p:cNvSpPr/>
           <p:nvPr/>
         </p:nvSpPr>
@@ -36979,7 +37234,7 @@
       </p:sp>
       <p:sp>
         <p:nvSpPr>
-          <p:cNvPr id="684" name=""/>
+          <p:cNvPr id="686" name=""/>
           <p:cNvSpPr txBox="1"/>
           <p:nvPr/>
         </p:nvSpPr>
@@ -37026,7 +37281,7 @@
       </p:sp>
       <p:sp>
         <p:nvSpPr>
-          <p:cNvPr id="685" name=""/>
+          <p:cNvPr id="687" name=""/>
           <p:cNvSpPr txBox="1"/>
           <p:nvPr/>
         </p:nvSpPr>
@@ -37097,7 +37352,7 @@
       </p:sp>
       <p:sp>
         <p:nvSpPr>
-          <p:cNvPr id="686" name=""/>
+          <p:cNvPr id="688" name=""/>
           <p:cNvSpPr txBox="1"/>
           <p:nvPr/>
         </p:nvSpPr>
@@ -37144,7 +37399,7 @@
       </p:sp>
       <p:sp>
         <p:nvSpPr>
-          <p:cNvPr id="687" name=""/>
+          <p:cNvPr id="689" name=""/>
           <p:cNvSpPr/>
           <p:nvPr/>
         </p:nvSpPr>
@@ -37360,7 +37615,7 @@
       </p:sp>
       <p:sp>
         <p:nvSpPr>
-          <p:cNvPr id="688" name=""/>
+          <p:cNvPr id="690" name=""/>
           <p:cNvSpPr txBox="1"/>
           <p:nvPr/>
         </p:nvSpPr>
@@ -37407,7 +37662,7 @@
       </p:sp>
       <p:sp>
         <p:nvSpPr>
-          <p:cNvPr id="689" name=""/>
+          <p:cNvPr id="691" name=""/>
           <p:cNvSpPr txBox="1"/>
           <p:nvPr/>
         </p:nvSpPr>
@@ -37484,7 +37739,7 @@
       </p:grpSpPr>
       <p:sp>
         <p:nvSpPr>
-          <p:cNvPr id="690" name=""/>
+          <p:cNvPr id="692" name=""/>
           <p:cNvSpPr/>
           <p:nvPr/>
         </p:nvSpPr>
@@ -37544,7 +37799,7 @@
       </p:sp>
       <p:sp>
         <p:nvSpPr>
-          <p:cNvPr id="691" name=""/>
+          <p:cNvPr id="693" name=""/>
           <p:cNvSpPr/>
           <p:nvPr/>
         </p:nvSpPr>
@@ -37604,7 +37859,7 @@
       </p:sp>
       <p:sp>
         <p:nvSpPr>
-          <p:cNvPr id="692" name=""/>
+          <p:cNvPr id="694" name=""/>
           <p:cNvSpPr/>
           <p:nvPr/>
         </p:nvSpPr>
@@ -37664,7 +37919,7 @@
       </p:sp>
       <p:pic>
         <p:nvPicPr>
-          <p:cNvPr id="693" name="" descr=""/>
+          <p:cNvPr id="695" name="" descr=""/>
           <p:cNvPicPr/>
           <p:nvPr/>
         </p:nvPicPr>
@@ -37688,7 +37943,7 @@
       </p:pic>
       <p:sp>
         <p:nvSpPr>
-          <p:cNvPr id="694" name=""/>
+          <p:cNvPr id="696" name=""/>
           <p:cNvSpPr txBox="1"/>
           <p:nvPr/>
         </p:nvSpPr>
@@ -37735,7 +37990,7 @@
       </p:sp>
       <p:sp>
         <p:nvSpPr>
-          <p:cNvPr id="695" name=""/>
+          <p:cNvPr id="697" name=""/>
           <p:cNvSpPr txBox="1"/>
           <p:nvPr/>
         </p:nvSpPr>
@@ -37782,7 +38037,7 @@
       </p:sp>
       <p:sp>
         <p:nvSpPr>
-          <p:cNvPr id="696" name=""/>
+          <p:cNvPr id="698" name=""/>
           <p:cNvSpPr/>
           <p:nvPr/>
         </p:nvSpPr>
@@ -38002,7 +38257,7 @@
       </p:sp>
       <p:sp>
         <p:nvSpPr>
-          <p:cNvPr id="697" name=""/>
+          <p:cNvPr id="699" name=""/>
           <p:cNvSpPr/>
           <p:nvPr/>
         </p:nvSpPr>
@@ -38221,7 +38476,7 @@
       </p:sp>
       <p:sp>
         <p:nvSpPr>
-          <p:cNvPr id="698" name=""/>
+          <p:cNvPr id="700" name=""/>
           <p:cNvSpPr txBox="1"/>
           <p:nvPr/>
         </p:nvSpPr>
@@ -38268,7 +38523,7 @@
       </p:sp>
       <p:sp>
         <p:nvSpPr>
-          <p:cNvPr id="699" name=""/>
+          <p:cNvPr id="701" name=""/>
           <p:cNvSpPr txBox="1"/>
           <p:nvPr/>
         </p:nvSpPr>
@@ -38315,7 +38570,7 @@
       </p:sp>
       <p:sp>
         <p:nvSpPr>
-          <p:cNvPr id="700" name=""/>
+          <p:cNvPr id="702" name=""/>
           <p:cNvSpPr txBox="1"/>
           <p:nvPr/>
         </p:nvSpPr>
@@ -38362,7 +38617,7 @@
       </p:sp>
       <p:sp>
         <p:nvSpPr>
-          <p:cNvPr id="701" name=""/>
+          <p:cNvPr id="703" name=""/>
           <p:cNvSpPr txBox="1"/>
           <p:nvPr/>
         </p:nvSpPr>
@@ -38409,7 +38664,7 @@
       </p:sp>
       <p:sp>
         <p:nvSpPr>
-          <p:cNvPr id="702" name=""/>
+          <p:cNvPr id="704" name=""/>
           <p:cNvSpPr/>
           <p:nvPr/>
         </p:nvSpPr>
@@ -38625,7 +38880,7 @@
       </p:sp>
       <p:sp>
         <p:nvSpPr>
-          <p:cNvPr id="703" name=""/>
+          <p:cNvPr id="705" name=""/>
           <p:cNvSpPr txBox="1"/>
           <p:nvPr/>
         </p:nvSpPr>
@@ -38672,7 +38927,7 @@
       </p:sp>
       <p:sp>
         <p:nvSpPr>
-          <p:cNvPr id="704" name=""/>
+          <p:cNvPr id="706" name=""/>
           <p:cNvSpPr txBox="1"/>
           <p:nvPr/>
         </p:nvSpPr>
@@ -38749,7 +39004,7 @@
       </p:grpSpPr>
       <p:sp>
         <p:nvSpPr>
-          <p:cNvPr id="705" name=""/>
+          <p:cNvPr id="707" name=""/>
           <p:cNvSpPr/>
           <p:nvPr/>
         </p:nvSpPr>
@@ -38809,7 +39064,7 @@
       </p:sp>
       <p:sp>
         <p:nvSpPr>
-          <p:cNvPr id="706" name=""/>
+          <p:cNvPr id="708" name=""/>
           <p:cNvSpPr/>
           <p:nvPr/>
         </p:nvSpPr>
@@ -38869,7 +39124,7 @@
       </p:sp>
       <p:sp>
         <p:nvSpPr>
-          <p:cNvPr id="707" name=""/>
+          <p:cNvPr id="709" name=""/>
           <p:cNvSpPr/>
           <p:nvPr/>
         </p:nvSpPr>
@@ -38929,7 +39184,7 @@
       </p:sp>
       <p:pic>
         <p:nvPicPr>
-          <p:cNvPr id="708" name="" descr=""/>
+          <p:cNvPr id="710" name="" descr=""/>
           <p:cNvPicPr/>
           <p:nvPr/>
         </p:nvPicPr>
@@ -38953,7 +39208,7 @@
       </p:pic>
       <p:sp>
         <p:nvSpPr>
-          <p:cNvPr id="709" name=""/>
+          <p:cNvPr id="711" name=""/>
           <p:cNvSpPr txBox="1"/>
           <p:nvPr/>
         </p:nvSpPr>
@@ -39000,7 +39255,7 @@
       </p:sp>
       <p:sp>
         <p:nvSpPr>
-          <p:cNvPr id="710" name=""/>
+          <p:cNvPr id="712" name=""/>
           <p:cNvSpPr/>
           <p:nvPr/>
         </p:nvSpPr>
@@ -39128,7 +39383,7 @@
       </p:sp>
       <p:sp>
         <p:nvSpPr>
-          <p:cNvPr id="711" name=""/>
+          <p:cNvPr id="713" name=""/>
           <p:cNvSpPr txBox="1"/>
           <p:nvPr/>
         </p:nvSpPr>
@@ -39175,7 +39430,7 @@
       </p:sp>
       <p:sp>
         <p:nvSpPr>
-          <p:cNvPr id="712" name=""/>
+          <p:cNvPr id="714" name=""/>
           <p:cNvSpPr/>
           <p:nvPr/>
         </p:nvSpPr>
@@ -39303,7 +39558,7 @@
       </p:sp>
       <p:sp>
         <p:nvSpPr>
-          <p:cNvPr id="713" name=""/>
+          <p:cNvPr id="715" name=""/>
           <p:cNvSpPr txBox="1"/>
           <p:nvPr/>
         </p:nvSpPr>
@@ -39350,7 +39605,7 @@
       </p:sp>
       <p:sp>
         <p:nvSpPr>
-          <p:cNvPr id="714" name=""/>
+          <p:cNvPr id="716" name=""/>
           <p:cNvSpPr/>
           <p:nvPr/>
         </p:nvSpPr>
@@ -39478,7 +39733,7 @@
       </p:sp>
       <p:sp>
         <p:nvSpPr>
-          <p:cNvPr id="715" name=""/>
+          <p:cNvPr id="717" name=""/>
           <p:cNvSpPr txBox="1"/>
           <p:nvPr/>
         </p:nvSpPr>
@@ -39525,7 +39780,7 @@
       </p:sp>
       <p:sp>
         <p:nvSpPr>
-          <p:cNvPr id="716" name=""/>
+          <p:cNvPr id="718" name=""/>
           <p:cNvSpPr txBox="1"/>
           <p:nvPr/>
         </p:nvSpPr>
@@ -39572,7 +39827,7 @@
       </p:sp>
       <p:sp>
         <p:nvSpPr>
-          <p:cNvPr id="717" name=""/>
+          <p:cNvPr id="719" name=""/>
           <p:cNvSpPr txBox="1"/>
           <p:nvPr/>
         </p:nvSpPr>
@@ -39619,7 +39874,7 @@
       </p:sp>
       <p:sp>
         <p:nvSpPr>
-          <p:cNvPr id="718" name=""/>
+          <p:cNvPr id="720" name=""/>
           <p:cNvSpPr/>
           <p:nvPr/>
         </p:nvSpPr>
@@ -39839,7 +40094,7 @@
       </p:sp>
       <p:sp>
         <p:nvSpPr>
-          <p:cNvPr id="719" name=""/>
+          <p:cNvPr id="721" name=""/>
           <p:cNvSpPr/>
           <p:nvPr/>
         </p:nvSpPr>
@@ -40058,7 +40313,7 @@
       </p:sp>
       <p:sp>
         <p:nvSpPr>
-          <p:cNvPr id="720" name=""/>
+          <p:cNvPr id="722" name=""/>
           <p:cNvSpPr txBox="1"/>
           <p:nvPr/>
         </p:nvSpPr>
@@ -40105,7 +40360,7 @@
       </p:sp>
       <p:sp>
         <p:nvSpPr>
-          <p:cNvPr id="721" name=""/>
+          <p:cNvPr id="723" name=""/>
           <p:cNvSpPr txBox="1"/>
           <p:nvPr/>
         </p:nvSpPr>
@@ -40152,7 +40407,7 @@
       </p:sp>
       <p:sp>
         <p:nvSpPr>
-          <p:cNvPr id="722" name=""/>
+          <p:cNvPr id="724" name=""/>
           <p:cNvSpPr txBox="1"/>
           <p:nvPr/>
         </p:nvSpPr>
@@ -40199,7 +40454,7 @@
       </p:sp>
       <p:sp>
         <p:nvSpPr>
-          <p:cNvPr id="723" name=""/>
+          <p:cNvPr id="725" name=""/>
           <p:cNvSpPr/>
           <p:nvPr/>
         </p:nvSpPr>
@@ -40415,7 +40670,7 @@
       </p:sp>
       <p:sp>
         <p:nvSpPr>
-          <p:cNvPr id="724" name=""/>
+          <p:cNvPr id="726" name=""/>
           <p:cNvSpPr txBox="1"/>
           <p:nvPr/>
         </p:nvSpPr>
@@ -40462,7 +40717,7 @@
       </p:sp>
       <p:sp>
         <p:nvSpPr>
-          <p:cNvPr id="725" name=""/>
+          <p:cNvPr id="727" name=""/>
           <p:cNvSpPr txBox="1"/>
           <p:nvPr/>
         </p:nvSpPr>
@@ -40539,7 +40794,7 @@
       </p:grpSpPr>
       <p:sp>
         <p:nvSpPr>
-          <p:cNvPr id="726" name=""/>
+          <p:cNvPr id="728" name=""/>
           <p:cNvSpPr/>
           <p:nvPr/>
         </p:nvSpPr>
@@ -40599,7 +40854,7 @@
       </p:sp>
       <p:sp>
         <p:nvSpPr>
-          <p:cNvPr id="727" name=""/>
+          <p:cNvPr id="729" name=""/>
           <p:cNvSpPr/>
           <p:nvPr/>
         </p:nvSpPr>
@@ -40659,7 +40914,7 @@
       </p:sp>
       <p:sp>
         <p:nvSpPr>
-          <p:cNvPr id="728" name=""/>
+          <p:cNvPr id="730" name=""/>
           <p:cNvSpPr/>
           <p:nvPr/>
         </p:nvSpPr>
@@ -40719,7 +40974,7 @@
       </p:sp>
       <p:pic>
         <p:nvPicPr>
-          <p:cNvPr id="729" name="" descr=""/>
+          <p:cNvPr id="731" name="" descr=""/>
           <p:cNvPicPr/>
           <p:nvPr/>
         </p:nvPicPr>
@@ -40743,7 +40998,7 @@
       </p:pic>
       <p:sp>
         <p:nvSpPr>
-          <p:cNvPr id="730" name=""/>
+          <p:cNvPr id="732" name=""/>
           <p:cNvSpPr txBox="1"/>
           <p:nvPr/>
         </p:nvSpPr>
@@ -40790,7 +41045,7 @@
       </p:sp>
       <p:sp>
         <p:nvSpPr>
-          <p:cNvPr id="731" name=""/>
+          <p:cNvPr id="733" name=""/>
           <p:cNvSpPr txBox="1"/>
           <p:nvPr/>
         </p:nvSpPr>
@@ -40837,7 +41092,7 @@
       </p:sp>
       <p:sp>
         <p:nvSpPr>
-          <p:cNvPr id="732" name=""/>
+          <p:cNvPr id="734" name=""/>
           <p:cNvSpPr txBox="1"/>
           <p:nvPr/>
         </p:nvSpPr>
@@ -40896,7 +41151,7 @@
       </p:sp>
       <p:sp>
         <p:nvSpPr>
-          <p:cNvPr id="733" name=""/>
+          <p:cNvPr id="735" name=""/>
           <p:cNvSpPr txBox="1"/>
           <p:nvPr/>
         </p:nvSpPr>
@@ -40943,7 +41198,7 @@
       </p:sp>
       <p:sp>
         <p:nvSpPr>
-          <p:cNvPr id="734" name=""/>
+          <p:cNvPr id="736" name=""/>
           <p:cNvSpPr txBox="1"/>
           <p:nvPr/>
         </p:nvSpPr>
@@ -40990,7 +41245,7 @@
       </p:sp>
       <p:sp>
         <p:nvSpPr>
-          <p:cNvPr id="735" name=""/>
+          <p:cNvPr id="737" name=""/>
           <p:cNvSpPr txBox="1"/>
           <p:nvPr/>
         </p:nvSpPr>
@@ -41037,7 +41292,7 @@
       </p:sp>
       <p:sp>
         <p:nvSpPr>
-          <p:cNvPr id="736" name=""/>
+          <p:cNvPr id="738" name=""/>
           <p:cNvSpPr txBox="1"/>
           <p:nvPr/>
         </p:nvSpPr>
@@ -41084,7 +41339,7 @@
       </p:sp>
       <p:sp>
         <p:nvSpPr>
-          <p:cNvPr id="737" name=""/>
+          <p:cNvPr id="739" name=""/>
           <p:cNvSpPr txBox="1"/>
           <p:nvPr/>
         </p:nvSpPr>
@@ -41131,7 +41386,7 @@
       </p:sp>
       <p:sp>
         <p:nvSpPr>
-          <p:cNvPr id="738" name=""/>
+          <p:cNvPr id="740" name=""/>
           <p:cNvSpPr txBox="1"/>
           <p:nvPr/>
         </p:nvSpPr>
@@ -41178,7 +41433,7 @@
       </p:sp>
       <p:sp>
         <p:nvSpPr>
-          <p:cNvPr id="739" name=""/>
+          <p:cNvPr id="741" name=""/>
           <p:cNvSpPr txBox="1"/>
           <p:nvPr/>
         </p:nvSpPr>
@@ -41225,7 +41480,7 @@
       </p:sp>
       <p:sp>
         <p:nvSpPr>
-          <p:cNvPr id="740" name=""/>
+          <p:cNvPr id="742" name=""/>
           <p:cNvSpPr txBox="1"/>
           <p:nvPr/>
         </p:nvSpPr>
@@ -41302,7 +41557,7 @@
       </p:grpSpPr>
       <p:sp>
         <p:nvSpPr>
-          <p:cNvPr id="35" name=""/>
+          <p:cNvPr id="37" name=""/>
           <p:cNvSpPr/>
           <p:nvPr/>
         </p:nvSpPr>
@@ -41362,7 +41617,7 @@
       </p:sp>
       <p:sp>
         <p:nvSpPr>
-          <p:cNvPr id="36" name=""/>
+          <p:cNvPr id="38" name=""/>
           <p:cNvSpPr/>
           <p:nvPr/>
         </p:nvSpPr>
@@ -41422,7 +41677,7 @@
       </p:sp>
       <p:sp>
         <p:nvSpPr>
-          <p:cNvPr id="37" name=""/>
+          <p:cNvPr id="39" name=""/>
           <p:cNvSpPr/>
           <p:nvPr/>
         </p:nvSpPr>
@@ -41482,7 +41737,7 @@
       </p:sp>
       <p:pic>
         <p:nvPicPr>
-          <p:cNvPr id="38" name="" descr=""/>
+          <p:cNvPr id="40" name="" descr=""/>
           <p:cNvPicPr/>
           <p:nvPr/>
         </p:nvPicPr>
@@ -41506,7 +41761,7 @@
       </p:pic>
       <p:sp>
         <p:nvSpPr>
-          <p:cNvPr id="39" name=""/>
+          <p:cNvPr id="41" name=""/>
           <p:cNvSpPr/>
           <p:nvPr/>
         </p:nvSpPr>
@@ -41634,7 +41889,7 @@
       </p:sp>
       <p:sp>
         <p:nvSpPr>
-          <p:cNvPr id="40" name=""/>
+          <p:cNvPr id="42" name=""/>
           <p:cNvSpPr/>
           <p:nvPr/>
         </p:nvSpPr>
@@ -41762,7 +42017,7 @@
       </p:sp>
       <p:sp>
         <p:nvSpPr>
-          <p:cNvPr id="41" name=""/>
+          <p:cNvPr id="43" name=""/>
           <p:cNvSpPr txBox="1"/>
           <p:nvPr/>
         </p:nvSpPr>
@@ -41809,7 +42064,7 @@
       </p:sp>
       <p:sp>
         <p:nvSpPr>
-          <p:cNvPr id="42" name=""/>
+          <p:cNvPr id="44" name=""/>
           <p:cNvSpPr/>
           <p:nvPr/>
         </p:nvSpPr>
@@ -41937,7 +42192,7 @@
       </p:sp>
       <p:sp>
         <p:nvSpPr>
-          <p:cNvPr id="43" name=""/>
+          <p:cNvPr id="45" name=""/>
           <p:cNvSpPr txBox="1"/>
           <p:nvPr/>
         </p:nvSpPr>
@@ -41984,7 +42239,7 @@
       </p:sp>
       <p:sp>
         <p:nvSpPr>
-          <p:cNvPr id="44" name=""/>
+          <p:cNvPr id="46" name=""/>
           <p:cNvSpPr/>
           <p:nvPr/>
         </p:nvSpPr>
@@ -42112,7 +42367,7 @@
       </p:sp>
       <p:sp>
         <p:nvSpPr>
-          <p:cNvPr id="45" name=""/>
+          <p:cNvPr id="47" name=""/>
           <p:cNvSpPr txBox="1"/>
           <p:nvPr/>
         </p:nvSpPr>
@@ -42159,7 +42414,7 @@
       </p:sp>
       <p:sp>
         <p:nvSpPr>
-          <p:cNvPr id="46" name=""/>
+          <p:cNvPr id="48" name=""/>
           <p:cNvSpPr/>
           <p:nvPr/>
         </p:nvSpPr>
@@ -42287,7 +42542,7 @@
       </p:sp>
       <p:sp>
         <p:nvSpPr>
-          <p:cNvPr id="47" name=""/>
+          <p:cNvPr id="49" name=""/>
           <p:cNvSpPr txBox="1"/>
           <p:nvPr/>
         </p:nvSpPr>
@@ -42334,7 +42589,7 @@
       </p:sp>
       <p:sp>
         <p:nvSpPr>
-          <p:cNvPr id="48" name=""/>
+          <p:cNvPr id="50" name=""/>
           <p:cNvSpPr/>
           <p:nvPr/>
         </p:nvSpPr>
@@ -42462,7 +42717,7 @@
       </p:sp>
       <p:sp>
         <p:nvSpPr>
-          <p:cNvPr id="49" name=""/>
+          <p:cNvPr id="51" name=""/>
           <p:cNvSpPr txBox="1"/>
           <p:nvPr/>
         </p:nvSpPr>
@@ -42509,7 +42764,7 @@
       </p:sp>
       <p:sp>
         <p:nvSpPr>
-          <p:cNvPr id="50" name=""/>
+          <p:cNvPr id="52" name=""/>
           <p:cNvSpPr/>
           <p:nvPr/>
         </p:nvSpPr>
@@ -42637,7 +42892,7 @@
       </p:sp>
       <p:sp>
         <p:nvSpPr>
-          <p:cNvPr id="51" name=""/>
+          <p:cNvPr id="53" name=""/>
           <p:cNvSpPr txBox="1"/>
           <p:nvPr/>
         </p:nvSpPr>
@@ -42684,7 +42939,7 @@
       </p:sp>
       <p:sp>
         <p:nvSpPr>
-          <p:cNvPr id="52" name=""/>
+          <p:cNvPr id="54" name=""/>
           <p:cNvSpPr/>
           <p:nvPr/>
         </p:nvSpPr>
@@ -42812,7 +43067,7 @@
       </p:sp>
       <p:sp>
         <p:nvSpPr>
-          <p:cNvPr id="53" name=""/>
+          <p:cNvPr id="55" name=""/>
           <p:cNvSpPr txBox="1"/>
           <p:nvPr/>
         </p:nvSpPr>
@@ -42859,7 +43114,7 @@
       </p:sp>
       <p:sp>
         <p:nvSpPr>
-          <p:cNvPr id="54" name=""/>
+          <p:cNvPr id="56" name=""/>
           <p:cNvSpPr/>
           <p:nvPr/>
         </p:nvSpPr>
@@ -42987,7 +43242,7 @@
       </p:sp>
       <p:sp>
         <p:nvSpPr>
-          <p:cNvPr id="55" name=""/>
+          <p:cNvPr id="57" name=""/>
           <p:cNvSpPr txBox="1"/>
           <p:nvPr/>
         </p:nvSpPr>
@@ -43034,7 +43289,7 @@
       </p:sp>
       <p:sp>
         <p:nvSpPr>
-          <p:cNvPr id="56" name=""/>
+          <p:cNvPr id="58" name=""/>
           <p:cNvSpPr/>
           <p:nvPr/>
         </p:nvSpPr>
@@ -43162,7 +43417,7 @@
       </p:sp>
       <p:sp>
         <p:nvSpPr>
-          <p:cNvPr id="57" name=""/>
+          <p:cNvPr id="59" name=""/>
           <p:cNvSpPr txBox="1"/>
           <p:nvPr/>
         </p:nvSpPr>
@@ -43209,7 +43464,7 @@
       </p:sp>
       <p:sp>
         <p:nvSpPr>
-          <p:cNvPr id="58" name=""/>
+          <p:cNvPr id="60" name=""/>
           <p:cNvSpPr/>
           <p:nvPr/>
         </p:nvSpPr>
@@ -43337,7 +43592,7 @@
       </p:sp>
       <p:sp>
         <p:nvSpPr>
-          <p:cNvPr id="59" name=""/>
+          <p:cNvPr id="61" name=""/>
           <p:cNvSpPr txBox="1"/>
           <p:nvPr/>
         </p:nvSpPr>
@@ -43384,7 +43639,7 @@
       </p:sp>
       <p:sp>
         <p:nvSpPr>
-          <p:cNvPr id="60" name=""/>
+          <p:cNvPr id="62" name=""/>
           <p:cNvSpPr/>
           <p:nvPr/>
         </p:nvSpPr>
@@ -43444,7 +43699,7 @@
       </p:sp>
       <p:sp>
         <p:nvSpPr>
-          <p:cNvPr id="61" name=""/>
+          <p:cNvPr id="63" name=""/>
           <p:cNvSpPr txBox="1"/>
           <p:nvPr/>
         </p:nvSpPr>
@@ -43491,7 +43746,7 @@
       </p:sp>
       <p:sp>
         <p:nvSpPr>
-          <p:cNvPr id="62" name=""/>
+          <p:cNvPr id="64" name=""/>
           <p:cNvSpPr txBox="1"/>
           <p:nvPr/>
         </p:nvSpPr>
@@ -43538,7 +43793,7 @@
       </p:sp>
       <p:sp>
         <p:nvSpPr>
-          <p:cNvPr id="63" name=""/>
+          <p:cNvPr id="65" name=""/>
           <p:cNvSpPr txBox="1"/>
           <p:nvPr/>
         </p:nvSpPr>
@@ -43585,7 +43840,7 @@
       </p:sp>
       <p:sp>
         <p:nvSpPr>
-          <p:cNvPr id="64" name=""/>
+          <p:cNvPr id="66" name=""/>
           <p:cNvSpPr/>
           <p:nvPr/>
         </p:nvSpPr>
@@ -43801,7 +44056,7 @@
       </p:sp>
       <p:sp>
         <p:nvSpPr>
-          <p:cNvPr id="65" name=""/>
+          <p:cNvPr id="67" name=""/>
           <p:cNvSpPr txBox="1"/>
           <p:nvPr/>
         </p:nvSpPr>
@@ -43848,7 +44103,7 @@
       </p:sp>
       <p:sp>
         <p:nvSpPr>
-          <p:cNvPr id="66" name=""/>
+          <p:cNvPr id="68" name=""/>
           <p:cNvSpPr txBox="1"/>
           <p:nvPr/>
         </p:nvSpPr>
@@ -43925,7 +44180,7 @@
       </p:grpSpPr>
       <p:sp>
         <p:nvSpPr>
-          <p:cNvPr id="67" name=""/>
+          <p:cNvPr id="69" name=""/>
           <p:cNvSpPr/>
           <p:nvPr/>
         </p:nvSpPr>
@@ -43985,7 +44240,7 @@
       </p:sp>
       <p:sp>
         <p:nvSpPr>
-          <p:cNvPr id="68" name=""/>
+          <p:cNvPr id="70" name=""/>
           <p:cNvSpPr/>
           <p:nvPr/>
         </p:nvSpPr>
@@ -44045,7 +44300,7 @@
       </p:sp>
       <p:sp>
         <p:nvSpPr>
-          <p:cNvPr id="69" name=""/>
+          <p:cNvPr id="71" name=""/>
           <p:cNvSpPr/>
           <p:nvPr/>
         </p:nvSpPr>
@@ -44105,7 +44360,7 @@
       </p:sp>
       <p:pic>
         <p:nvPicPr>
-          <p:cNvPr id="70" name="" descr=""/>
+          <p:cNvPr id="72" name="" descr=""/>
           <p:cNvPicPr/>
           <p:nvPr/>
         </p:nvPicPr>
@@ -44129,7 +44384,7 @@
       </p:pic>
       <p:sp>
         <p:nvSpPr>
-          <p:cNvPr id="71" name=""/>
+          <p:cNvPr id="73" name=""/>
           <p:cNvSpPr/>
           <p:nvPr/>
         </p:nvSpPr>
@@ -44257,7 +44512,7 @@
       </p:sp>
       <p:sp>
         <p:nvSpPr>
-          <p:cNvPr id="72" name=""/>
+          <p:cNvPr id="74" name=""/>
           <p:cNvSpPr txBox="1"/>
           <p:nvPr/>
         </p:nvSpPr>
@@ -44304,7 +44559,7 @@
       </p:sp>
       <p:sp>
         <p:nvSpPr>
-          <p:cNvPr id="73" name=""/>
+          <p:cNvPr id="75" name=""/>
           <p:cNvSpPr/>
           <p:nvPr/>
         </p:nvSpPr>
@@ -44432,7 +44687,7 @@
       </p:sp>
       <p:sp>
         <p:nvSpPr>
-          <p:cNvPr id="74" name=""/>
+          <p:cNvPr id="76" name=""/>
           <p:cNvSpPr txBox="1"/>
           <p:nvPr/>
         </p:nvSpPr>
@@ -44491,7 +44746,7 @@
       </p:sp>
       <p:sp>
         <p:nvSpPr>
-          <p:cNvPr id="75" name=""/>
+          <p:cNvPr id="77" name=""/>
           <p:cNvSpPr/>
           <p:nvPr/>
         </p:nvSpPr>
@@ -44619,7 +44874,7 @@
       </p:sp>
       <p:sp>
         <p:nvSpPr>
-          <p:cNvPr id="76" name=""/>
+          <p:cNvPr id="78" name=""/>
           <p:cNvSpPr txBox="1"/>
           <p:nvPr/>
         </p:nvSpPr>
@@ -44678,7 +44933,7 @@
       </p:sp>
       <p:sp>
         <p:nvSpPr>
-          <p:cNvPr id="77" name=""/>
+          <p:cNvPr id="79" name=""/>
           <p:cNvSpPr/>
           <p:nvPr/>
         </p:nvSpPr>
@@ -44806,7 +45061,7 @@
       </p:sp>
       <p:sp>
         <p:nvSpPr>
-          <p:cNvPr id="78" name=""/>
+          <p:cNvPr id="80" name=""/>
           <p:cNvSpPr txBox="1"/>
           <p:nvPr/>
         </p:nvSpPr>
@@ -44865,7 +45120,7 @@
       </p:sp>
       <p:sp>
         <p:nvSpPr>
-          <p:cNvPr id="79" name=""/>
+          <p:cNvPr id="81" name=""/>
           <p:cNvSpPr txBox="1"/>
           <p:nvPr/>
         </p:nvSpPr>
@@ -44924,7 +45179,7 @@
       </p:sp>
       <p:sp>
         <p:nvSpPr>
-          <p:cNvPr id="80" name=""/>
+          <p:cNvPr id="82" name=""/>
           <p:cNvSpPr txBox="1"/>
           <p:nvPr/>
         </p:nvSpPr>
@@ -44971,7 +45226,7 @@
       </p:sp>
       <p:sp>
         <p:nvSpPr>
-          <p:cNvPr id="81" name=""/>
+          <p:cNvPr id="83" name=""/>
           <p:cNvSpPr/>
           <p:nvPr/>
         </p:nvSpPr>
@@ -45191,7 +45446,7 @@
       </p:sp>
       <p:sp>
         <p:nvSpPr>
-          <p:cNvPr id="82" name=""/>
+          <p:cNvPr id="84" name=""/>
           <p:cNvSpPr/>
           <p:nvPr/>
         </p:nvSpPr>
@@ -45410,7 +45665,7 @@
       </p:sp>
       <p:sp>
         <p:nvSpPr>
-          <p:cNvPr id="83" name=""/>
+          <p:cNvPr id="85" name=""/>
           <p:cNvSpPr txBox="1"/>
           <p:nvPr/>
         </p:nvSpPr>
@@ -45457,7 +45712,7 @@
       </p:sp>
       <p:sp>
         <p:nvSpPr>
-          <p:cNvPr id="84" name=""/>
+          <p:cNvPr id="86" name=""/>
           <p:cNvSpPr txBox="1"/>
           <p:nvPr/>
         </p:nvSpPr>
@@ -45504,7 +45759,7 @@
       </p:sp>
       <p:sp>
         <p:nvSpPr>
-          <p:cNvPr id="85" name=""/>
+          <p:cNvPr id="87" name=""/>
           <p:cNvSpPr txBox="1"/>
           <p:nvPr/>
         </p:nvSpPr>
@@ -45551,7 +45806,7 @@
       </p:sp>
       <p:sp>
         <p:nvSpPr>
-          <p:cNvPr id="86" name=""/>
+          <p:cNvPr id="88" name=""/>
           <p:cNvSpPr txBox="1"/>
           <p:nvPr/>
         </p:nvSpPr>
@@ -45598,7 +45853,7 @@
       </p:sp>
       <p:sp>
         <p:nvSpPr>
-          <p:cNvPr id="87" name=""/>
+          <p:cNvPr id="89" name=""/>
           <p:cNvSpPr txBox="1"/>
           <p:nvPr/>
         </p:nvSpPr>
@@ -45645,7 +45900,7 @@
       </p:sp>
       <p:sp>
         <p:nvSpPr>
-          <p:cNvPr id="88" name=""/>
+          <p:cNvPr id="90" name=""/>
           <p:cNvSpPr/>
           <p:nvPr/>
         </p:nvSpPr>
@@ -45861,7 +46116,7 @@
       </p:sp>
       <p:sp>
         <p:nvSpPr>
-          <p:cNvPr id="89" name=""/>
+          <p:cNvPr id="91" name=""/>
           <p:cNvSpPr txBox="1"/>
           <p:nvPr/>
         </p:nvSpPr>
@@ -45908,7 +46163,7 @@
       </p:sp>
       <p:sp>
         <p:nvSpPr>
-          <p:cNvPr id="90" name=""/>
+          <p:cNvPr id="92" name=""/>
           <p:cNvSpPr txBox="1"/>
           <p:nvPr/>
         </p:nvSpPr>
@@ -45985,7 +46240,7 @@
       </p:grpSpPr>
       <p:sp>
         <p:nvSpPr>
-          <p:cNvPr id="91" name=""/>
+          <p:cNvPr id="93" name=""/>
           <p:cNvSpPr/>
           <p:nvPr/>
         </p:nvSpPr>
@@ -46045,7 +46300,7 @@
       </p:sp>
       <p:sp>
         <p:nvSpPr>
-          <p:cNvPr id="92" name=""/>
+          <p:cNvPr id="94" name=""/>
           <p:cNvSpPr/>
           <p:nvPr/>
         </p:nvSpPr>
@@ -46105,7 +46360,7 @@
       </p:sp>
       <p:sp>
         <p:nvSpPr>
-          <p:cNvPr id="93" name=""/>
+          <p:cNvPr id="95" name=""/>
           <p:cNvSpPr/>
           <p:nvPr/>
         </p:nvSpPr>
@@ -46165,7 +46420,7 @@
       </p:sp>
       <p:pic>
         <p:nvPicPr>
-          <p:cNvPr id="94" name="" descr=""/>
+          <p:cNvPr id="96" name="" descr=""/>
           <p:cNvPicPr/>
           <p:nvPr/>
         </p:nvPicPr>
@@ -46189,7 +46444,7 @@
       </p:pic>
       <p:sp>
         <p:nvSpPr>
-          <p:cNvPr id="95" name=""/>
+          <p:cNvPr id="97" name=""/>
           <p:cNvSpPr/>
           <p:nvPr/>
         </p:nvSpPr>
@@ -46317,7 +46572,7 @@
       </p:sp>
       <p:sp>
         <p:nvSpPr>
-          <p:cNvPr id="96" name=""/>
+          <p:cNvPr id="98" name=""/>
           <p:cNvSpPr/>
           <p:nvPr/>
         </p:nvSpPr>
@@ -46445,7 +46700,7 @@
       </p:sp>
       <p:sp>
         <p:nvSpPr>
-          <p:cNvPr id="97" name=""/>
+          <p:cNvPr id="99" name=""/>
           <p:cNvSpPr txBox="1"/>
           <p:nvPr/>
         </p:nvSpPr>
@@ -46492,7 +46747,7 @@
       </p:sp>
       <p:sp>
         <p:nvSpPr>
-          <p:cNvPr id="98" name=""/>
+          <p:cNvPr id="100" name=""/>
           <p:cNvSpPr/>
           <p:nvPr/>
         </p:nvSpPr>
@@ -46620,7 +46875,7 @@
       </p:sp>
       <p:sp>
         <p:nvSpPr>
-          <p:cNvPr id="99" name=""/>
+          <p:cNvPr id="101" name=""/>
           <p:cNvSpPr txBox="1"/>
           <p:nvPr/>
         </p:nvSpPr>
@@ -46667,7 +46922,7 @@
       </p:sp>
       <p:sp>
         <p:nvSpPr>
-          <p:cNvPr id="100" name=""/>
+          <p:cNvPr id="102" name=""/>
           <p:cNvSpPr txBox="1"/>
           <p:nvPr/>
         </p:nvSpPr>
@@ -46714,7 +46969,7 @@
       </p:sp>
       <p:sp>
         <p:nvSpPr>
-          <p:cNvPr id="101" name=""/>
+          <p:cNvPr id="103" name=""/>
           <p:cNvSpPr txBox="1"/>
           <p:nvPr/>
         </p:nvSpPr>
@@ -46761,7 +47016,7 @@
       </p:sp>
       <p:sp>
         <p:nvSpPr>
-          <p:cNvPr id="102" name=""/>
+          <p:cNvPr id="104" name=""/>
           <p:cNvSpPr/>
           <p:nvPr/>
         </p:nvSpPr>
@@ -46981,7 +47236,7 @@
       </p:sp>
       <p:sp>
         <p:nvSpPr>
-          <p:cNvPr id="103" name=""/>
+          <p:cNvPr id="105" name=""/>
           <p:cNvSpPr/>
           <p:nvPr/>
         </p:nvSpPr>
@@ -47200,7 +47455,7 @@
       </p:sp>
       <p:sp>
         <p:nvSpPr>
-          <p:cNvPr id="104" name=""/>
+          <p:cNvPr id="106" name=""/>
           <p:cNvSpPr txBox="1"/>
           <p:nvPr/>
         </p:nvSpPr>
@@ -47247,7 +47502,7 @@
       </p:sp>
       <p:sp>
         <p:nvSpPr>
-          <p:cNvPr id="105" name=""/>
+          <p:cNvPr id="107" name=""/>
           <p:cNvSpPr txBox="1"/>
           <p:nvPr/>
         </p:nvSpPr>
@@ -47294,7 +47549,7 @@
       </p:sp>
       <p:sp>
         <p:nvSpPr>
-          <p:cNvPr id="106" name=""/>
+          <p:cNvPr id="108" name=""/>
           <p:cNvSpPr txBox="1"/>
           <p:nvPr/>
         </p:nvSpPr>
@@ -47341,7 +47596,7 @@
       </p:sp>
       <p:sp>
         <p:nvSpPr>
-          <p:cNvPr id="107" name=""/>
+          <p:cNvPr id="109" name=""/>
           <p:cNvSpPr/>
           <p:nvPr/>
         </p:nvSpPr>
@@ -47561,7 +47816,7 @@
       </p:sp>
       <p:sp>
         <p:nvSpPr>
-          <p:cNvPr id="108" name=""/>
+          <p:cNvPr id="110" name=""/>
           <p:cNvSpPr/>
           <p:nvPr/>
         </p:nvSpPr>
@@ -47780,7 +48035,7 @@
       </p:sp>
       <p:sp>
         <p:nvSpPr>
-          <p:cNvPr id="109" name=""/>
+          <p:cNvPr id="111" name=""/>
           <p:cNvSpPr txBox="1"/>
           <p:nvPr/>
         </p:nvSpPr>
@@ -47827,7 +48082,7 @@
       </p:sp>
       <p:sp>
         <p:nvSpPr>
-          <p:cNvPr id="110" name=""/>
+          <p:cNvPr id="112" name=""/>
           <p:cNvSpPr txBox="1"/>
           <p:nvPr/>
         </p:nvSpPr>
@@ -47874,7 +48129,7 @@
       </p:sp>
       <p:sp>
         <p:nvSpPr>
-          <p:cNvPr id="111" name=""/>
+          <p:cNvPr id="113" name=""/>
           <p:cNvSpPr/>
           <p:nvPr/>
         </p:nvSpPr>
@@ -48090,7 +48345,7 @@
       </p:sp>
       <p:sp>
         <p:nvSpPr>
-          <p:cNvPr id="112" name=""/>
+          <p:cNvPr id="114" name=""/>
           <p:cNvSpPr txBox="1"/>
           <p:nvPr/>
         </p:nvSpPr>
@@ -48137,7 +48392,7 @@
       </p:sp>
       <p:sp>
         <p:nvSpPr>
-          <p:cNvPr id="113" name=""/>
+          <p:cNvPr id="115" name=""/>
           <p:cNvSpPr txBox="1"/>
           <p:nvPr/>
         </p:nvSpPr>
@@ -48214,7 +48469,7 @@
       </p:grpSpPr>
       <p:sp>
         <p:nvSpPr>
-          <p:cNvPr id="114" name=""/>
+          <p:cNvPr id="116" name=""/>
           <p:cNvSpPr/>
           <p:nvPr/>
         </p:nvSpPr>
@@ -48274,7 +48529,7 @@
       </p:sp>
       <p:sp>
         <p:nvSpPr>
-          <p:cNvPr id="115" name=""/>
+          <p:cNvPr id="117" name=""/>
           <p:cNvSpPr/>
           <p:nvPr/>
         </p:nvSpPr>
@@ -48334,7 +48589,7 @@
       </p:sp>
       <p:sp>
         <p:nvSpPr>
-          <p:cNvPr id="116" name=""/>
+          <p:cNvPr id="118" name=""/>
           <p:cNvSpPr/>
           <p:nvPr/>
         </p:nvSpPr>
@@ -48394,7 +48649,7 @@
       </p:sp>
       <p:pic>
         <p:nvPicPr>
-          <p:cNvPr id="117" name="" descr=""/>
+          <p:cNvPr id="119" name="" descr=""/>
           <p:cNvPicPr/>
           <p:nvPr/>
         </p:nvPicPr>
@@ -48418,7 +48673,7 @@
       </p:pic>
       <p:sp>
         <p:nvSpPr>
-          <p:cNvPr id="118" name=""/>
+          <p:cNvPr id="120" name=""/>
           <p:cNvSpPr/>
           <p:nvPr/>
         </p:nvSpPr>
@@ -48546,7 +48801,7 @@
       </p:sp>
       <p:sp>
         <p:nvSpPr>
-          <p:cNvPr id="119" name=""/>
+          <p:cNvPr id="121" name=""/>
           <p:cNvSpPr txBox="1"/>
           <p:nvPr/>
         </p:nvSpPr>
@@ -48593,7 +48848,7 @@
       </p:sp>
       <p:sp>
         <p:nvSpPr>
-          <p:cNvPr id="120" name=""/>
+          <p:cNvPr id="122" name=""/>
           <p:cNvSpPr/>
           <p:nvPr/>
         </p:nvSpPr>
@@ -48721,7 +48976,7 @@
       </p:sp>
       <p:sp>
         <p:nvSpPr>
-          <p:cNvPr id="121" name=""/>
+          <p:cNvPr id="123" name=""/>
           <p:cNvSpPr txBox="1"/>
           <p:nvPr/>
         </p:nvSpPr>
@@ -48768,7 +49023,7 @@
       </p:sp>
       <p:sp>
         <p:nvSpPr>
-          <p:cNvPr id="122" name=""/>
+          <p:cNvPr id="124" name=""/>
           <p:cNvSpPr/>
           <p:nvPr/>
         </p:nvSpPr>
@@ -48896,7 +49151,7 @@
       </p:sp>
       <p:sp>
         <p:nvSpPr>
-          <p:cNvPr id="123" name=""/>
+          <p:cNvPr id="125" name=""/>
           <p:cNvSpPr txBox="1"/>
           <p:nvPr/>
         </p:nvSpPr>
@@ -48943,7 +49198,7 @@
       </p:sp>
       <p:sp>
         <p:nvSpPr>
-          <p:cNvPr id="124" name=""/>
+          <p:cNvPr id="126" name=""/>
           <p:cNvSpPr/>
           <p:nvPr/>
         </p:nvSpPr>
@@ -49071,7 +49326,7 @@
       </p:sp>
       <p:sp>
         <p:nvSpPr>
-          <p:cNvPr id="125" name=""/>
+          <p:cNvPr id="127" name=""/>
           <p:cNvSpPr txBox="1"/>
           <p:nvPr/>
         </p:nvSpPr>
@@ -49118,7 +49373,7 @@
       </p:sp>
       <p:sp>
         <p:nvSpPr>
-          <p:cNvPr id="126" name=""/>
+          <p:cNvPr id="128" name=""/>
           <p:cNvSpPr txBox="1"/>
           <p:nvPr/>
         </p:nvSpPr>
@@ -49165,7 +49420,7 @@
       </p:sp>
       <p:sp>
         <p:nvSpPr>
-          <p:cNvPr id="127" name=""/>
+          <p:cNvPr id="129" name=""/>
           <p:cNvSpPr txBox="1"/>
           <p:nvPr/>
         </p:nvSpPr>
@@ -49212,7 +49467,7 @@
       </p:sp>
       <p:sp>
         <p:nvSpPr>
-          <p:cNvPr id="128" name=""/>
+          <p:cNvPr id="130" name=""/>
           <p:cNvSpPr/>
           <p:nvPr/>
         </p:nvSpPr>
@@ -49432,7 +49687,7 @@
       </p:sp>
       <p:sp>
         <p:nvSpPr>
-          <p:cNvPr id="129" name=""/>
+          <p:cNvPr id="131" name=""/>
           <p:cNvSpPr/>
           <p:nvPr/>
         </p:nvSpPr>
@@ -49651,7 +49906,7 @@
       </p:sp>
       <p:sp>
         <p:nvSpPr>
-          <p:cNvPr id="130" name=""/>
+          <p:cNvPr id="132" name=""/>
           <p:cNvSpPr txBox="1"/>
           <p:nvPr/>
         </p:nvSpPr>
@@ -49698,7 +49953,7 @@
       </p:sp>
       <p:sp>
         <p:nvSpPr>
-          <p:cNvPr id="131" name=""/>
+          <p:cNvPr id="133" name=""/>
           <p:cNvSpPr txBox="1"/>
           <p:nvPr/>
         </p:nvSpPr>
@@ -49745,7 +50000,7 @@
       </p:sp>
       <p:sp>
         <p:nvSpPr>
-          <p:cNvPr id="132" name=""/>
+          <p:cNvPr id="134" name=""/>
           <p:cNvSpPr txBox="1"/>
           <p:nvPr/>
         </p:nvSpPr>
@@ -49792,7 +50047,7 @@
       </p:sp>
       <p:sp>
         <p:nvSpPr>
-          <p:cNvPr id="133" name=""/>
+          <p:cNvPr id="135" name=""/>
           <p:cNvSpPr txBox="1"/>
           <p:nvPr/>
         </p:nvSpPr>
@@ -49839,7 +50094,7 @@
       </p:sp>
       <p:sp>
         <p:nvSpPr>
-          <p:cNvPr id="134" name=""/>
+          <p:cNvPr id="136" name=""/>
           <p:cNvSpPr txBox="1"/>
           <p:nvPr/>
         </p:nvSpPr>
@@ -49886,7 +50141,7 @@
       </p:sp>
       <p:sp>
         <p:nvSpPr>
-          <p:cNvPr id="135" name=""/>
+          <p:cNvPr id="137" name=""/>
           <p:cNvSpPr/>
           <p:nvPr/>
         </p:nvSpPr>
@@ -50102,7 +50357,7 @@
       </p:sp>
       <p:sp>
         <p:nvSpPr>
-          <p:cNvPr id="136" name=""/>
+          <p:cNvPr id="138" name=""/>
           <p:cNvSpPr txBox="1"/>
           <p:nvPr/>
         </p:nvSpPr>
@@ -50149,7 +50404,7 @@
       </p:sp>
       <p:sp>
         <p:nvSpPr>
-          <p:cNvPr id="137" name=""/>
+          <p:cNvPr id="139" name=""/>
           <p:cNvSpPr txBox="1"/>
           <p:nvPr/>
         </p:nvSpPr>
@@ -50226,7 +50481,7 @@
       </p:grpSpPr>
       <p:sp>
         <p:nvSpPr>
-          <p:cNvPr id="138" name=""/>
+          <p:cNvPr id="140" name=""/>
           <p:cNvSpPr/>
           <p:nvPr/>
         </p:nvSpPr>
@@ -50286,7 +50541,7 @@
       </p:sp>
       <p:sp>
         <p:nvSpPr>
-          <p:cNvPr id="139" name=""/>
+          <p:cNvPr id="141" name=""/>
           <p:cNvSpPr/>
           <p:nvPr/>
         </p:nvSpPr>
@@ -50346,7 +50601,7 @@
       </p:sp>
       <p:sp>
         <p:nvSpPr>
-          <p:cNvPr id="140" name=""/>
+          <p:cNvPr id="142" name=""/>
           <p:cNvSpPr/>
           <p:nvPr/>
         </p:nvSpPr>
@@ -50406,7 +50661,7 @@
       </p:sp>
       <p:pic>
         <p:nvPicPr>
-          <p:cNvPr id="141" name="" descr=""/>
+          <p:cNvPr id="143" name="" descr=""/>
           <p:cNvPicPr/>
           <p:nvPr/>
         </p:nvPicPr>
@@ -50430,7 +50685,7 @@
       </p:pic>
       <p:sp>
         <p:nvSpPr>
-          <p:cNvPr id="142" name=""/>
+          <p:cNvPr id="144" name=""/>
           <p:cNvSpPr txBox="1"/>
           <p:nvPr/>
         </p:nvSpPr>
@@ -50477,7 +50732,7 @@
       </p:sp>
       <p:sp>
         <p:nvSpPr>
-          <p:cNvPr id="143" name=""/>
+          <p:cNvPr id="145" name=""/>
           <p:cNvSpPr/>
           <p:nvPr/>
         </p:nvSpPr>
@@ -50697,7 +50952,7 @@
       </p:sp>
       <p:sp>
         <p:nvSpPr>
-          <p:cNvPr id="144" name=""/>
+          <p:cNvPr id="146" name=""/>
           <p:cNvSpPr/>
           <p:nvPr/>
         </p:nvSpPr>
@@ -50916,7 +51171,7 @@
       </p:sp>
       <p:sp>
         <p:nvSpPr>
-          <p:cNvPr id="145" name=""/>
+          <p:cNvPr id="147" name=""/>
           <p:cNvSpPr txBox="1"/>
           <p:nvPr/>
         </p:nvSpPr>
@@ -50963,7 +51218,7 @@
       </p:sp>
       <p:sp>
         <p:nvSpPr>
-          <p:cNvPr id="146" name=""/>
+          <p:cNvPr id="148" name=""/>
           <p:cNvSpPr txBox="1"/>
           <p:nvPr/>
         </p:nvSpPr>
@@ -51010,7 +51265,7 @@
       </p:sp>
       <p:sp>
         <p:nvSpPr>
-          <p:cNvPr id="147" name=""/>
+          <p:cNvPr id="149" name=""/>
           <p:cNvSpPr txBox="1"/>
           <p:nvPr/>
         </p:nvSpPr>
@@ -51057,7 +51312,7 @@
       </p:sp>
       <p:sp>
         <p:nvSpPr>
-          <p:cNvPr id="148" name=""/>
+          <p:cNvPr id="150" name=""/>
           <p:cNvSpPr txBox="1"/>
           <p:nvPr/>
         </p:nvSpPr>
@@ -51104,7 +51359,7 @@
       </p:sp>
       <p:sp>
         <p:nvSpPr>
-          <p:cNvPr id="149" name=""/>
+          <p:cNvPr id="151" name=""/>
           <p:cNvSpPr txBox="1"/>
           <p:nvPr/>
         </p:nvSpPr>
@@ -51151,7 +51406,7 @@
       </p:sp>
       <p:sp>
         <p:nvSpPr>
-          <p:cNvPr id="150" name=""/>
+          <p:cNvPr id="152" name=""/>
           <p:cNvSpPr txBox="1"/>
           <p:nvPr/>
         </p:nvSpPr>
@@ -51198,7 +51453,7 @@
       </p:sp>
       <p:sp>
         <p:nvSpPr>
-          <p:cNvPr id="151" name=""/>
+          <p:cNvPr id="153" name=""/>
           <p:cNvSpPr txBox="1"/>
           <p:nvPr/>
         </p:nvSpPr>
@@ -51245,7 +51500,7 @@
       </p:sp>
       <p:sp>
         <p:nvSpPr>
-          <p:cNvPr id="152" name=""/>
+          <p:cNvPr id="154" name=""/>
           <p:cNvSpPr txBox="1"/>
           <p:nvPr/>
         </p:nvSpPr>
@@ -51292,7 +51547,7 @@
       </p:sp>
       <p:sp>
         <p:nvSpPr>
-          <p:cNvPr id="153" name=""/>
+          <p:cNvPr id="155" name=""/>
           <p:cNvSpPr txBox="1"/>
           <p:nvPr/>
         </p:nvSpPr>
@@ -51339,7 +51594,7 @@
       </p:sp>
       <p:sp>
         <p:nvSpPr>
-          <p:cNvPr id="154" name=""/>
+          <p:cNvPr id="156" name=""/>
           <p:cNvSpPr/>
           <p:nvPr/>
         </p:nvSpPr>
@@ -51559,7 +51814,7 @@
       </p:sp>
       <p:sp>
         <p:nvSpPr>
-          <p:cNvPr id="155" name=""/>
+          <p:cNvPr id="157" name=""/>
           <p:cNvSpPr/>
           <p:nvPr/>
         </p:nvSpPr>
@@ -51778,7 +52033,7 @@
       </p:sp>
       <p:sp>
         <p:nvSpPr>
-          <p:cNvPr id="156" name=""/>
+          <p:cNvPr id="158" name=""/>
           <p:cNvSpPr txBox="1"/>
           <p:nvPr/>
         </p:nvSpPr>
@@ -51825,7 +52080,7 @@
       </p:sp>
       <p:sp>
         <p:nvSpPr>
-          <p:cNvPr id="157" name=""/>
+          <p:cNvPr id="159" name=""/>
           <p:cNvSpPr/>
           <p:nvPr/>
         </p:nvSpPr>
@@ -51953,7 +52208,7 @@
       </p:sp>
       <p:sp>
         <p:nvSpPr>
-          <p:cNvPr id="158" name=""/>
+          <p:cNvPr id="160" name=""/>
           <p:cNvSpPr txBox="1"/>
           <p:nvPr/>
         </p:nvSpPr>
@@ -52000,7 +52255,7 @@
       </p:sp>
       <p:sp>
         <p:nvSpPr>
-          <p:cNvPr id="159" name=""/>
+          <p:cNvPr id="161" name=""/>
           <p:cNvSpPr/>
           <p:nvPr/>
         </p:nvSpPr>
@@ -52128,7 +52383,7 @@
       </p:sp>
       <p:sp>
         <p:nvSpPr>
-          <p:cNvPr id="160" name=""/>
+          <p:cNvPr id="162" name=""/>
           <p:cNvSpPr txBox="1"/>
           <p:nvPr/>
         </p:nvSpPr>
@@ -52175,7 +52430,7 @@
       </p:sp>
       <p:sp>
         <p:nvSpPr>
-          <p:cNvPr id="161" name=""/>
+          <p:cNvPr id="163" name=""/>
           <p:cNvSpPr/>
           <p:nvPr/>
         </p:nvSpPr>
@@ -52303,7 +52558,7 @@
       </p:sp>
       <p:sp>
         <p:nvSpPr>
-          <p:cNvPr id="162" name=""/>
+          <p:cNvPr id="164" name=""/>
           <p:cNvSpPr txBox="1"/>
           <p:nvPr/>
         </p:nvSpPr>
@@ -52350,7 +52605,7 @@
       </p:sp>
       <p:sp>
         <p:nvSpPr>
-          <p:cNvPr id="163" name=""/>
+          <p:cNvPr id="165" name=""/>
           <p:cNvSpPr/>
           <p:nvPr/>
         </p:nvSpPr>
@@ -52478,7 +52733,7 @@
       </p:sp>
       <p:sp>
         <p:nvSpPr>
-          <p:cNvPr id="164" name=""/>
+          <p:cNvPr id="166" name=""/>
           <p:cNvSpPr txBox="1"/>
           <p:nvPr/>
         </p:nvSpPr>
@@ -52525,7 +52780,7 @@
       </p:sp>
       <p:sp>
         <p:nvSpPr>
-          <p:cNvPr id="165" name=""/>
+          <p:cNvPr id="167" name=""/>
           <p:cNvSpPr txBox="1"/>
           <p:nvPr/>
         </p:nvSpPr>
@@ -52572,7 +52827,7 @@
       </p:sp>
       <p:sp>
         <p:nvSpPr>
-          <p:cNvPr id="166" name=""/>
+          <p:cNvPr id="168" name=""/>
           <p:cNvSpPr txBox="1"/>
           <p:nvPr/>
         </p:nvSpPr>
@@ -52619,7 +52874,7 @@
       </p:sp>
       <p:sp>
         <p:nvSpPr>
-          <p:cNvPr id="167" name=""/>
+          <p:cNvPr id="169" name=""/>
           <p:cNvSpPr txBox="1"/>
           <p:nvPr/>
         </p:nvSpPr>
@@ -52678,7 +52933,7 @@
       </p:sp>
       <p:sp>
         <p:nvSpPr>
-          <p:cNvPr id="168" name=""/>
+          <p:cNvPr id="170" name=""/>
           <p:cNvSpPr txBox="1"/>
           <p:nvPr/>
         </p:nvSpPr>
@@ -52725,7 +52980,7 @@
       </p:sp>
       <p:sp>
         <p:nvSpPr>
-          <p:cNvPr id="169" name=""/>
+          <p:cNvPr id="171" name=""/>
           <p:cNvSpPr/>
           <p:nvPr/>
         </p:nvSpPr>
@@ -52941,7 +53196,7 @@
       </p:sp>
       <p:sp>
         <p:nvSpPr>
-          <p:cNvPr id="170" name=""/>
+          <p:cNvPr id="172" name=""/>
           <p:cNvSpPr txBox="1"/>
           <p:nvPr/>
         </p:nvSpPr>
@@ -52988,7 +53243,7 @@
       </p:sp>
       <p:sp>
         <p:nvSpPr>
-          <p:cNvPr id="171" name=""/>
+          <p:cNvPr id="173" name=""/>
           <p:cNvSpPr txBox="1"/>
           <p:nvPr/>
         </p:nvSpPr>
@@ -53065,7 +53320,7 @@
       </p:grpSpPr>
       <p:sp>
         <p:nvSpPr>
-          <p:cNvPr id="172" name=""/>
+          <p:cNvPr id="174" name=""/>
           <p:cNvSpPr/>
           <p:nvPr/>
         </p:nvSpPr>
@@ -53125,7 +53380,7 @@
       </p:sp>
       <p:sp>
         <p:nvSpPr>
-          <p:cNvPr id="173" name=""/>
+          <p:cNvPr id="175" name=""/>
           <p:cNvSpPr/>
           <p:nvPr/>
         </p:nvSpPr>
@@ -53185,7 +53440,7 @@
       </p:sp>
       <p:sp>
         <p:nvSpPr>
-          <p:cNvPr id="174" name=""/>
+          <p:cNvPr id="176" name=""/>
           <p:cNvSpPr/>
           <p:nvPr/>
         </p:nvSpPr>
@@ -53245,7 +53500,7 @@
       </p:sp>
       <p:pic>
         <p:nvPicPr>
-          <p:cNvPr id="175" name="" descr=""/>
+          <p:cNvPr id="177" name="" descr=""/>
           <p:cNvPicPr/>
           <p:nvPr/>
         </p:nvPicPr>
@@ -53269,7 +53524,7 @@
       </p:pic>
       <p:sp>
         <p:nvSpPr>
-          <p:cNvPr id="176" name=""/>
+          <p:cNvPr id="178" name=""/>
           <p:cNvSpPr txBox="1"/>
           <p:nvPr/>
         </p:nvSpPr>
@@ -53316,7 +53571,7 @@
       </p:sp>
       <p:sp>
         <p:nvSpPr>
-          <p:cNvPr id="177" name=""/>
+          <p:cNvPr id="179" name=""/>
           <p:cNvSpPr txBox="1"/>
           <p:nvPr/>
         </p:nvSpPr>
@@ -53363,7 +53618,7 @@
       </p:sp>
       <p:sp>
         <p:nvSpPr>
-          <p:cNvPr id="178" name=""/>
+          <p:cNvPr id="180" name=""/>
           <p:cNvSpPr txBox="1"/>
           <p:nvPr/>
         </p:nvSpPr>
@@ -53410,7 +53665,7 @@
       </p:sp>
       <p:sp>
         <p:nvSpPr>
-          <p:cNvPr id="179" name=""/>
+          <p:cNvPr id="181" name=""/>
           <p:cNvSpPr txBox="1"/>
           <p:nvPr/>
         </p:nvSpPr>
@@ -53457,7 +53712,7 @@
       </p:sp>
       <p:sp>
         <p:nvSpPr>
-          <p:cNvPr id="180" name=""/>
+          <p:cNvPr id="182" name=""/>
           <p:cNvSpPr txBox="1"/>
           <p:nvPr/>
         </p:nvSpPr>
@@ -53504,7 +53759,7 @@
       </p:sp>
       <p:sp>
         <p:nvSpPr>
-          <p:cNvPr id="181" name=""/>
+          <p:cNvPr id="183" name=""/>
           <p:cNvSpPr/>
           <p:nvPr/>
         </p:nvSpPr>
@@ -53720,7 +53975,7 @@
       </p:sp>
       <p:sp>
         <p:nvSpPr>
-          <p:cNvPr id="182" name=""/>
+          <p:cNvPr id="184" name=""/>
           <p:cNvSpPr txBox="1"/>
           <p:nvPr/>
         </p:nvSpPr>
@@ -53767,7 +54022,7 @@
       </p:sp>
       <p:sp>
         <p:nvSpPr>
-          <p:cNvPr id="183" name=""/>
+          <p:cNvPr id="185" name=""/>
           <p:cNvSpPr txBox="1"/>
           <p:nvPr/>
         </p:nvSpPr>
@@ -53844,7 +54099,7 @@
       </p:grpSpPr>
       <p:sp>
         <p:nvSpPr>
-          <p:cNvPr id="184" name=""/>
+          <p:cNvPr id="186" name=""/>
           <p:cNvSpPr/>
           <p:nvPr/>
         </p:nvSpPr>
@@ -53904,7 +54159,7 @@
       </p:sp>
       <p:sp>
         <p:nvSpPr>
-          <p:cNvPr id="185" name=""/>
+          <p:cNvPr id="187" name=""/>
           <p:cNvSpPr/>
           <p:nvPr/>
         </p:nvSpPr>
@@ -53964,7 +54219,7 @@
       </p:sp>
       <p:sp>
         <p:nvSpPr>
-          <p:cNvPr id="186" name=""/>
+          <p:cNvPr id="188" name=""/>
           <p:cNvSpPr/>
           <p:nvPr/>
         </p:nvSpPr>
@@ -54024,7 +54279,7 @@
       </p:sp>
       <p:pic>
         <p:nvPicPr>
-          <p:cNvPr id="187" name="" descr=""/>
+          <p:cNvPr id="189" name="" descr=""/>
           <p:cNvPicPr/>
           <p:nvPr/>
         </p:nvPicPr>
@@ -54048,7 +54303,7 @@
       </p:pic>
       <p:sp>
         <p:nvSpPr>
-          <p:cNvPr id="188" name=""/>
+          <p:cNvPr id="190" name=""/>
           <p:cNvSpPr txBox="1"/>
           <p:nvPr/>
         </p:nvSpPr>
@@ -54095,7 +54350,7 @@
       </p:sp>
       <p:sp>
         <p:nvSpPr>
-          <p:cNvPr id="189" name=""/>
+          <p:cNvPr id="191" name=""/>
           <p:cNvSpPr txBox="1"/>
           <p:nvPr/>
         </p:nvSpPr>
@@ -54142,7 +54397,7 @@
       </p:sp>
       <p:sp>
         <p:nvSpPr>
-          <p:cNvPr id="190" name=""/>
+          <p:cNvPr id="192" name=""/>
           <p:cNvSpPr txBox="1"/>
           <p:nvPr/>
         </p:nvSpPr>
@@ -54189,7 +54444,7 @@
       </p:sp>
       <p:sp>
         <p:nvSpPr>
-          <p:cNvPr id="191" name=""/>
+          <p:cNvPr id="193" name=""/>
           <p:cNvSpPr txBox="1"/>
           <p:nvPr/>
         </p:nvSpPr>
@@ -54236,7 +54491,7 @@
       </p:sp>
       <p:sp>
         <p:nvSpPr>
-          <p:cNvPr id="192" name=""/>
+          <p:cNvPr id="194" name=""/>
           <p:cNvSpPr txBox="1"/>
           <p:nvPr/>
         </p:nvSpPr>
@@ -54283,7 +54538,7 @@
       </p:sp>
       <p:sp>
         <p:nvSpPr>
-          <p:cNvPr id="193" name=""/>
+          <p:cNvPr id="195" name=""/>
           <p:cNvSpPr txBox="1"/>
           <p:nvPr/>
         </p:nvSpPr>
@@ -54330,7 +54585,7 @@
       </p:sp>
       <p:sp>
         <p:nvSpPr>
-          <p:cNvPr id="194" name=""/>
+          <p:cNvPr id="196" name=""/>
           <p:cNvSpPr/>
           <p:nvPr/>
         </p:nvSpPr>
@@ -54550,7 +54805,7 @@
       </p:sp>
       <p:sp>
         <p:nvSpPr>
-          <p:cNvPr id="195" name=""/>
+          <p:cNvPr id="197" name=""/>
           <p:cNvSpPr/>
           <p:nvPr/>
         </p:nvSpPr>
@@ -54769,7 +55024,7 @@
       </p:sp>
       <p:sp>
         <p:nvSpPr>
-          <p:cNvPr id="196" name=""/>
+          <p:cNvPr id="198" name=""/>
           <p:cNvSpPr txBox="1"/>
           <p:nvPr/>
         </p:nvSpPr>
@@ -54816,7 +55071,7 @@
       </p:sp>
       <p:sp>
         <p:nvSpPr>
-          <p:cNvPr id="197" name=""/>
+          <p:cNvPr id="199" name=""/>
           <p:cNvSpPr txBox="1"/>
           <p:nvPr/>
         </p:nvSpPr>
@@ -54863,7 +55118,7 @@
       </p:sp>
       <p:sp>
         <p:nvSpPr>
-          <p:cNvPr id="198" name=""/>
+          <p:cNvPr id="200" name=""/>
           <p:cNvSpPr/>
           <p:nvPr/>
         </p:nvSpPr>
@@ -55079,7 +55334,7 @@
       </p:sp>
       <p:sp>
         <p:nvSpPr>
-          <p:cNvPr id="199" name=""/>
+          <p:cNvPr id="201" name=""/>
           <p:cNvSpPr txBox="1"/>
           <p:nvPr/>
         </p:nvSpPr>
@@ -55126,7 +55381,7 @@
       </p:sp>
       <p:sp>
         <p:nvSpPr>
-          <p:cNvPr id="200" name=""/>
+          <p:cNvPr id="202" name=""/>
           <p:cNvSpPr txBox="1"/>
           <p:nvPr/>
         </p:nvSpPr>
